--- a/slides/experiments-and-ab-testing_WT26-27.pptx
+++ b/slides/experiments-and-ab-testing_WT26-27.pptx
@@ -3224,7 +3224,7 @@
           <a:lstStyle/>
           <a:p>
             <a:r>
-              <a:t>One sentence per takeaway. Seeing is not causing: compare random groups, not people who got something with those who did not. A coin flip makes A and B alike, so B − A is the effect; report it in percentage points with its confidence interval. Plan the sample size before the send and check the split before the result. A factorial design tests two changes at once; with an interaction, report the simple effects. Read interactions in percentage points and test a moderator before you claim that the market matters. Next: run ab_testing.qmd from top to bottom; it reproduces every number of the deck.</a:t>
+              <a:t>One sentence per takeaway. Seeing is not causing: compare random groups, not people who got something with those who did not. A coin flip makes A and B alike, so B − A is the effect; report it in percentage points with its confidence interval. Plan the sample size before the send and check the split before the result. A factorial design tests two changes at once; with an interaction, report the simple effects. Read interactions in percentage points and test a moderator before you claim that the market matters. Next: run ab_testing.qmd from top to bottom; it reproduces the results on the slides.</a:t>
             </a:r>
           </a:p>
         </p:txBody>
@@ -49510,7 +49510,7 @@
                   <a:schemeClr val="bg1"/>
                 </a:solidFill>
               </a:rPr>
-              <a:t>run sessions/01-foundations/ab_testing.qmd; it reproduces every number of the deck.</a:t>
+              <a:t>run sessions/01-foundations/ab_testing.qmd (or ab_testing.py); it reproduces the results on the slides.</a:t>
             </a:r>
           </a:p>
         </p:txBody>

--- a/slides/experiments-and-ab-testing_WT26-27.pptx
+++ b/slides/experiments-and-ab-testing_WT26-27.pptx
@@ -1264,7 +1264,7 @@
           <a:lstStyle/>
           <a:p>
             <a:r>
-              <a:t>The logic of the test in four steps. First, what chance alone looks like: we simulate 2,000 A/A tests, the same e-mail to two groups of 20,000 with a click rate of 3.3 %; the differences scatter around zero with a standard deviation of about 0.18 pp. Second, our +0.60 pp lies far outside that cloud: only 0.15 % of the chance results are as large. Third, the p-value is about that share: how often chance alone gives a gap at least this large (0.15 % here, 0.13 % from the z-test: p 0.0013, z 3.21). Fourth, the 95 % confidence interval, 0.23 to 0.97 pp, is the range of effect sizes the data are compatible with. The guardrail rose by about 0.1 pp (0.31 % to 0.41 %, p 0.079): within noise, but watch it in the next send. Slide 17 uses the same picture as a check of the tool. In the qmd: Steps 2 and 4.</a:t>
+              <a:t>The logic of the test in four steps. First, what chance alone looks like: we simulate 2,000 A/A tests, the same e-mail to two groups of 20,000 with a click rate of 3.3 %; the differences scatter around zero with a standard deviation of about 0.18 pp. Second, our +0.60 pp lies far outside that cloud: only 0.15 % of the chance results are as large. Third, the p-value is about that share: how often chance alone gives a gap at least this large (0.15 % here, 0.13 % from the regression clicked ~ split: p 0.0013, t 3.21). Fourth, the 95 % confidence interval, 0.23 to 0.97 pp, is the range of effect sizes the data are compatible with. The guardrail rose by about 0.1 pp (0.31 % to 0.41 %, p 0.079): within noise, but watch it in the next send. Slide 17 uses the same picture as a check of the tool. In the qmd: Step 2; the A/A simulation is drawn for the slides only.</a:t>
             </a:r>
           </a:p>
         </p:txBody>
@@ -1334,7 +1334,7 @@
           <a:lstStyle/>
           <a:p>
             <a:r>
-              <a:t>Power is the chance that the test detects a true effect of a given size. Here: if B really adds 0.6 pp (3.3 to 3.9 %), how often would a test with n customers per version give p below 0.05? With 15,107 per version the chance is 80 %, the usual target. Our test had 20,000 per version: power 89.7 %. With 2,000 per version it would be only 17.5 %: most real effects of this size would be missed. Half the effect (0.3 pp) needs about four times the customers (58,072). Do not peek: checking every day and stopping at the first p below 0.05 raises the false alarms well above 5 %. In the qmd: Steps 2 and 4.</a:t>
+              <a:t>Power is the chance that the test detects a true effect of a given size. Here: if B really adds 0.6 pp (3.3 to 3.9 %), how often would a test with n customers per version give p below 0.05? With 15,107 per version the chance is 80 %, the usual target. Our test had 20,000 per version: power 89.7 %. With 2,000 per version it would be only 17.5 %: most real effects of this size would be missed. Half the effect (0.3 pp) needs about four times the customers (58,072). Do not peek: checking every day and stopping at the first p below 0.05 raises the false alarms well above 5 %. In the qmd: the optional sample-size line of Step 2.</a:t>
             </a:r>
           </a:p>
         </p:txBody>
@@ -1404,7 +1404,7 @@
           <a:lstStyle/>
           <a:p>
             <a:r>
-              <a:t>Before reading any result, check the split. The sample ratio mismatch (SRM) test is a chi-square test of the counts against the plan (scipy: stats.chisquare). Our test: 20,000 vs 20,000, SRM p 1.000. The invented broken split, 20,000 vs 19,300, looks harmless in the chart but gives p 0.0004: 700 customers of B went missing, perhaps through a filter, a bounce list or a tracking bug, and the missing ones are rarely a random set. SRMs are not rare: about 6 % of Microsoft experiments had one (Fabijan et al. 2019 [V]). An A/A test sends the same e-mail to both groups and checks the whole pipeline: about 5 % come out “significant” by chance, 5.9 % in our 2,000 runs (the histogram of slide 15). In the qmd: Steps 1 and 4.</a:t>
+              <a:t>Before reading any result, check the split. The sample ratio mismatch (SRM) test is a chi-square test of the counts against the plan. Our test: 20,000 vs 20,000, SRM p 1.000. The invented broken split, 20,000 vs 19,300, looks harmless in the chart but gives p 0.0004: 700 customers of B went missing, perhaps through a filter, a bounce list or a tracking bug, and the missing ones are rarely a random set. SRMs are not rare: about 6 % of Microsoft experiments had one (Fabijan et al. 2019 [V]). An A/A test sends the same e-mail to both groups and checks the whole pipeline: about 5 % come out “significant” by chance, 5.9 % in our 2,000 runs (the histogram of slide 15). In the qmd: Step 1 counts the customers per group; our tool split each market exactly 50:50.</a:t>
             </a:r>
           </a:p>
         </p:txBody>
@@ -1474,7 +1474,7 @@
           <a:lstStyle/>
           <a:p>
             <a:r>
-              <a:t>Split by device, B adds +0.92 pp on mobile (p &lt; 0.001) and only +0.13 pp on desktop (p 0.661). A plausible story: the inbox on a phone shows only a few characters, so the name is what customers see first; this is an illustration, not a finding. The device is a moderator: it changes the size of the effect. The interaction is a difference of two differences, +0.92 − 0.13 ≈ +0.79 pp (from unrounded values, OLS clicked ~ B * device, p 0.038). Careful: with many segments some differ by chance, and the test was planned for the total effect, not for segments. In the qmd: Step 5; Part 3 builds this idea into the design (slides 22 and 27).</a:t>
+              <a:t>Split by device, B adds +0.92 pp on mobile (p &lt; 0.001) and only +0.13 pp on desktop (p 0.661). A plausible story: the inbox on a phone shows only a few characters, so the name is what customers see first; this is an illustration, not a finding. The device is a moderator: it changes the size of the effect. The interaction is a difference of two differences, +0.92 − 0.13 ≈ +0.79 pp (from unrounded values, OLS clicked ~ split * mobile, p 0.038). Careful: with many segments some differ by chance, and the test was planned for the total effect, not for segments. In the qmd: Step 2; Part 3 builds this idea into the design (slides 22 and 27).</a:t>
             </a:r>
           </a:p>
         </p:txBody>
@@ -1964,7 +1964,7 @@
           <a:lstStyle/>
           <a:p>
             <a:r>
-              <a:t>Everything comes from the four click rates of slide 23: a simple effect compares two cells within one level of the other factor (+0.40 pp without, +1.42 pp with the discount), the main effect is their average (+0.91 pp) and the interaction their difference (+1.02 pp). The discount, the same way: +1.59 and +2.61 pp, main effect +2.10 pp, and again an interaction of +1.02 pp, so the interaction is the same number whichever factor you start from. The main effect is also the plain comparison of all 20,000 first-name customers with all 20,000 generic ones (5.215 % vs 4.305 %); the rates rounded as in the numbers file (5.22 % and 4.30 %) would give 0.92, so subtract unrounded rates. Main effects are what a factorial buys you when there is no interaction; with one, they average two different effects. Ask the room to check one line with a calculator (Step 6 of the sample code).</a:t>
+              <a:t>Everything comes from the four click rates of slide 23: a simple effect compares two cells within one level of the other factor (+0.40 pp without, +1.42 pp with the discount), the main effect is their average (+0.91 pp) and the interaction their difference (+1.02 pp). The discount, the same way: +1.59 and +2.61 pp, main effect +2.10 pp, and again an interaction of +1.02 pp, so the interaction is the same number whichever factor you start from. The main effect is also the plain comparison of all 20,000 first-name customers with all 20,000 generic ones (5.215 % vs 4.305 %); the rates rounded as in the numbers file (5.22 % and 4.30 %) would give 0.92, so subtract unrounded rates. Main effects are what a factorial buys you when there is no interaction; with one, they average two different effects. Ask the room to check one line with a calculator (the four rates: the cell table of Step 3 of the sample code).</a:t>
             </a:r>
           </a:p>
         </p:txBody>
@@ -2034,7 +2034,7 @@
           <a:lstStyle/>
           <a:p>
             <a:r>
-              <a:t>We fit an ordinary regression to the 0/1 clicks, the linear probability model: coefficients times 100 are percentage points, and with all four cells in the model it reproduces the four click rates exactly. Each coefficient is a cell difference from slide 24: the intercept is the control (3.51 %), 'personal' the name without discount (+0.40 pp, p 0.183), 'discount' the discount for the generic e-mail, the product term the interaction (+1.02 pp, p 0.017). The two-way ANOVA splits the variation into the two main effects and the interaction (F = signal / noise); use anova_lm(…, typ=2) or effect coding (−0.5 / +0.5, which gives the main effects +0.91 and +2.10 pp directly), because Type III with 0/1 dummies tests the simple effect instead (F 1.77, p 0.183). Controlling for the market changes nothing (+1.02 pp, p 0.016). Do not drop an interaction because p &gt; 0.05 and refit the short model: 19 of 27 factorial experiments in top economics journals used the short model (Muralidharan, Romero &amp; Wüthrich 2025, Review of Economics and Statistics); code in Steps 3 and 6.</a:t>
+              <a:t>We fit an ordinary regression to the 0/1 clicks, the linear probability model: coefficients times 100 are percentage points, and with all four cells in the model it reproduces the four click rates exactly. Each coefficient is a cell difference from slide 24: the intercept is the control (3.51 %), 'personal' the name without discount (+0.40 pp, p 0.183), 'discount' the discount for the generic e-mail, the product term the interaction (+1.02 pp, p 0.016). The two-way ANOVA splits the variation into the two main effects and the interaction (F = signal / noise); use anova_lm(…, typ=2) or effect coding (−0.5 / +0.5, which gives the main effects +0.91 and +2.10 pp directly), because Type III with 0/1 dummies tests the simple effect instead (F 1.77, p 0.183). Controlling for the market changes nothing (+1.02 pp, p 0.016). Do not drop an interaction because p &gt; 0.05 and refit the short model: 19 of 27 factorial experiments in top economics journals used the short model (Muralidharan, Romero &amp; Wüthrich 2025, Review of Economics and Statistics). The regression is Step 3 of the sample code; the ANOVA table is for the argument here and is not in it.</a:t>
             </a:r>
           </a:p>
         </p:txBody>
@@ -2104,7 +2104,7 @@
           <a:lstStyle/>
           <a:p>
             <a:r>
-              <a:t>The same four cells on two scales: in click rates the name adds +0.40 and +1.42 pp, an interaction of +1.02 pp (p 0.017, significant at 5 %); in log-odds, the scale of the logit, it adds +0.11 and +0.26, a product term of 0.149 (odds ratio 1.16, p 0.124). Why they differ: the discount raises the base rate, and the same odds lift adds more pp at 5.10 % than at 3.51 %; the logit removes that part, so less interaction is left (+0.15 in log-odds). The logit fits the four rates exactly, so its predicted probabilities still give +1.02 pp; only the product term asks another question, whether the odds ratio of the name is bigger with the discount, and here the answer is 'not clearly'. In nonlinear models the product term is not the interaction in probabilities (Ai &amp; Norton 2003, Economics Letters [V]); report the second difference of predicted probabilities (Mize 2019, Sociological Science), as in the logit deck, slide 21. Code: Step 7 of the sample code.</a:t>
+              <a:t>The same four cells on two scales: in click rates the name adds +0.40 and +1.42 pp, an interaction of +1.02 pp (p 0.016, significant at 5 %); in log-odds, the scale of the logit, it adds +0.11 and +0.26, a product term of 0.149 (odds ratio 1.16, p 0.124). Why they differ: the discount raises the base rate, and the same odds lift adds more pp at 5.10 % than at 3.51 %; the logit removes that part, so less interaction is left (+0.15 in log-odds). The logit fits the four rates exactly, so its predicted probabilities still give +1.02 pp; only the product term asks another question, whether the odds ratio of the name is bigger with the discount, and here the answer is 'not clearly'. In nonlinear models the product term is not the interaction in probabilities (Ai &amp; Norton 2003, Economics Letters [V]); report the second difference of predicted probabilities (Mize 2019, Sociological Science), as in the logit deck, slide 21. The logit is shown for the argument only; the sample code stays with OLS.</a:t>
             </a:r>
           </a:p>
         </p:txBody>
@@ -2174,7 +2174,7 @@
           <a:lstStyle/>
           <a:p>
             <a:r>
-              <a:t>A moderator is a variable that changes the size of an effect, like the device on slide 18. In Germany the interaction is +0.34 pp (p 0.546), in Spain +1.70 pp (p 0.008), and the tempting conclusion is that it works in Spain, not in Germany; but the test of the moderator, the three-way interaction personal × discount × country, gives a difference of +1.36 pp, p 0.110, within chance. Be honest about our data: they were simulated with the same true interaction (+1.0 pp) in both markets, so the gap is sampling noise, and so is Spain's name-alone effect of −0.06 pp. Each market has half the customers, so its standard error is larger (0.56 and 0.64 vs 0.43 pp), and testing each subgroup separately often gives 'significant in one subgroup only' without a true difference (Brookes et al. 2004, Journal of Clinical Epidemiology: 7–64 % of simulations). For external validity (slide 19), still repeat the 2 × 2 in each market before a roll-out (Step 8 of the sample code).</a:t>
+              <a:t>A moderator is a variable that changes the size of an effect, like the device on slide 18. In Germany the interaction is +0.34 pp (p 0.546), in Spain +1.70 pp (p 0.008), and the tempting conclusion is that it works in Spain, not in Germany; but the test of the moderator, the three-way interaction personal × discount × country, gives a difference of +1.36 pp, p 0.110, within chance. Be honest about our data: they were simulated with the same true interaction (+1.0 pp) in both markets, so the gap is sampling noise, and so is Spain's name-alone effect of −0.06 pp. Each market has half the customers, so its standard error is larger (0.56 and 0.64 vs 0.43 pp), and testing each subgroup separately often gives 'significant in one subgroup only' without a true difference (Brookes et al. 2004, Journal of Clinical Epidemiology: 7–64 % of simulations). For external validity (slide 19), still repeat the 2 × 2 in each market before a roll-out. The sample code fits the three-way term with the dummy spain in an optional chunk of Step 3.</a:t>
             </a:r>
           </a:p>
         </p:txBody>
@@ -2314,7 +2314,7 @@
           <a:lstStyle/>
           <a:p>
             <a:r>
-              <a:t>Part 4 repeats the analyses of Parts 2 and 3 in Python, in three steps: load and check the split; the difference with the z-test, the interval and the sample size; and the 2 × 2 regression with its plot. The code on the next slides is complete and comes from sessions/01-foundations/ab_testing.qmd, Steps 1 to 3: open it in Positron and run it cell by cell. The qmd has eight steps and reproduces every number of this deck, including the A/A tests, the power curve, the device and market checks and the logit.</a:t>
+              <a:t>Part 4 repeats the analyses of Parts 2 and 3 in Python, in three steps: load the data, code the dummies and check the split; the effect of B as an OLS regression on the dummy split, with the device as a moderator; and the 2 × 2 as an OLS regression with its interaction plot. One method for every effect: OLS on 0/1 dummies, coefficient times 100 is percentage points. The code on the next slides is complete and comes from sessions/01-foundations/ab_testing.qmd, Steps 1 to 3: open it in Positron and run it cell by cell. The qmd adds a few short chunks: the guardrail, the effect per device, the market as a moderator, the sample size of slide 16 and the cell table of slide 23.</a:t>
             </a:r>
           </a:p>
         </p:txBody>
@@ -2454,7 +2454,7 @@
           <a:lstStyle/>
           <a:p>
             <a:r>
-              <a:t>The import lines are all at the top of ab_testing.qmd, so you write them once. One trap: you install great-tables with a hyphen but import great_tables with an underscore. proportions_ztest and confint_proportions_2indep live in statsmodels.stats.proportion, NormalIndPower in statsmodels.stats.power and anova_lm in statsmodels.stats.anova. smf.ols works as in the regression session: a formula, the data, fit; the star in personal * discount adds the product term for you.</a:t>
+              <a:t>The import lines are at the top of ab_testing.qmd, so you write them once. smf.ols works as in the regression session: a formula, the data, fit. Every effect is the coefficient of a 0/1 dummy, so params times 100 is percentage points, pvalues gives the p-values and conf_int() the 95 % confidence interval. The star in split * mobile adds both dummies and their product term for you. A dummy is made with polars: compare a column with one value and cast the true/false result to 0/1 with .cast(pl.Int64). NormalIndPower and proportion_effectsize, in statsmodels.stats.power and statsmodels.stats.proportion, are only for the optional sample-size line. great_tables is optional for report tables; one trap: you install great-tables with a hyphen but import great_tables with an underscore.</a:t>
             </a:r>
           </a:p>
         </p:txBody>
@@ -2524,7 +2524,7 @@
           <a:lstStyle/>
           <a:p>
             <a:r>
-              <a:t>The qmd sits in sessions/01-foundations, so the data file is two folders up. group_by and agg give one row per version: the number of customers, the clicks and the click rate; the mean of a 0/1 column is a share, so the 0.03325 of version A is 3.33 %. stats.chisquare tests the two counts against an even split: 20,000 and 20,000 give SRM p 1.000, so the split is as planned. The qmd adds the balance check by device and country (slide 10) and the same check for the 2 × 2 file, where the four cells also give SRM p 1.000. Ask the room: what do you do when the SRM p is below 0.001?</a:t>
+              <a:t>The qmd sits in sessions/01-foundations, so the data file is two folders up. Dummy coding: a dummy is a 0/1 column. (pl.col("device") == "mobile") is true or false, and .cast(pl.Int64) turns it into 1 or 0; spain works the same way for the country. The data already hold the dummy split: 0 for the control, e-mail A, and 1 for the test, e-mail B. group_by and agg give one row per group: the number of customers and two means. The mean of a 0/1 column is a share, so the 0.03325 of version A is a click rate of 3.33 %, and 59.5 % of group A read on mobile (59.9 % in B). The split check: 20,000 and 20,000 customers, as planned, and the groups are alike (slide 10). Ask the room: what do you do when the counts are far from the plan?</a:t>
             </a:r>
           </a:p>
         </p:txBody>
@@ -2594,7 +2594,7 @@
           <a:lstStyle/>
           <a:p>
             <a:r>
-              <a:t>Index 0 is version A and index 1 is version B, because the table of Step 1 is sorted by version. The test and the interval both take B first, so the sign is B − A: +0.60 pp, z 3.21, p 0.0013. confint_proportions_2indep returns shares; times 100 gives percentage points, the interval [0.23, 0.97] pp. solve_power returns 15,106.9 customers per version for 3.3 % → 3.9 %; round up to 15,107, which our 20,000 per version exceed. The qmd also checks the guardrail, unsubscribes (+0.105 pp, p 0.079), and draws the power curve of slide 16 (Step 4).</a:t>
+              <a:t>One regression answers the A/B question. With the dummy split, the intercept is the click rate of e-mail A (3.325 pp, 3.33 %) and the coefficient of split is the difference B − A, +0.60 pp; times 100 turns probability units into percentage points. p is 0.0013, and the 95 % confidence interval, [0.23, 0.97] pp, is the range of effects the data are compatible with (slide 15). OLS on a 0/1 outcome is a linear probability model; with groups this large it gives the same answer as a two-proportion z-test. The moderator: split * mobile expands to split + mobile + split:mobile. Now split is the effect of B on desktop, the reference group (+0.125 pp, p 0.6710), and split:mobile the extra effect on mobile (+0.792 pp, p 0.0376), the interaction of slide 18. The qmd adds the guardrail, unsubscribed ~ split (+0.105 pp, p 0.079), the effect per device and the optional sample size: 15,106.9, so 15,107 customers per version for 3.3 % → 3.9 %.</a:t>
             </a:r>
           </a:p>
         </p:txBody>
@@ -2664,7 +2664,7 @@
           <a:lstStyle/>
           <a:p>
             <a:r>
-              <a:t>personal * discount expands to personal + discount + personal:discount: two main terms and the product term. Times 100 turns probability units into percentage points. The intercept is the control cell (3.51 %), personal is the name's effect without the discount (+0.40 pp), discount is the discount's effect with the generic subject line (+1.59 pp), and the product term is the extra effect when both come together (+1.02 pp, p 0.017). The plot uses the four cell means of slide 23: discount on the x-axis, one line per subject line; lines that fan out show the interaction. The qmd adds the cell table, the two-way ANOVA (Step 6), the logit (Step 7) and the markets (Step 8).</a:t>
+              <a:t>personal * discount expands to personal + discount + personal:discount: the two dummies and their product term. Times 100 turns probability units into percentage points. The intercept is the control cell (3.51 %), personal is the name's effect without the discount (+0.40 pp, p 0.183), discount is the discount's effect with the generic subject line (+1.59 pp), and the product term is the extra effect when both come together (+1.02 pp, p 0.0165). The plot uses the four cell means of slide 23: discount on the x-axis, one line per subject line; lines that fan out show the interaction. The qmd adds the cell table with the unsubscribe rates and, as an optional chunk, the market as a moderator (personal * discount * spain, slide 27).</a:t>
             </a:r>
           </a:p>
         </p:txBody>
@@ -2734,7 +2734,7 @@
           <a:lstStyle/>
           <a:p>
             <a:r>
-              <a:t>The last part hands the method over to you. First a five-question online quiz on the whole session, then the answers. Then you work in pairs on the same two files, email_ab.csv and email_factorial.csv, with the code of ab_testing.qmd. Finally you repeat the tasks with Posit Assistant and check its numbers against your own.</a:t>
+              <a:t>The last part hands the method over to you. First a five-question online quiz on the whole session, then the answers. Then you work in pairs on the same two files, email_ab.csv and email_factorial.csv, with the code of ab_testing.qmd: dummies and OLS regressions, as in Part 4. Finally you repeat the tasks with Posit Assistant and check its numbers against your own.</a:t>
             </a:r>
           </a:p>
         </p:txBody>
@@ -2944,7 +2944,7 @@
           <a:lstStyle/>
           <a:p>
             <a:r>
-              <a:t>Work in pairs with the packages for 35 minutes, then five minutes of answers in the plenary, then ten minutes with Posit Assistant (next slide). The file ab_exercise.qmd has the setup cell and an empty cell per task; the step numbers point to the code to reuse in ab_testing.qmd. Check after ten minutes that every pair has the split per market. Fast pairs do the extra task: the market as a moderator of the 2 × 2 interaction (Step 8). Debrief: which e-mail would you send, and which number convinces the CRM manager?</a:t>
+              <a:t>Work in pairs with the packages for 35 minutes, then five minutes of answers in the plenary, then ten minutes with Posit Assistant (next slide). The file ab_exercise.qmd has the setup cell and an empty cell per task; the step numbers point to the code to reuse in ab_testing.qmd. Every test is an OLS regression on 0/1 dummies, with no loops: Germany and Spain are two plain blocks. Check after ten minutes that every pair has the split per market. Fast pairs do the extra task: the market as a moderator of the 2 × 2 interaction (the optional chunk of Step 3). Debrief: which e-mail would you send, and which number convinces the CRM manager?</a:t>
             </a:r>
           </a:p>
         </p:txBody>
@@ -3014,7 +3014,7 @@
           <a:lstStyle/>
           <a:p>
             <a:r>
-              <a:t>The routine of the earlier sessions. Solve the tasks with your own code first and keep the setup cell run, so Posit Assistant sees ab and fa. Open the chat from the Posit Assistant icon in the activity bar, type @ab_exercise.qmd and give one task per prompt; ask it to explain, not only to compute. Typical slips to watch: a relative per cent reported as percentage points, the sign A − B instead of B − A, the personal coefficient read as the main effect, the logit product term read as “no interaction”, and the split check forgotten. Stay in Normal mode and read every edit before you accept it. The prompts match the Posit Assistant section of ab_exercise.qmd.</a:t>
+              <a:t>The routine of the earlier sessions. Solve the tasks with your own code first and keep the setup cell run, so Posit Assistant sees ab and fa. Open the chat from the Posit Assistant icon in the activity bar, type @ab_exercise.qmd and give one task per prompt; ask it to explain, not only to compute. Typical slips to watch: a relative per cent reported as percentage points, the sign A − B instead of B − A (a dummy coded the other way round), the personal coefficient read as the main effect, a z-test or a logit instead of the OLS regression, loops where two plain blocks are clearer, and the split check forgotten. Stay in Normal mode and read every edit before you accept it. The prompts match the Posit Assistant section of ab_exercise.qmd.</a:t>
             </a:r>
           </a:p>
         </p:txBody>
@@ -3434,7 +3434,7 @@
           <a:lstStyle/>
           <a:p>
             <a:r>
-              <a:t>Each row is one customer who got the e-mail; the two right-hand columns show one real row of each file (customer 8 and customer 100044). The outcome is clicked, 0 or 1. Version is what we changed in the A/B test; personal and discount are the two changes of the second test (Part 3). Device and country let us ask later: for whom does it work? Question for the room: which column is the independent variable and which the dependent one?</a:t>
+              <a:t>Each row is one customer who got the e-mail; the two right-hand columns show one real row of each file (customer 8 and customer 100044). The outcome is clicked, 0 or 1. Version is what we changed in the A/B test, and split is the same information as a 0/1 dummy (0 = control, e-mail A; 1 = test, e-mail B), ready for the regression of Part 4; personal and discount are the two dummies of the second test (Part 3). Device and country let us ask later: for whom does it work? Question for the room: which column is the independent variable and which the dependent one?</a:t>
             </a:r>
           </a:p>
         </p:txBody>
@@ -24216,7 +24216,7 @@
                   <a:schemeClr val="tx1"/>
                 </a:solidFill>
               </a:rPr>
-              <a:t>polars, scipy, statsmodels, plotnine</a:t>
+              <a:t>polars, statsmodels (OLS), plotnine</a:t>
             </a:r>
           </a:p>
           <a:p>
@@ -32064,7 +32064,7 @@
                   <a:schemeClr val="tx2"/>
                 </a:solidFill>
               </a:rPr>
-              <a:t>0.017</a:t>
+              <a:t>0.016</a:t>
             </a:r>
           </a:p>
         </p:txBody>
@@ -32822,7 +32822,7 @@
                   <a:srgbClr val="595959"/>
                 </a:solidFill>
               </a:rPr>
-              <a:t>Interaction: p 0.017, the same test</a:t>
+              <a:t>Interaction: p 0.016, the same test</a:t>
             </a:r>
           </a:p>
         </p:txBody>
@@ -33022,7 +33022,7 @@
                   <a:schemeClr val="bg1"/>
                 </a:solidFill>
               </a:rPr>
-              <a:t>+1.02 pp, p 0.017.</a:t>
+              <a:t>+1.02 pp, p 0.016.</a:t>
             </a:r>
           </a:p>
         </p:txBody>
@@ -33949,7 +33949,7 @@
                   <a:schemeClr val="tx1"/>
                 </a:solidFill>
               </a:rPr>
-              <a:t>0.017</a:t>
+              <a:t>0.016</a:t>
             </a:r>
           </a:p>
         </p:txBody>
@@ -37218,7 +37218,7 @@
           <a:p>
             <a:r>
               <a:rPr lang="en-GB"/>
-              <a:t>Part 4 of 5 · polars, scipy, statsmodels, plotnine</a:t>
+              <a:t>Part 4 of 5 · polars, statsmodels, plotnine</a:t>
             </a:r>
           </a:p>
         </p:txBody>
@@ -37890,7 +37890,7 @@
         </p:nvGraphicFramePr>
         <p:xfrm>
           <a:off x="457200" y="1234440"/>
-          <a:ext cx="8229600" cy="2966720"/>
+          <a:ext cx="8229600" cy="3337560"/>
         </p:xfrm>
         <a:graphic>
           <a:graphicData uri="http://schemas.openxmlformats.org/drawingml/2006/table">
@@ -37900,8 +37900,8 @@
               </a:tblPr>
               <a:tblGrid>
                 <a:gridCol w="2377440"/>
-                <a:gridCol w="1737360"/>
-                <a:gridCol w="4114800"/>
+                <a:gridCol w="1463040"/>
+                <a:gridCol w="4389120"/>
               </a:tblGrid>
               <a:tr h="370840">
                 <a:tc>
@@ -37915,7 +37915,7 @@
                       </a:r>
                     </a:p>
                   </a:txBody>
-                  <a:tcPr marT="34000" marB="34000"/>
+                  <a:tcPr marT="30000" marB="30000"/>
                 </a:tc>
                 <a:tc>
                   <a:txBody>
@@ -37928,7 +37928,7 @@
                       </a:r>
                     </a:p>
                   </a:txBody>
-                  <a:tcPr marT="34000" marB="34000"/>
+                  <a:tcPr marT="30000" marB="30000"/>
                 </a:tc>
                 <a:tc>
                   <a:txBody>
@@ -37941,7 +37941,7 @@
                       </a:r>
                     </a:p>
                   </a:txBody>
-                  <a:tcPr marT="34000" marB="34000"/>
+                  <a:tcPr marT="30000" marB="30000"/>
                 </a:tc>
               </a:tr>
               <a:tr h="370840">
@@ -37956,7 +37956,7 @@
                       </a:r>
                     </a:p>
                   </a:txBody>
-                  <a:tcPr marT="34000" marB="34000"/>
+                  <a:tcPr marT="30000" marB="30000"/>
                 </a:tc>
                 <a:tc>
                   <a:txBody>
@@ -37969,7 +37969,7 @@
                       </a:r>
                     </a:p>
                   </a:txBody>
-                  <a:tcPr marT="34000" marB="34000"/>
+                  <a:tcPr marT="30000" marB="30000"/>
                 </a:tc>
                 <a:tc>
                   <a:txBody>
@@ -37984,7 +37984,7 @@
                       </a:r>
                     </a:p>
                   </a:txBody>
-                  <a:tcPr marT="34000" marB="34000"/>
+                  <a:tcPr marT="30000" marB="30000"/>
                 </a:tc>
               </a:tr>
               <a:tr h="370840">
@@ -37995,11 +37995,11 @@
                     <a:p>
                       <a:r>
                         <a:rPr sz="1150" b="1" lang="en-GB"/>
-                        <a:t>Check the split (SRM)</a:t>
+                        <a:t>Dummy coding (0/1)</a:t>
                       </a:r>
                     </a:p>
                   </a:txBody>
-                  <a:tcPr marT="34000" marB="34000"/>
+                  <a:tcPr marT="30000" marB="30000"/>
                 </a:tc>
                 <a:tc>
                   <a:txBody>
@@ -38008,11 +38008,11 @@
                     <a:p>
                       <a:r>
                         <a:rPr sz="1150" lang="en-GB"/>
-                        <a:t>scipy</a:t>
+                        <a:t>polars</a:t>
                       </a:r>
                     </a:p>
                   </a:txBody>
-                  <a:tcPr marT="34000" marB="34000"/>
+                  <a:tcPr marT="30000" marB="30000"/>
                 </a:tc>
                 <a:tc>
                   <a:txBody>
@@ -38023,11 +38023,11 @@
                         <a:rPr sz="1150" lang="en-GB">
                           <a:latin typeface="Consolas"/>
                         </a:rPr>
-                        <a:t>stats.chisquare(counts)</a:t>
+                        <a:t>with_columns(); (… == …).cast(pl.Int64)</a:t>
                       </a:r>
                     </a:p>
                   </a:txBody>
-                  <a:tcPr marT="34000" marB="34000"/>
+                  <a:tcPr marT="30000" marB="30000"/>
                 </a:tc>
               </a:tr>
               <a:tr h="370840">
@@ -38038,11 +38038,11 @@
                     <a:p>
                       <a:r>
                         <a:rPr sz="1150" b="1" lang="en-GB"/>
-                        <a:t>z-test and CI</a:t>
+                        <a:t>A/B effect and moderator</a:t>
                       </a:r>
                     </a:p>
                   </a:txBody>
-                  <a:tcPr marT="34000" marB="34000"/>
+                  <a:tcPr marT="30000" marB="30000"/>
                 </a:tc>
                 <a:tc>
                   <a:txBody>
@@ -38055,7 +38055,7 @@
                       </a:r>
                     </a:p>
                   </a:txBody>
-                  <a:tcPr marT="34000" marB="34000"/>
+                  <a:tcPr marT="30000" marB="30000"/>
                 </a:tc>
                 <a:tc>
                   <a:txBody>
@@ -38066,11 +38066,11 @@
                         <a:rPr sz="1150" lang="en-GB">
                           <a:latin typeface="Consolas"/>
                         </a:rPr>
-                        <a:t>proportions_ztest(); confint_proportions_2indep()</a:t>
+                        <a:t>smf.ols("clicked ~ split * mobile").fit()</a:t>
                       </a:r>
                     </a:p>
                   </a:txBody>
-                  <a:tcPr marT="34000" marB="34000"/>
+                  <a:tcPr marT="30000" marB="30000"/>
                 </a:tc>
               </a:tr>
               <a:tr h="370840">
@@ -38081,11 +38081,11 @@
                     <a:p>
                       <a:r>
                         <a:rPr sz="1150" b="1" lang="en-GB"/>
-                        <a:t>Sample size and power</a:t>
+                        <a:t>pp, p-value and 95 % CI</a:t>
                       </a:r>
                     </a:p>
                   </a:txBody>
-                  <a:tcPr marT="34000" marB="34000"/>
+                  <a:tcPr marT="30000" marB="30000"/>
                 </a:tc>
                 <a:tc>
                   <a:txBody>
@@ -38098,7 +38098,7 @@
                       </a:r>
                     </a:p>
                   </a:txBody>
-                  <a:tcPr marT="34000" marB="34000"/>
+                  <a:tcPr marT="30000" marB="30000"/>
                 </a:tc>
                 <a:tc>
                   <a:txBody>
@@ -38109,11 +38109,11 @@
                         <a:rPr sz="1150" lang="en-GB">
                           <a:latin typeface="Consolas"/>
                         </a:rPr>
-                        <a:t>proportion_effectsize(); NormalIndPower().solve_power()</a:t>
+                        <a:t>m.params * 100; m.pvalues; m.conf_int()</a:t>
                       </a:r>
                     </a:p>
                   </a:txBody>
-                  <a:tcPr marT="34000" marB="34000"/>
+                  <a:tcPr marT="30000" marB="30000"/>
                 </a:tc>
               </a:tr>
               <a:tr h="370840">
@@ -38124,11 +38124,11 @@
                     <a:p>
                       <a:r>
                         <a:rPr sz="1150" b="1" lang="en-GB"/>
-                        <a:t>Factorial regression</a:t>
+                        <a:t>2 × 2 and interaction</a:t>
                       </a:r>
                     </a:p>
                   </a:txBody>
-                  <a:tcPr marT="34000" marB="34000"/>
+                  <a:tcPr marT="30000" marB="30000"/>
                 </a:tc>
                 <a:tc>
                   <a:txBody>
@@ -38141,7 +38141,7 @@
                       </a:r>
                     </a:p>
                   </a:txBody>
-                  <a:tcPr marT="34000" marB="34000"/>
+                  <a:tcPr marT="30000" marB="30000"/>
                 </a:tc>
                 <a:tc>
                   <a:txBody>
@@ -38156,7 +38156,7 @@
                       </a:r>
                     </a:p>
                   </a:txBody>
-                  <a:tcPr marT="34000" marB="34000"/>
+                  <a:tcPr marT="30000" marB="30000"/>
                 </a:tc>
               </a:tr>
               <a:tr h="370840">
@@ -38167,11 +38167,11 @@
                     <a:p>
                       <a:r>
                         <a:rPr sz="1150" b="1" lang="en-GB"/>
-                        <a:t>Two-way ANOVA</a:t>
+                        <a:t>Sample size (optional)</a:t>
                       </a:r>
                     </a:p>
                   </a:txBody>
-                  <a:tcPr marT="34000" marB="34000"/>
+                  <a:tcPr marT="30000" marB="30000"/>
                 </a:tc>
                 <a:tc>
                   <a:txBody>
@@ -38184,7 +38184,7 @@
                       </a:r>
                     </a:p>
                   </a:txBody>
-                  <a:tcPr marT="34000" marB="34000"/>
+                  <a:tcPr marT="30000" marB="30000"/>
                 </a:tc>
                 <a:tc>
                   <a:txBody>
@@ -38195,11 +38195,11 @@
                         <a:rPr sz="1150" lang="en-GB">
                           <a:latin typeface="Consolas"/>
                         </a:rPr>
-                        <a:t>anova_lm(m, typ=2)</a:t>
+                        <a:t>NormalIndPower().solve_power()</a:t>
                       </a:r>
                     </a:p>
                   </a:txBody>
-                  <a:tcPr marT="34000" marB="34000"/>
+                  <a:tcPr marT="30000" marB="30000"/>
                 </a:tc>
               </a:tr>
               <a:tr h="370840">
@@ -38210,11 +38210,11 @@
                     <a:p>
                       <a:r>
                         <a:rPr sz="1150" b="1" lang="en-GB"/>
-                        <a:t>Tables and plots</a:t>
+                        <a:t>Plots</a:t>
                       </a:r>
                     </a:p>
                   </a:txBody>
-                  <a:tcPr marT="34000" marB="34000"/>
+                  <a:tcPr marT="30000" marB="30000"/>
                 </a:tc>
                 <a:tc>
                   <a:txBody>
@@ -38223,11 +38223,11 @@
                     <a:p>
                       <a:r>
                         <a:rPr sz="1150" lang="en-GB"/>
-                        <a:t>great_tables, plotnine</a:t>
+                        <a:t>plotnine</a:t>
                       </a:r>
                     </a:p>
                   </a:txBody>
-                  <a:tcPr marT="34000" marB="34000"/>
+                  <a:tcPr marT="30000" marB="30000"/>
                 </a:tc>
                 <a:tc>
                   <a:txBody>
@@ -38238,11 +38238,54 @@
                         <a:rPr sz="1150" lang="en-GB">
                           <a:latin typeface="Consolas"/>
                         </a:rPr>
-                        <a:t>GT(); ggplot, geom_line</a:t>
+                        <a:t>ggplot(); geom_col(); geom_line()</a:t>
                       </a:r>
                     </a:p>
                   </a:txBody>
-                  <a:tcPr marT="34000" marB="34000"/>
+                  <a:tcPr marT="30000" marB="30000"/>
+                </a:tc>
+              </a:tr>
+              <a:tr h="370840">
+                <a:tc>
+                  <a:txBody>
+                    <a:bodyPr/>
+                    <a:lstStyle/>
+                    <a:p>
+                      <a:r>
+                        <a:rPr sz="1150" b="1" lang="en-GB"/>
+                        <a:t>Tables (optional)</a:t>
+                      </a:r>
+                    </a:p>
+                  </a:txBody>
+                  <a:tcPr marT="30000" marB="30000"/>
+                </a:tc>
+                <a:tc>
+                  <a:txBody>
+                    <a:bodyPr/>
+                    <a:lstStyle/>
+                    <a:p>
+                      <a:r>
+                        <a:rPr sz="1150" lang="en-GB"/>
+                        <a:t>great_tables</a:t>
+                      </a:r>
+                    </a:p>
+                  </a:txBody>
+                  <a:tcPr marT="30000" marB="30000"/>
+                </a:tc>
+                <a:tc>
+                  <a:txBody>
+                    <a:bodyPr/>
+                    <a:lstStyle/>
+                    <a:p>
+                      <a:r>
+                        <a:rPr sz="1150" lang="en-GB">
+                          <a:latin typeface="Consolas"/>
+                        </a:rPr>
+                        <a:t>GT()</a:t>
+                      </a:r>
+                    </a:p>
+                  </a:txBody>
+                  <a:tcPr marT="30000" marB="30000"/>
                 </a:tc>
               </a:tr>
             </a:tbl>
@@ -38355,7 +38398,7 @@
           <a:p>
             <a:r>
               <a:rPr sz="1600" lang="en-GB"/>
-              <a:t>Step 1: load and check the split</a:t>
+              <a:t>Step 1: load, dummy coding and the split check</a:t>
             </a:r>
           </a:p>
         </p:txBody>
@@ -38418,7 +38461,7 @@
         <p:spPr>
           <a:xfrm>
             <a:off x="457200" y="1234440"/>
-            <a:ext cx="4937760" cy="274320"/>
+            <a:ext cx="4046220" cy="274320"/>
           </a:xfrm>
           <a:prstGeom prst="rect">
             <a:avLst/>
@@ -38460,7 +38503,7 @@
         <p:spPr>
           <a:xfrm>
             <a:off x="566928" y="1234440"/>
-            <a:ext cx="4718304" cy="274320"/>
+            <a:ext cx="3826764" cy="274320"/>
           </a:xfrm>
           <a:prstGeom prst="rect">
             <a:avLst/>
@@ -38484,7 +38527,7 @@
                   <a:schemeClr val="bg1"/>
                 </a:solidFill>
               </a:rPr>
-              <a:t>Python: polars, scipy</a:t>
+              <a:t>Python: polars</a:t>
             </a:r>
           </a:p>
         </p:txBody>
@@ -38498,7 +38541,7 @@
         <p:spPr>
           <a:xfrm>
             <a:off x="457200" y="1508760"/>
-            <a:ext cx="4937760" cy="2560320"/>
+            <a:ext cx="4046220" cy="2926080"/>
           </a:xfrm>
           <a:prstGeom prst="rect">
             <a:avLst/>
@@ -38540,7 +38583,7 @@
         <p:spPr>
           <a:xfrm>
             <a:off x="594360" y="1600200"/>
-            <a:ext cx="4663440" cy="2377440"/>
+            <a:ext cx="3771900" cy="2743200"/>
           </a:xfrm>
           <a:prstGeom prst="rect">
             <a:avLst/>
@@ -38581,7 +38624,7 @@
                 </a:solidFill>
                 <a:latin typeface="Consolas"/>
               </a:rPr>
-              <a:t>from scipy import stats</a:t>
+              <a:t> </a:t>
             </a:r>
           </a:p>
           <a:p>
@@ -38597,7 +38640,7 @@
                 </a:solidFill>
                 <a:latin typeface="Consolas"/>
               </a:rPr>
-              <a:t> </a:t>
+              <a:t>ab = pl.read_csv(</a:t>
             </a:r>
           </a:p>
           <a:p>
@@ -38613,7 +38656,7 @@
                 </a:solidFill>
                 <a:latin typeface="Consolas"/>
               </a:rPr>
-              <a:t>ab = pl.read_csv("../../data/abtest/email_ab.csv")</a:t>
+              <a:t>    "../../data/abtest/email_ab.csv")</a:t>
             </a:r>
           </a:p>
           <a:p>
@@ -38645,7 +38688,7 @@
                 </a:solidFill>
                 <a:latin typeface="Consolas"/>
               </a:rPr>
-              <a:t>split = (ab.group_by("version")</a:t>
+              <a:t># dummy coding: 1 = yes, 0 = no</a:t>
             </a:r>
           </a:p>
           <a:p>
@@ -38661,7 +38704,7 @@
                 </a:solidFill>
                 <a:latin typeface="Consolas"/>
               </a:rPr>
-              <a:t>         .agg(pl.len().alias("n"),</a:t>
+              <a:t>ab = ab.with_columns(</a:t>
             </a:r>
           </a:p>
           <a:p>
@@ -38677,7 +38720,7 @@
                 </a:solidFill>
                 <a:latin typeface="Consolas"/>
               </a:rPr>
-              <a:t>              pl.col("clicked").sum().alias("clicks"),</a:t>
+              <a:t>    mobile=(pl.col("device") == "mobile")</a:t>
             </a:r>
           </a:p>
           <a:p>
@@ -38693,7 +38736,7 @@
                 </a:solidFill>
                 <a:latin typeface="Consolas"/>
               </a:rPr>
-              <a:t>              pl.col("clicked").mean().alias("click_rate"))</a:t>
+              <a:t>    .cast(pl.Int64),</a:t>
             </a:r>
           </a:p>
           <a:p>
@@ -38709,7 +38752,7 @@
                 </a:solidFill>
                 <a:latin typeface="Consolas"/>
               </a:rPr>
-              <a:t>         .sort("version"))</a:t>
+              <a:t>    spain=(pl.col("country") == "ES")</a:t>
             </a:r>
           </a:p>
           <a:p>
@@ -38725,7 +38768,7 @@
                 </a:solidFill>
                 <a:latin typeface="Consolas"/>
               </a:rPr>
-              <a:t>stats.chisquare(split["n"].to_list()).pvalue  # SRM</a:t>
+              <a:t>    .cast(pl.Int64))</a:t>
             </a:r>
           </a:p>
           <a:p>
@@ -38741,7 +38784,103 @@
                 </a:solidFill>
                 <a:latin typeface="Consolas"/>
               </a:rPr>
-              <a:t>split</a:t>
+              <a:t> </a:t>
+            </a:r>
+          </a:p>
+          <a:p>
+            <a:pPr algn="l">
+              <a:spcAft>
+                <a:spcPts val="0"/>
+              </a:spcAft>
+            </a:pPr>
+            <a:r>
+              <a:rPr sz="1000" b="0" lang="en-GB">
+                <a:solidFill>
+                  <a:schemeClr val="bg1"/>
+                </a:solidFill>
+                <a:latin typeface="Consolas"/>
+              </a:rPr>
+              <a:t># split check: customers per group</a:t>
+            </a:r>
+          </a:p>
+          <a:p>
+            <a:pPr algn="l">
+              <a:spcAft>
+                <a:spcPts val="0"/>
+              </a:spcAft>
+            </a:pPr>
+            <a:r>
+              <a:rPr sz="1000" b="0" lang="en-GB">
+                <a:solidFill>
+                  <a:schemeClr val="bg1"/>
+                </a:solidFill>
+                <a:latin typeface="Consolas"/>
+              </a:rPr>
+              <a:t>(ab.group_by("split", "version")</a:t>
+            </a:r>
+          </a:p>
+          <a:p>
+            <a:pPr algn="l">
+              <a:spcAft>
+                <a:spcPts val="0"/>
+              </a:spcAft>
+            </a:pPr>
+            <a:r>
+              <a:rPr sz="1000" b="0" lang="en-GB">
+                <a:solidFill>
+                  <a:schemeClr val="bg1"/>
+                </a:solidFill>
+                <a:latin typeface="Consolas"/>
+              </a:rPr>
+              <a:t> .agg(n=pl.len(),</a:t>
+            </a:r>
+          </a:p>
+          <a:p>
+            <a:pPr algn="l">
+              <a:spcAft>
+                <a:spcPts val="0"/>
+              </a:spcAft>
+            </a:pPr>
+            <a:r>
+              <a:rPr sz="1000" b="0" lang="en-GB">
+                <a:solidFill>
+                  <a:schemeClr val="bg1"/>
+                </a:solidFill>
+                <a:latin typeface="Consolas"/>
+              </a:rPr>
+              <a:t>      click_rate=pl.col("clicked").mean(),</a:t>
+            </a:r>
+          </a:p>
+          <a:p>
+            <a:pPr algn="l">
+              <a:spcAft>
+                <a:spcPts val="0"/>
+              </a:spcAft>
+            </a:pPr>
+            <a:r>
+              <a:rPr sz="1000" b="0" lang="en-GB">
+                <a:solidFill>
+                  <a:schemeClr val="bg1"/>
+                </a:solidFill>
+                <a:latin typeface="Consolas"/>
+              </a:rPr>
+              <a:t>      mobile=pl.col("mobile").mean())</a:t>
+            </a:r>
+          </a:p>
+          <a:p>
+            <a:pPr algn="l">
+              <a:spcAft>
+                <a:spcPts val="0"/>
+              </a:spcAft>
+            </a:pPr>
+            <a:r>
+              <a:rPr sz="1000" b="0" lang="en-GB">
+                <a:solidFill>
+                  <a:schemeClr val="bg1"/>
+                </a:solidFill>
+                <a:latin typeface="Consolas"/>
+              </a:rPr>
+              <a:t> .sort("split"))</a:t>
             </a:r>
           </a:p>
         </p:txBody>
@@ -38754,8 +38893,8 @@
         </p:nvSpPr>
         <p:spPr>
           <a:xfrm>
-            <a:off x="5532120" y="1234440"/>
-            <a:ext cx="841248" cy="384048"/>
+            <a:off x="4640580" y="1234440"/>
+            <a:ext cx="612648" cy="310896"/>
           </a:xfrm>
           <a:prstGeom prst="rect">
             <a:avLst/>
@@ -38796,8 +38935,8 @@
         </p:nvSpPr>
         <p:spPr>
           <a:xfrm>
-            <a:off x="5623560" y="1234440"/>
-            <a:ext cx="658368" cy="384048"/>
+            <a:off x="4732020" y="1234440"/>
+            <a:ext cx="429768" cy="310896"/>
           </a:xfrm>
           <a:prstGeom prst="rect">
             <a:avLst/>
@@ -38810,18 +38949,18 @@
           </a:bodyPr>
           <a:lstStyle/>
           <a:p>
-            <a:pPr algn="l">
+            <a:pPr algn="ctr">
               <a:spcAft>
                 <a:spcPts val="400"/>
               </a:spcAft>
             </a:pPr>
             <a:r>
-              <a:rPr sz="1150" b="1" lang="en-GB">
+              <a:rPr sz="1100" b="1" lang="en-GB">
                 <a:solidFill>
                   <a:schemeClr val="bg1"/>
                 </a:solidFill>
               </a:rPr>
-              <a:t>Version</a:t>
+              <a:t>split</a:t>
             </a:r>
           </a:p>
         </p:txBody>
@@ -38834,8 +38973,8 @@
         </p:nvSpPr>
         <p:spPr>
           <a:xfrm>
-            <a:off x="6400800" y="1234440"/>
-            <a:ext cx="749808" cy="384048"/>
+            <a:off x="5280660" y="1234440"/>
+            <a:ext cx="795528" cy="310896"/>
           </a:xfrm>
           <a:prstGeom prst="rect">
             <a:avLst/>
@@ -38876,8 +39015,88 @@
         </p:nvSpPr>
         <p:spPr>
           <a:xfrm>
-            <a:off x="6492240" y="1234440"/>
-            <a:ext cx="566928" cy="384048"/>
+            <a:off x="5372100" y="1234440"/>
+            <a:ext cx="612648" cy="310896"/>
+          </a:xfrm>
+          <a:prstGeom prst="rect">
+            <a:avLst/>
+          </a:prstGeom>
+          <a:noFill/>
+        </p:spPr>
+        <p:txBody>
+          <a:bodyPr wrap="square" lIns="0" rIns="0" tIns="0" bIns="0" anchor="ctr">
+            <a:noAutofit/>
+          </a:bodyPr>
+          <a:lstStyle/>
+          <a:p>
+            <a:pPr algn="ctr">
+              <a:spcAft>
+                <a:spcPts val="400"/>
+              </a:spcAft>
+            </a:pPr>
+            <a:r>
+              <a:rPr sz="1100" b="1" lang="en-GB">
+                <a:solidFill>
+                  <a:schemeClr val="bg1"/>
+                </a:solidFill>
+              </a:rPr>
+              <a:t>version</a:t>
+            </a:r>
+          </a:p>
+        </p:txBody>
+      </p:sp>
+      <p:sp>
+        <p:nvSpPr>
+          <p:cNvPr id="18" name="Split out 1-3"/>
+          <p:cNvSpPr/>
+          <p:nvPr/>
+        </p:nvSpPr>
+        <p:spPr>
+          <a:xfrm>
+            <a:off x="6103620" y="1234440"/>
+            <a:ext cx="749808" cy="310896"/>
+          </a:xfrm>
+          <a:prstGeom prst="rect">
+            <a:avLst/>
+          </a:prstGeom>
+          <a:solidFill>
+            <a:schemeClr val="accent1"/>
+          </a:solidFill>
+          <a:ln>
+            <a:noFill/>
+          </a:ln>
+          <a:effectLst/>
+        </p:spPr>
+        <p:style>
+          <a:lnRef idx="1">
+            <a:schemeClr val="accent1"/>
+          </a:lnRef>
+          <a:fillRef idx="3">
+            <a:schemeClr val="accent1"/>
+          </a:fillRef>
+          <a:effectRef idx="2">
+            <a:schemeClr val="accent1"/>
+          </a:effectRef>
+          <a:fontRef idx="minor">
+            <a:schemeClr val="lt1"/>
+          </a:fontRef>
+        </p:style>
+        <p:txBody>
+          <a:bodyPr rtlCol="0" anchor="ctr"/>
+          <a:lstStyle/>
+          <a:p/>
+        </p:txBody>
+      </p:sp>
+      <p:sp>
+        <p:nvSpPr>
+          <p:cNvPr id="19" name="Split out text 1-3"/>
+          <p:cNvSpPr txBox="1"/>
+          <p:nvPr/>
+        </p:nvSpPr>
+        <p:spPr>
+          <a:xfrm>
+            <a:off x="6195060" y="1234440"/>
+            <a:ext cx="566928" cy="310896"/>
           </a:xfrm>
           <a:prstGeom prst="rect">
             <a:avLst/>
@@ -38896,7 +39115,7 @@
               </a:spcAft>
             </a:pPr>
             <a:r>
-              <a:rPr sz="1150" b="1" lang="en-GB">
+              <a:rPr sz="1100" b="1" lang="en-GB">
                 <a:solidFill>
                   <a:schemeClr val="bg1"/>
                 </a:solidFill>
@@ -38908,14 +39127,14 @@
       </p:sp>
       <p:sp>
         <p:nvSpPr>
-          <p:cNvPr id="18" name="Split out 1-3"/>
+          <p:cNvPr id="20" name="Split out 1-4"/>
           <p:cNvSpPr/>
           <p:nvPr/>
         </p:nvSpPr>
         <p:spPr>
           <a:xfrm>
-            <a:off x="7178040" y="1234440"/>
-            <a:ext cx="704088" cy="384048"/>
+            <a:off x="6880860" y="1234440"/>
+            <a:ext cx="932688" cy="310896"/>
           </a:xfrm>
           <a:prstGeom prst="rect">
             <a:avLst/>
@@ -38950,14 +39169,14 @@
       </p:sp>
       <p:sp>
         <p:nvSpPr>
-          <p:cNvPr id="19" name="Split out text 1-3"/>
+          <p:cNvPr id="21" name="Split out text 1-4"/>
           <p:cNvSpPr txBox="1"/>
           <p:nvPr/>
         </p:nvSpPr>
         <p:spPr>
           <a:xfrm>
-            <a:off x="7269480" y="1234440"/>
-            <a:ext cx="521208" cy="384048"/>
+            <a:off x="6972300" y="1234440"/>
+            <a:ext cx="749808" cy="310896"/>
           </a:xfrm>
           <a:prstGeom prst="rect">
             <a:avLst/>
@@ -38976,26 +39195,26 @@
               </a:spcAft>
             </a:pPr>
             <a:r>
-              <a:rPr sz="1150" b="1" lang="en-GB">
+              <a:rPr sz="1100" b="1" lang="en-GB">
                 <a:solidFill>
                   <a:schemeClr val="bg1"/>
                 </a:solidFill>
               </a:rPr>
-              <a:t>Clicks</a:t>
-            </a:r>
-          </a:p>
-        </p:txBody>
-      </p:sp>
-      <p:sp>
-        <p:nvSpPr>
-          <p:cNvPr id="20" name="Split out 1-4"/>
+              <a:t>Click rate</a:t>
+            </a:r>
+          </a:p>
+        </p:txBody>
+      </p:sp>
+      <p:sp>
+        <p:nvSpPr>
+          <p:cNvPr id="22" name="Split out 1-5"/>
           <p:cNvSpPr/>
           <p:nvPr/>
         </p:nvSpPr>
         <p:spPr>
           <a:xfrm>
-            <a:off x="7909560" y="1234440"/>
-            <a:ext cx="777240" cy="384048"/>
+            <a:off x="7840980" y="1234440"/>
+            <a:ext cx="845820" cy="310896"/>
           </a:xfrm>
           <a:prstGeom prst="rect">
             <a:avLst/>
@@ -39030,14 +39249,14 @@
       </p:sp>
       <p:sp>
         <p:nvSpPr>
-          <p:cNvPr id="21" name="Split out text 1-4"/>
+          <p:cNvPr id="23" name="Split out text 1-5"/>
           <p:cNvSpPr txBox="1"/>
           <p:nvPr/>
         </p:nvSpPr>
         <p:spPr>
           <a:xfrm>
-            <a:off x="8001000" y="1234440"/>
-            <a:ext cx="566928" cy="384048"/>
+            <a:off x="7932420" y="1234440"/>
+            <a:ext cx="635508" cy="310896"/>
           </a:xfrm>
           <a:prstGeom prst="rect">
             <a:avLst/>
@@ -39056,26 +39275,26 @@
               </a:spcAft>
             </a:pPr>
             <a:r>
-              <a:rPr sz="1150" b="1" lang="en-GB">
+              <a:rPr sz="1100" b="1" lang="en-GB">
                 <a:solidFill>
                   <a:schemeClr val="bg1"/>
                 </a:solidFill>
               </a:rPr>
-              <a:t>Rate</a:t>
-            </a:r>
-          </a:p>
-        </p:txBody>
-      </p:sp>
-      <p:sp>
-        <p:nvSpPr>
-          <p:cNvPr id="22" name="Split out 2-1"/>
+              <a:t>Mobile</a:t>
+            </a:r>
+          </a:p>
+        </p:txBody>
+      </p:sp>
+      <p:sp>
+        <p:nvSpPr>
+          <p:cNvPr id="24" name="Split out 2-1"/>
           <p:cNvSpPr/>
           <p:nvPr/>
         </p:nvSpPr>
         <p:spPr>
           <a:xfrm>
-            <a:off x="5532120" y="1645920"/>
-            <a:ext cx="841248" cy="384048"/>
+            <a:off x="4640580" y="1572768"/>
+            <a:ext cx="612648" cy="310896"/>
           </a:xfrm>
           <a:prstGeom prst="rect">
             <a:avLst/>
@@ -39110,14 +39329,14 @@
       </p:sp>
       <p:sp>
         <p:nvSpPr>
-          <p:cNvPr id="23" name="Split out text 2-1"/>
+          <p:cNvPr id="25" name="Split out text 2-1"/>
           <p:cNvSpPr txBox="1"/>
           <p:nvPr/>
         </p:nvSpPr>
         <p:spPr>
           <a:xfrm>
-            <a:off x="5623560" y="1645920"/>
-            <a:ext cx="658368" cy="384048"/>
+            <a:off x="4732020" y="1572768"/>
+            <a:ext cx="429768" cy="310896"/>
           </a:xfrm>
           <a:prstGeom prst="rect">
             <a:avLst/>
@@ -39130,32 +39349,32 @@
           </a:bodyPr>
           <a:lstStyle/>
           <a:p>
-            <a:pPr algn="l">
+            <a:pPr algn="ctr">
               <a:spcAft>
                 <a:spcPts val="400"/>
               </a:spcAft>
             </a:pPr>
             <a:r>
-              <a:rPr sz="1150" b="1" lang="en-GB">
+              <a:rPr sz="1100" b="1" lang="en-GB">
                 <a:solidFill>
                   <a:schemeClr val="tx2"/>
                 </a:solidFill>
               </a:rPr>
-              <a:t>A</a:t>
-            </a:r>
-          </a:p>
-        </p:txBody>
-      </p:sp>
-      <p:sp>
-        <p:nvSpPr>
-          <p:cNvPr id="24" name="Split out 2-2"/>
+              <a:t>0</a:t>
+            </a:r>
+          </a:p>
+        </p:txBody>
+      </p:sp>
+      <p:sp>
+        <p:nvSpPr>
+          <p:cNvPr id="26" name="Split out 2-2"/>
           <p:cNvSpPr/>
           <p:nvPr/>
         </p:nvSpPr>
         <p:spPr>
           <a:xfrm>
-            <a:off x="6400800" y="1645920"/>
-            <a:ext cx="749808" cy="384048"/>
+            <a:off x="5280660" y="1572768"/>
+            <a:ext cx="795528" cy="310896"/>
           </a:xfrm>
           <a:prstGeom prst="rect">
             <a:avLst/>
@@ -39190,14 +39409,14 @@
       </p:sp>
       <p:sp>
         <p:nvSpPr>
-          <p:cNvPr id="25" name="Split out text 2-2"/>
+          <p:cNvPr id="27" name="Split out text 2-2"/>
           <p:cNvSpPr txBox="1"/>
           <p:nvPr/>
         </p:nvSpPr>
         <p:spPr>
           <a:xfrm>
-            <a:off x="6492240" y="1645920"/>
-            <a:ext cx="566928" cy="384048"/>
+            <a:off x="5372100" y="1572768"/>
+            <a:ext cx="612648" cy="310896"/>
           </a:xfrm>
           <a:prstGeom prst="rect">
             <a:avLst/>
@@ -39210,32 +39429,32 @@
           </a:bodyPr>
           <a:lstStyle/>
           <a:p>
-            <a:pPr algn="r">
+            <a:pPr algn="ctr">
               <a:spcAft>
                 <a:spcPts val="400"/>
               </a:spcAft>
             </a:pPr>
             <a:r>
-              <a:rPr sz="1150" b="0" lang="en-GB">
+              <a:rPr sz="1100" b="0" lang="en-GB">
                 <a:solidFill>
                   <a:schemeClr val="tx1"/>
                 </a:solidFill>
               </a:rPr>
-              <a:t>20,000</a:t>
-            </a:r>
-          </a:p>
-        </p:txBody>
-      </p:sp>
-      <p:sp>
-        <p:nvSpPr>
-          <p:cNvPr id="26" name="Split out 2-3"/>
+              <a:t>A</a:t>
+            </a:r>
+          </a:p>
+        </p:txBody>
+      </p:sp>
+      <p:sp>
+        <p:nvSpPr>
+          <p:cNvPr id="28" name="Split out 2-3"/>
           <p:cNvSpPr/>
           <p:nvPr/>
         </p:nvSpPr>
         <p:spPr>
           <a:xfrm>
-            <a:off x="7178040" y="1645920"/>
-            <a:ext cx="704088" cy="384048"/>
+            <a:off x="6103620" y="1572768"/>
+            <a:ext cx="749808" cy="310896"/>
           </a:xfrm>
           <a:prstGeom prst="rect">
             <a:avLst/>
@@ -39270,14 +39489,14 @@
       </p:sp>
       <p:sp>
         <p:nvSpPr>
-          <p:cNvPr id="27" name="Split out text 2-3"/>
+          <p:cNvPr id="29" name="Split out text 2-3"/>
           <p:cNvSpPr txBox="1"/>
           <p:nvPr/>
         </p:nvSpPr>
         <p:spPr>
           <a:xfrm>
-            <a:off x="7269480" y="1645920"/>
-            <a:ext cx="521208" cy="384048"/>
+            <a:off x="6195060" y="1572768"/>
+            <a:ext cx="566928" cy="310896"/>
           </a:xfrm>
           <a:prstGeom prst="rect">
             <a:avLst/>
@@ -39296,26 +39515,26 @@
               </a:spcAft>
             </a:pPr>
             <a:r>
-              <a:rPr sz="1150" b="0" lang="en-GB">
+              <a:rPr sz="1100" b="0" lang="en-GB">
                 <a:solidFill>
                   <a:schemeClr val="tx1"/>
                 </a:solidFill>
               </a:rPr>
-              <a:t>665</a:t>
-            </a:r>
-          </a:p>
-        </p:txBody>
-      </p:sp>
-      <p:sp>
-        <p:nvSpPr>
-          <p:cNvPr id="28" name="Split out 2-4"/>
+              <a:t>20,000</a:t>
+            </a:r>
+          </a:p>
+        </p:txBody>
+      </p:sp>
+      <p:sp>
+        <p:nvSpPr>
+          <p:cNvPr id="30" name="Split out 2-4"/>
           <p:cNvSpPr/>
           <p:nvPr/>
         </p:nvSpPr>
         <p:spPr>
           <a:xfrm>
-            <a:off x="7909560" y="1645920"/>
-            <a:ext cx="777240" cy="384048"/>
+            <a:off x="6880860" y="1572768"/>
+            <a:ext cx="932688" cy="310896"/>
           </a:xfrm>
           <a:prstGeom prst="rect">
             <a:avLst/>
@@ -39350,14 +39569,14 @@
       </p:sp>
       <p:sp>
         <p:nvSpPr>
-          <p:cNvPr id="29" name="Split out text 2-4"/>
+          <p:cNvPr id="31" name="Split out text 2-4"/>
           <p:cNvSpPr txBox="1"/>
           <p:nvPr/>
         </p:nvSpPr>
         <p:spPr>
           <a:xfrm>
-            <a:off x="8001000" y="1645920"/>
-            <a:ext cx="566928" cy="384048"/>
+            <a:off x="6972300" y="1572768"/>
+            <a:ext cx="749808" cy="310896"/>
           </a:xfrm>
           <a:prstGeom prst="rect">
             <a:avLst/>
@@ -39376,7 +39595,7 @@
               </a:spcAft>
             </a:pPr>
             <a:r>
-              <a:rPr sz="1150" b="0" lang="en-GB">
+              <a:rPr sz="1100" b="0" lang="en-GB">
                 <a:solidFill>
                   <a:schemeClr val="tx1"/>
                 </a:solidFill>
@@ -39388,14 +39607,14 @@
       </p:sp>
       <p:sp>
         <p:nvSpPr>
-          <p:cNvPr id="30" name="Split out 3-1"/>
+          <p:cNvPr id="32" name="Split out 2-5"/>
           <p:cNvSpPr/>
           <p:nvPr/>
         </p:nvSpPr>
         <p:spPr>
           <a:xfrm>
-            <a:off x="5532120" y="2057400"/>
-            <a:ext cx="841248" cy="384048"/>
+            <a:off x="7840980" y="1572768"/>
+            <a:ext cx="845820" cy="310896"/>
           </a:xfrm>
           <a:prstGeom prst="rect">
             <a:avLst/>
@@ -39430,14 +39649,14 @@
       </p:sp>
       <p:sp>
         <p:nvSpPr>
-          <p:cNvPr id="31" name="Split out text 3-1"/>
+          <p:cNvPr id="33" name="Split out text 2-5"/>
           <p:cNvSpPr txBox="1"/>
           <p:nvPr/>
         </p:nvSpPr>
         <p:spPr>
           <a:xfrm>
-            <a:off x="5623560" y="2057400"/>
-            <a:ext cx="658368" cy="384048"/>
+            <a:off x="7932420" y="1572768"/>
+            <a:ext cx="635508" cy="310896"/>
           </a:xfrm>
           <a:prstGeom prst="rect">
             <a:avLst/>
@@ -39450,32 +39669,32 @@
           </a:bodyPr>
           <a:lstStyle/>
           <a:p>
-            <a:pPr algn="l">
+            <a:pPr algn="r">
               <a:spcAft>
                 <a:spcPts val="400"/>
               </a:spcAft>
             </a:pPr>
             <a:r>
-              <a:rPr sz="1150" b="1" lang="en-GB">
-                <a:solidFill>
-                  <a:schemeClr val="tx2"/>
-                </a:solidFill>
-              </a:rPr>
-              <a:t>B</a:t>
-            </a:r>
-          </a:p>
-        </p:txBody>
-      </p:sp>
-      <p:sp>
-        <p:nvSpPr>
-          <p:cNvPr id="32" name="Split out 3-2"/>
+              <a:rPr sz="1100" b="0" lang="en-GB">
+                <a:solidFill>
+                  <a:schemeClr val="tx1"/>
+                </a:solidFill>
+              </a:rPr>
+              <a:t>59.5 %</a:t>
+            </a:r>
+          </a:p>
+        </p:txBody>
+      </p:sp>
+      <p:sp>
+        <p:nvSpPr>
+          <p:cNvPr id="34" name="Split out 3-1"/>
           <p:cNvSpPr/>
           <p:nvPr/>
         </p:nvSpPr>
         <p:spPr>
           <a:xfrm>
-            <a:off x="6400800" y="2057400"/>
-            <a:ext cx="749808" cy="384048"/>
+            <a:off x="4640580" y="1911096"/>
+            <a:ext cx="612648" cy="310896"/>
           </a:xfrm>
           <a:prstGeom prst="rect">
             <a:avLst/>
@@ -39510,14 +39729,14 @@
       </p:sp>
       <p:sp>
         <p:nvSpPr>
-          <p:cNvPr id="33" name="Split out text 3-2"/>
+          <p:cNvPr id="35" name="Split out text 3-1"/>
           <p:cNvSpPr txBox="1"/>
           <p:nvPr/>
         </p:nvSpPr>
         <p:spPr>
           <a:xfrm>
-            <a:off x="6492240" y="2057400"/>
-            <a:ext cx="566928" cy="384048"/>
+            <a:off x="4732020" y="1911096"/>
+            <a:ext cx="429768" cy="310896"/>
           </a:xfrm>
           <a:prstGeom prst="rect">
             <a:avLst/>
@@ -39530,32 +39749,32 @@
           </a:bodyPr>
           <a:lstStyle/>
           <a:p>
-            <a:pPr algn="r">
+            <a:pPr algn="ctr">
               <a:spcAft>
                 <a:spcPts val="400"/>
               </a:spcAft>
             </a:pPr>
             <a:r>
-              <a:rPr sz="1150" b="0" lang="en-GB">
-                <a:solidFill>
-                  <a:schemeClr val="tx1"/>
-                </a:solidFill>
-              </a:rPr>
-              <a:t>20,000</a:t>
-            </a:r>
-          </a:p>
-        </p:txBody>
-      </p:sp>
-      <p:sp>
-        <p:nvSpPr>
-          <p:cNvPr id="34" name="Split out 3-3"/>
+              <a:rPr sz="1100" b="1" lang="en-GB">
+                <a:solidFill>
+                  <a:schemeClr val="tx2"/>
+                </a:solidFill>
+              </a:rPr>
+              <a:t>1</a:t>
+            </a:r>
+          </a:p>
+        </p:txBody>
+      </p:sp>
+      <p:sp>
+        <p:nvSpPr>
+          <p:cNvPr id="36" name="Split out 3-2"/>
           <p:cNvSpPr/>
           <p:nvPr/>
         </p:nvSpPr>
         <p:spPr>
           <a:xfrm>
-            <a:off x="7178040" y="2057400"/>
-            <a:ext cx="704088" cy="384048"/>
+            <a:off x="5280660" y="1911096"/>
+            <a:ext cx="795528" cy="310896"/>
           </a:xfrm>
           <a:prstGeom prst="rect">
             <a:avLst/>
@@ -39590,14 +39809,14 @@
       </p:sp>
       <p:sp>
         <p:nvSpPr>
-          <p:cNvPr id="35" name="Split out text 3-3"/>
+          <p:cNvPr id="37" name="Split out text 3-2"/>
           <p:cNvSpPr txBox="1"/>
           <p:nvPr/>
         </p:nvSpPr>
         <p:spPr>
           <a:xfrm>
-            <a:off x="7269480" y="2057400"/>
-            <a:ext cx="521208" cy="384048"/>
+            <a:off x="5372100" y="1911096"/>
+            <a:ext cx="612648" cy="310896"/>
           </a:xfrm>
           <a:prstGeom prst="rect">
             <a:avLst/>
@@ -39610,32 +39829,32 @@
           </a:bodyPr>
           <a:lstStyle/>
           <a:p>
-            <a:pPr algn="r">
+            <a:pPr algn="ctr">
               <a:spcAft>
                 <a:spcPts val="400"/>
               </a:spcAft>
             </a:pPr>
             <a:r>
-              <a:rPr sz="1150" b="0" lang="en-GB">
+              <a:rPr sz="1100" b="0" lang="en-GB">
                 <a:solidFill>
                   <a:schemeClr val="tx1"/>
                 </a:solidFill>
               </a:rPr>
-              <a:t>785</a:t>
-            </a:r>
-          </a:p>
-        </p:txBody>
-      </p:sp>
-      <p:sp>
-        <p:nvSpPr>
-          <p:cNvPr id="36" name="Split out 3-4"/>
+              <a:t>B</a:t>
+            </a:r>
+          </a:p>
+        </p:txBody>
+      </p:sp>
+      <p:sp>
+        <p:nvSpPr>
+          <p:cNvPr id="38" name="Split out 3-3"/>
           <p:cNvSpPr/>
           <p:nvPr/>
         </p:nvSpPr>
         <p:spPr>
           <a:xfrm>
-            <a:off x="7909560" y="2057400"/>
-            <a:ext cx="777240" cy="384048"/>
+            <a:off x="6103620" y="1911096"/>
+            <a:ext cx="749808" cy="310896"/>
           </a:xfrm>
           <a:prstGeom prst="rect">
             <a:avLst/>
@@ -39670,14 +39889,14 @@
       </p:sp>
       <p:sp>
         <p:nvSpPr>
-          <p:cNvPr id="37" name="Split out text 3-4"/>
+          <p:cNvPr id="39" name="Split out text 3-3"/>
           <p:cNvSpPr txBox="1"/>
           <p:nvPr/>
         </p:nvSpPr>
         <p:spPr>
           <a:xfrm>
-            <a:off x="8001000" y="2057400"/>
-            <a:ext cx="566928" cy="384048"/>
+            <a:off x="6195060" y="1911096"/>
+            <a:ext cx="566928" cy="310896"/>
           </a:xfrm>
           <a:prstGeom prst="rect">
             <a:avLst/>
@@ -39696,26 +39915,26 @@
               </a:spcAft>
             </a:pPr>
             <a:r>
-              <a:rPr sz="1150" b="0" lang="en-GB">
+              <a:rPr sz="1100" b="0" lang="en-GB">
                 <a:solidFill>
                   <a:schemeClr val="tx1"/>
                 </a:solidFill>
               </a:rPr>
-              <a:t>3.93 %</a:t>
-            </a:r>
-          </a:p>
-        </p:txBody>
-      </p:sp>
-      <p:sp>
-        <p:nvSpPr>
-          <p:cNvPr id="38" name="Split out SRM row"/>
+              <a:t>20,000</a:t>
+            </a:r>
+          </a:p>
+        </p:txBody>
+      </p:sp>
+      <p:sp>
+        <p:nvSpPr>
+          <p:cNvPr id="40" name="Split out 3-4"/>
           <p:cNvSpPr/>
           <p:nvPr/>
         </p:nvSpPr>
         <p:spPr>
           <a:xfrm>
-            <a:off x="5532120" y="2468880"/>
-            <a:ext cx="3154680" cy="384048"/>
+            <a:off x="6880860" y="1911096"/>
+            <a:ext cx="932688" cy="310896"/>
           </a:xfrm>
           <a:prstGeom prst="rect">
             <a:avLst/>
@@ -39750,52 +39969,14 @@
       </p:sp>
       <p:sp>
         <p:nvSpPr>
-          <p:cNvPr id="39" name="Split out SRM label"/>
+          <p:cNvPr id="41" name="Split out text 3-4"/>
           <p:cNvSpPr txBox="1"/>
           <p:nvPr/>
         </p:nvSpPr>
         <p:spPr>
           <a:xfrm>
-            <a:off x="5623560" y="2468880"/>
-            <a:ext cx="1828800" cy="384048"/>
-          </a:xfrm>
-          <a:prstGeom prst="rect">
-            <a:avLst/>
-          </a:prstGeom>
-          <a:noFill/>
-        </p:spPr>
-        <p:txBody>
-          <a:bodyPr wrap="square" lIns="0" rIns="0" tIns="0" bIns="0" anchor="ctr">
-            <a:noAutofit/>
-          </a:bodyPr>
-          <a:lstStyle/>
-          <a:p>
-            <a:pPr algn="l">
-              <a:spcAft>
-                <a:spcPts val="400"/>
-              </a:spcAft>
-            </a:pPr>
-            <a:r>
-              <a:rPr sz="1150" b="1" lang="en-GB">
-                <a:solidFill>
-                  <a:schemeClr val="tx2"/>
-                </a:solidFill>
-              </a:rPr>
-              <a:t>SRM p</a:t>
-            </a:r>
-          </a:p>
-        </p:txBody>
-      </p:sp>
-      <p:sp>
-        <p:nvSpPr>
-          <p:cNvPr id="40" name="Split out SRM value"/>
-          <p:cNvSpPr txBox="1"/>
-          <p:nvPr/>
-        </p:nvSpPr>
-        <p:spPr>
-          <a:xfrm>
-            <a:off x="7589520" y="2468880"/>
-            <a:ext cx="978408" cy="384048"/>
+            <a:off x="6972300" y="1911096"/>
+            <a:ext cx="749808" cy="310896"/>
           </a:xfrm>
           <a:prstGeom prst="rect">
             <a:avLst/>
@@ -39814,64 +39995,26 @@
               </a:spcAft>
             </a:pPr>
             <a:r>
-              <a:rPr sz="1150" b="0" lang="en-GB">
+              <a:rPr sz="1100" b="0" lang="en-GB">
                 <a:solidFill>
                   <a:schemeClr val="tx1"/>
                 </a:solidFill>
               </a:rPr>
-              <a:t>1.000</a:t>
-            </a:r>
-          </a:p>
-        </p:txBody>
-      </p:sp>
-      <p:sp>
-        <p:nvSpPr>
-          <p:cNvPr id="41" name="Split caption"/>
-          <p:cNvSpPr txBox="1"/>
-          <p:nvPr/>
-        </p:nvSpPr>
-        <p:spPr>
-          <a:xfrm>
-            <a:off x="5532120" y="2871216"/>
-            <a:ext cx="3154680" cy="274320"/>
-          </a:xfrm>
-          <a:prstGeom prst="rect">
-            <a:avLst/>
-          </a:prstGeom>
-          <a:noFill/>
-        </p:spPr>
-        <p:txBody>
-          <a:bodyPr wrap="square" lIns="0" rIns="0" tIns="0" bIns="0" anchor="ctr">
-            <a:noAutofit/>
-          </a:bodyPr>
-          <a:lstStyle/>
-          <a:p>
-            <a:pPr algn="l">
-              <a:spcAft>
-                <a:spcPts val="400"/>
-              </a:spcAft>
-            </a:pPr>
-            <a:r>
-              <a:rPr sz="1100" b="0" lang="en-GB">
-                <a:solidFill>
-                  <a:srgbClr val="595959"/>
-                </a:solidFill>
-              </a:rPr>
-              <a:t>Customers and clicks per version</a:t>
-            </a:r>
-          </a:p>
-        </p:txBody>
-      </p:sp>
-      <p:sp>
-        <p:nvSpPr>
-          <p:cNvPr id="42" name="Split tip box"/>
+              <a:t>3.93 %</a:t>
+            </a:r>
+          </a:p>
+        </p:txBody>
+      </p:sp>
+      <p:sp>
+        <p:nvSpPr>
+          <p:cNvPr id="42" name="Split out 3-5"/>
           <p:cNvSpPr/>
           <p:nvPr/>
         </p:nvSpPr>
         <p:spPr>
           <a:xfrm>
-            <a:off x="457200" y="4206240"/>
-            <a:ext cx="8229600" cy="457200"/>
+            <a:off x="7840980" y="1911096"/>
+            <a:ext cx="845820" cy="310896"/>
           </a:xfrm>
           <a:prstGeom prst="rect">
             <a:avLst/>
@@ -39904,9 +40047,1407 @@
           <a:p/>
         </p:txBody>
       </p:sp>
+      <p:sp>
+        <p:nvSpPr>
+          <p:cNvPr id="43" name="Split out text 3-5"/>
+          <p:cNvSpPr txBox="1"/>
+          <p:nvPr/>
+        </p:nvSpPr>
+        <p:spPr>
+          <a:xfrm>
+            <a:off x="7932420" y="1911096"/>
+            <a:ext cx="635508" cy="310896"/>
+          </a:xfrm>
+          <a:prstGeom prst="rect">
+            <a:avLst/>
+          </a:prstGeom>
+          <a:noFill/>
+        </p:spPr>
+        <p:txBody>
+          <a:bodyPr wrap="square" lIns="0" rIns="0" tIns="0" bIns="0" anchor="ctr">
+            <a:noAutofit/>
+          </a:bodyPr>
+          <a:lstStyle/>
+          <a:p>
+            <a:pPr algn="r">
+              <a:spcAft>
+                <a:spcPts val="400"/>
+              </a:spcAft>
+            </a:pPr>
+            <a:r>
+              <a:rPr sz="1100" b="0" lang="en-GB">
+                <a:solidFill>
+                  <a:schemeClr val="tx1"/>
+                </a:solidFill>
+              </a:rPr>
+              <a:t>59.9 %</a:t>
+            </a:r>
+          </a:p>
+        </p:txBody>
+      </p:sp>
+      <p:sp>
+        <p:nvSpPr>
+          <p:cNvPr id="44" name="Split caption"/>
+          <p:cNvSpPr txBox="1"/>
+          <p:nvPr/>
+        </p:nvSpPr>
+        <p:spPr>
+          <a:xfrm>
+            <a:off x="4640580" y="2249424"/>
+            <a:ext cx="4046220" cy="274320"/>
+          </a:xfrm>
+          <a:prstGeom prst="rect">
+            <a:avLst/>
+          </a:prstGeom>
+          <a:noFill/>
+        </p:spPr>
+        <p:txBody>
+          <a:bodyPr wrap="square" lIns="0" rIns="0" tIns="0" bIns="0" anchor="ctr">
+            <a:noAutofit/>
+          </a:bodyPr>
+          <a:lstStyle/>
+          <a:p>
+            <a:pPr algn="l">
+              <a:spcAft>
+                <a:spcPts val="400"/>
+              </a:spcAft>
+            </a:pPr>
+            <a:r>
+              <a:rPr sz="1100" b="0" lang="en-GB">
+                <a:solidFill>
+                  <a:srgbClr val="595959"/>
+                </a:solidFill>
+              </a:rPr>
+              <a:t>The mean of a dummy is a share</a:t>
+            </a:r>
+          </a:p>
+        </p:txBody>
+      </p:sp>
+      <p:sp>
+        <p:nvSpPr>
+          <p:cNvPr id="45" name="Dummy table 1-1"/>
+          <p:cNvSpPr/>
+          <p:nvPr/>
+        </p:nvSpPr>
+        <p:spPr>
+          <a:xfrm>
+            <a:off x="4640580" y="2587752"/>
+            <a:ext cx="1069848" cy="310896"/>
+          </a:xfrm>
+          <a:prstGeom prst="rect">
+            <a:avLst/>
+          </a:prstGeom>
+          <a:solidFill>
+            <a:schemeClr val="accent1"/>
+          </a:solidFill>
+          <a:ln>
+            <a:noFill/>
+          </a:ln>
+          <a:effectLst/>
+        </p:spPr>
+        <p:style>
+          <a:lnRef idx="1">
+            <a:schemeClr val="accent1"/>
+          </a:lnRef>
+          <a:fillRef idx="3">
+            <a:schemeClr val="accent1"/>
+          </a:fillRef>
+          <a:effectRef idx="2">
+            <a:schemeClr val="accent1"/>
+          </a:effectRef>
+          <a:fontRef idx="minor">
+            <a:schemeClr val="lt1"/>
+          </a:fontRef>
+        </p:style>
+        <p:txBody>
+          <a:bodyPr rtlCol="0" anchor="ctr"/>
+          <a:lstStyle/>
+          <a:p/>
+        </p:txBody>
+      </p:sp>
+      <p:sp>
+        <p:nvSpPr>
+          <p:cNvPr id="46" name="Dummy table text 1-1"/>
+          <p:cNvSpPr txBox="1"/>
+          <p:nvPr/>
+        </p:nvSpPr>
+        <p:spPr>
+          <a:xfrm>
+            <a:off x="4732020" y="2587752"/>
+            <a:ext cx="886968" cy="310896"/>
+          </a:xfrm>
+          <a:prstGeom prst="rect">
+            <a:avLst/>
+          </a:prstGeom>
+          <a:noFill/>
+        </p:spPr>
+        <p:txBody>
+          <a:bodyPr wrap="square" lIns="0" rIns="0" tIns="0" bIns="0" anchor="ctr">
+            <a:noAutofit/>
+          </a:bodyPr>
+          <a:lstStyle/>
+          <a:p>
+            <a:pPr algn="l">
+              <a:spcAft>
+                <a:spcPts val="400"/>
+              </a:spcAft>
+            </a:pPr>
+            <a:r>
+              <a:rPr sz="1100" b="1" lang="en-GB">
+                <a:solidFill>
+                  <a:schemeClr val="bg1"/>
+                </a:solidFill>
+              </a:rPr>
+              <a:t>Column</a:t>
+            </a:r>
+          </a:p>
+        </p:txBody>
+      </p:sp>
+      <p:sp>
+        <p:nvSpPr>
+          <p:cNvPr id="47" name="Dummy table 1-2"/>
+          <p:cNvSpPr/>
+          <p:nvPr/>
+        </p:nvSpPr>
+        <p:spPr>
+          <a:xfrm>
+            <a:off x="5737860" y="2587752"/>
+            <a:ext cx="1024128" cy="310896"/>
+          </a:xfrm>
+          <a:prstGeom prst="rect">
+            <a:avLst/>
+          </a:prstGeom>
+          <a:solidFill>
+            <a:schemeClr val="accent1"/>
+          </a:solidFill>
+          <a:ln>
+            <a:noFill/>
+          </a:ln>
+          <a:effectLst/>
+        </p:spPr>
+        <p:style>
+          <a:lnRef idx="1">
+            <a:schemeClr val="accent1"/>
+          </a:lnRef>
+          <a:fillRef idx="3">
+            <a:schemeClr val="accent1"/>
+          </a:fillRef>
+          <a:effectRef idx="2">
+            <a:schemeClr val="accent1"/>
+          </a:effectRef>
+          <a:fontRef idx="minor">
+            <a:schemeClr val="lt1"/>
+          </a:fontRef>
+        </p:style>
+        <p:txBody>
+          <a:bodyPr rtlCol="0" anchor="ctr"/>
+          <a:lstStyle/>
+          <a:p/>
+        </p:txBody>
+      </p:sp>
+      <p:sp>
+        <p:nvSpPr>
+          <p:cNvPr id="48" name="Dummy table text 1-2"/>
+          <p:cNvSpPr txBox="1"/>
+          <p:nvPr/>
+        </p:nvSpPr>
+        <p:spPr>
+          <a:xfrm>
+            <a:off x="5829300" y="2587752"/>
+            <a:ext cx="841248" cy="310896"/>
+          </a:xfrm>
+          <a:prstGeom prst="rect">
+            <a:avLst/>
+          </a:prstGeom>
+          <a:noFill/>
+        </p:spPr>
+        <p:txBody>
+          <a:bodyPr wrap="square" lIns="0" rIns="0" tIns="0" bIns="0" anchor="ctr">
+            <a:noAutofit/>
+          </a:bodyPr>
+          <a:lstStyle/>
+          <a:p>
+            <a:pPr algn="l">
+              <a:spcAft>
+                <a:spcPts val="400"/>
+              </a:spcAft>
+            </a:pPr>
+            <a:r>
+              <a:rPr sz="1100" b="1" lang="en-GB">
+                <a:solidFill>
+                  <a:schemeClr val="bg1"/>
+                </a:solidFill>
+              </a:rPr>
+              <a:t>Dummy</a:t>
+            </a:r>
+          </a:p>
+        </p:txBody>
+      </p:sp>
+      <p:sp>
+        <p:nvSpPr>
+          <p:cNvPr id="49" name="Dummy table 1-3"/>
+          <p:cNvSpPr/>
+          <p:nvPr/>
+        </p:nvSpPr>
+        <p:spPr>
+          <a:xfrm>
+            <a:off x="6789420" y="2587752"/>
+            <a:ext cx="886968" cy="310896"/>
+          </a:xfrm>
+          <a:prstGeom prst="rect">
+            <a:avLst/>
+          </a:prstGeom>
+          <a:solidFill>
+            <a:schemeClr val="accent1"/>
+          </a:solidFill>
+          <a:ln>
+            <a:noFill/>
+          </a:ln>
+          <a:effectLst/>
+        </p:spPr>
+        <p:style>
+          <a:lnRef idx="1">
+            <a:schemeClr val="accent1"/>
+          </a:lnRef>
+          <a:fillRef idx="3">
+            <a:schemeClr val="accent1"/>
+          </a:fillRef>
+          <a:effectRef idx="2">
+            <a:schemeClr val="accent1"/>
+          </a:effectRef>
+          <a:fontRef idx="minor">
+            <a:schemeClr val="lt1"/>
+          </a:fontRef>
+        </p:style>
+        <p:txBody>
+          <a:bodyPr rtlCol="0" anchor="ctr"/>
+          <a:lstStyle/>
+          <a:p/>
+        </p:txBody>
+      </p:sp>
+      <p:sp>
+        <p:nvSpPr>
+          <p:cNvPr id="50" name="Dummy table text 1-3"/>
+          <p:cNvSpPr txBox="1"/>
+          <p:nvPr/>
+        </p:nvSpPr>
+        <p:spPr>
+          <a:xfrm>
+            <a:off x="6880860" y="2587752"/>
+            <a:ext cx="704088" cy="310896"/>
+          </a:xfrm>
+          <a:prstGeom prst="rect">
+            <a:avLst/>
+          </a:prstGeom>
+          <a:noFill/>
+        </p:spPr>
+        <p:txBody>
+          <a:bodyPr wrap="square" lIns="0" rIns="0" tIns="0" bIns="0" anchor="ctr">
+            <a:noAutofit/>
+          </a:bodyPr>
+          <a:lstStyle/>
+          <a:p>
+            <a:pPr algn="l">
+              <a:spcAft>
+                <a:spcPts val="400"/>
+              </a:spcAft>
+            </a:pPr>
+            <a:r>
+              <a:rPr sz="1100" b="1" lang="en-GB">
+                <a:solidFill>
+                  <a:schemeClr val="bg1"/>
+                </a:solidFill>
+              </a:rPr>
+              <a:t>1 =</a:t>
+            </a:r>
+          </a:p>
+        </p:txBody>
+      </p:sp>
+      <p:sp>
+        <p:nvSpPr>
+          <p:cNvPr id="51" name="Dummy table 1-4"/>
+          <p:cNvSpPr/>
+          <p:nvPr/>
+        </p:nvSpPr>
+        <p:spPr>
+          <a:xfrm>
+            <a:off x="7703820" y="2587752"/>
+            <a:ext cx="982980" cy="310896"/>
+          </a:xfrm>
+          <a:prstGeom prst="rect">
+            <a:avLst/>
+          </a:prstGeom>
+          <a:solidFill>
+            <a:schemeClr val="accent1"/>
+          </a:solidFill>
+          <a:ln>
+            <a:noFill/>
+          </a:ln>
+          <a:effectLst/>
+        </p:spPr>
+        <p:style>
+          <a:lnRef idx="1">
+            <a:schemeClr val="accent1"/>
+          </a:lnRef>
+          <a:fillRef idx="3">
+            <a:schemeClr val="accent1"/>
+          </a:fillRef>
+          <a:effectRef idx="2">
+            <a:schemeClr val="accent1"/>
+          </a:effectRef>
+          <a:fontRef idx="minor">
+            <a:schemeClr val="lt1"/>
+          </a:fontRef>
+        </p:style>
+        <p:txBody>
+          <a:bodyPr rtlCol="0" anchor="ctr"/>
+          <a:lstStyle/>
+          <a:p/>
+        </p:txBody>
+      </p:sp>
+      <p:sp>
+        <p:nvSpPr>
+          <p:cNvPr id="52" name="Dummy table text 1-4"/>
+          <p:cNvSpPr txBox="1"/>
+          <p:nvPr/>
+        </p:nvSpPr>
+        <p:spPr>
+          <a:xfrm>
+            <a:off x="7795260" y="2587752"/>
+            <a:ext cx="772668" cy="310896"/>
+          </a:xfrm>
+          <a:prstGeom prst="rect">
+            <a:avLst/>
+          </a:prstGeom>
+          <a:noFill/>
+        </p:spPr>
+        <p:txBody>
+          <a:bodyPr wrap="square" lIns="0" rIns="0" tIns="0" bIns="0" anchor="ctr">
+            <a:noAutofit/>
+          </a:bodyPr>
+          <a:lstStyle/>
+          <a:p>
+            <a:pPr algn="l">
+              <a:spcAft>
+                <a:spcPts val="400"/>
+              </a:spcAft>
+            </a:pPr>
+            <a:r>
+              <a:rPr sz="1100" b="1" lang="en-GB">
+                <a:solidFill>
+                  <a:schemeClr val="bg1"/>
+                </a:solidFill>
+              </a:rPr>
+              <a:t>0 =</a:t>
+            </a:r>
+          </a:p>
+        </p:txBody>
+      </p:sp>
+      <p:sp>
+        <p:nvSpPr>
+          <p:cNvPr id="53" name="Dummy table 2-1"/>
+          <p:cNvSpPr/>
+          <p:nvPr/>
+        </p:nvSpPr>
+        <p:spPr>
+          <a:xfrm>
+            <a:off x="4640580" y="2926080"/>
+            <a:ext cx="1069848" cy="310896"/>
+          </a:xfrm>
+          <a:prstGeom prst="rect">
+            <a:avLst/>
+          </a:prstGeom>
+          <a:solidFill>
+            <a:schemeClr val="bg2"/>
+          </a:solidFill>
+          <a:ln>
+            <a:noFill/>
+          </a:ln>
+          <a:effectLst/>
+        </p:spPr>
+        <p:style>
+          <a:lnRef idx="1">
+            <a:schemeClr val="accent1"/>
+          </a:lnRef>
+          <a:fillRef idx="3">
+            <a:schemeClr val="accent1"/>
+          </a:fillRef>
+          <a:effectRef idx="2">
+            <a:schemeClr val="accent1"/>
+          </a:effectRef>
+          <a:fontRef idx="minor">
+            <a:schemeClr val="lt1"/>
+          </a:fontRef>
+        </p:style>
+        <p:txBody>
+          <a:bodyPr rtlCol="0" anchor="ctr"/>
+          <a:lstStyle/>
+          <a:p/>
+        </p:txBody>
+      </p:sp>
+      <p:sp>
+        <p:nvSpPr>
+          <p:cNvPr id="54" name="Dummy table text 2-1"/>
+          <p:cNvSpPr txBox="1"/>
+          <p:nvPr/>
+        </p:nvSpPr>
+        <p:spPr>
+          <a:xfrm>
+            <a:off x="4732020" y="2926080"/>
+            <a:ext cx="886968" cy="310896"/>
+          </a:xfrm>
+          <a:prstGeom prst="rect">
+            <a:avLst/>
+          </a:prstGeom>
+          <a:noFill/>
+        </p:spPr>
+        <p:txBody>
+          <a:bodyPr wrap="square" lIns="0" rIns="0" tIns="0" bIns="0" anchor="ctr">
+            <a:noAutofit/>
+          </a:bodyPr>
+          <a:lstStyle/>
+          <a:p>
+            <a:pPr algn="l">
+              <a:spcAft>
+                <a:spcPts val="400"/>
+              </a:spcAft>
+            </a:pPr>
+            <a:r>
+              <a:rPr sz="1100" b="1" lang="en-GB">
+                <a:solidFill>
+                  <a:schemeClr val="tx2"/>
+                </a:solidFill>
+              </a:rPr>
+              <a:t>device</a:t>
+            </a:r>
+          </a:p>
+        </p:txBody>
+      </p:sp>
+      <p:sp>
+        <p:nvSpPr>
+          <p:cNvPr id="55" name="Dummy table 2-2"/>
+          <p:cNvSpPr/>
+          <p:nvPr/>
+        </p:nvSpPr>
+        <p:spPr>
+          <a:xfrm>
+            <a:off x="5737860" y="2926080"/>
+            <a:ext cx="1024128" cy="310896"/>
+          </a:xfrm>
+          <a:prstGeom prst="rect">
+            <a:avLst/>
+          </a:prstGeom>
+          <a:solidFill>
+            <a:schemeClr val="bg2"/>
+          </a:solidFill>
+          <a:ln>
+            <a:noFill/>
+          </a:ln>
+          <a:effectLst/>
+        </p:spPr>
+        <p:style>
+          <a:lnRef idx="1">
+            <a:schemeClr val="accent1"/>
+          </a:lnRef>
+          <a:fillRef idx="3">
+            <a:schemeClr val="accent1"/>
+          </a:fillRef>
+          <a:effectRef idx="2">
+            <a:schemeClr val="accent1"/>
+          </a:effectRef>
+          <a:fontRef idx="minor">
+            <a:schemeClr val="lt1"/>
+          </a:fontRef>
+        </p:style>
+        <p:txBody>
+          <a:bodyPr rtlCol="0" anchor="ctr"/>
+          <a:lstStyle/>
+          <a:p/>
+        </p:txBody>
+      </p:sp>
+      <p:sp>
+        <p:nvSpPr>
+          <p:cNvPr id="56" name="Dummy table text 2-2"/>
+          <p:cNvSpPr txBox="1"/>
+          <p:nvPr/>
+        </p:nvSpPr>
+        <p:spPr>
+          <a:xfrm>
+            <a:off x="5829300" y="2926080"/>
+            <a:ext cx="841248" cy="310896"/>
+          </a:xfrm>
+          <a:prstGeom prst="rect">
+            <a:avLst/>
+          </a:prstGeom>
+          <a:noFill/>
+        </p:spPr>
+        <p:txBody>
+          <a:bodyPr wrap="square" lIns="0" rIns="0" tIns="0" bIns="0" anchor="ctr">
+            <a:noAutofit/>
+          </a:bodyPr>
+          <a:lstStyle/>
+          <a:p>
+            <a:pPr algn="l">
+              <a:spcAft>
+                <a:spcPts val="400"/>
+              </a:spcAft>
+            </a:pPr>
+            <a:r>
+              <a:rPr sz="1100" b="0" lang="en-GB">
+                <a:solidFill>
+                  <a:schemeClr val="tx1"/>
+                </a:solidFill>
+              </a:rPr>
+              <a:t>mobile</a:t>
+            </a:r>
+          </a:p>
+        </p:txBody>
+      </p:sp>
+      <p:sp>
+        <p:nvSpPr>
+          <p:cNvPr id="57" name="Dummy table 2-3"/>
+          <p:cNvSpPr/>
+          <p:nvPr/>
+        </p:nvSpPr>
+        <p:spPr>
+          <a:xfrm>
+            <a:off x="6789420" y="2926080"/>
+            <a:ext cx="886968" cy="310896"/>
+          </a:xfrm>
+          <a:prstGeom prst="rect">
+            <a:avLst/>
+          </a:prstGeom>
+          <a:solidFill>
+            <a:schemeClr val="bg2"/>
+          </a:solidFill>
+          <a:ln>
+            <a:noFill/>
+          </a:ln>
+          <a:effectLst/>
+        </p:spPr>
+        <p:style>
+          <a:lnRef idx="1">
+            <a:schemeClr val="accent1"/>
+          </a:lnRef>
+          <a:fillRef idx="3">
+            <a:schemeClr val="accent1"/>
+          </a:fillRef>
+          <a:effectRef idx="2">
+            <a:schemeClr val="accent1"/>
+          </a:effectRef>
+          <a:fontRef idx="minor">
+            <a:schemeClr val="lt1"/>
+          </a:fontRef>
+        </p:style>
+        <p:txBody>
+          <a:bodyPr rtlCol="0" anchor="ctr"/>
+          <a:lstStyle/>
+          <a:p/>
+        </p:txBody>
+      </p:sp>
+      <p:sp>
+        <p:nvSpPr>
+          <p:cNvPr id="58" name="Dummy table text 2-3"/>
+          <p:cNvSpPr txBox="1"/>
+          <p:nvPr/>
+        </p:nvSpPr>
+        <p:spPr>
+          <a:xfrm>
+            <a:off x="6880860" y="2926080"/>
+            <a:ext cx="704088" cy="310896"/>
+          </a:xfrm>
+          <a:prstGeom prst="rect">
+            <a:avLst/>
+          </a:prstGeom>
+          <a:noFill/>
+        </p:spPr>
+        <p:txBody>
+          <a:bodyPr wrap="square" lIns="0" rIns="0" tIns="0" bIns="0" anchor="ctr">
+            <a:noAutofit/>
+          </a:bodyPr>
+          <a:lstStyle/>
+          <a:p>
+            <a:pPr algn="l">
+              <a:spcAft>
+                <a:spcPts val="400"/>
+              </a:spcAft>
+            </a:pPr>
+            <a:r>
+              <a:rPr sz="1100" b="0" lang="en-GB">
+                <a:solidFill>
+                  <a:schemeClr val="tx1"/>
+                </a:solidFill>
+              </a:rPr>
+              <a:t>mobile</a:t>
+            </a:r>
+          </a:p>
+        </p:txBody>
+      </p:sp>
+      <p:sp>
+        <p:nvSpPr>
+          <p:cNvPr id="59" name="Dummy table 2-4"/>
+          <p:cNvSpPr/>
+          <p:nvPr/>
+        </p:nvSpPr>
+        <p:spPr>
+          <a:xfrm>
+            <a:off x="7703820" y="2926080"/>
+            <a:ext cx="982980" cy="310896"/>
+          </a:xfrm>
+          <a:prstGeom prst="rect">
+            <a:avLst/>
+          </a:prstGeom>
+          <a:solidFill>
+            <a:schemeClr val="bg2"/>
+          </a:solidFill>
+          <a:ln>
+            <a:noFill/>
+          </a:ln>
+          <a:effectLst/>
+        </p:spPr>
+        <p:style>
+          <a:lnRef idx="1">
+            <a:schemeClr val="accent1"/>
+          </a:lnRef>
+          <a:fillRef idx="3">
+            <a:schemeClr val="accent1"/>
+          </a:fillRef>
+          <a:effectRef idx="2">
+            <a:schemeClr val="accent1"/>
+          </a:effectRef>
+          <a:fontRef idx="minor">
+            <a:schemeClr val="lt1"/>
+          </a:fontRef>
+        </p:style>
+        <p:txBody>
+          <a:bodyPr rtlCol="0" anchor="ctr"/>
+          <a:lstStyle/>
+          <a:p/>
+        </p:txBody>
+      </p:sp>
+      <p:sp>
+        <p:nvSpPr>
+          <p:cNvPr id="60" name="Dummy table text 2-4"/>
+          <p:cNvSpPr txBox="1"/>
+          <p:nvPr/>
+        </p:nvSpPr>
+        <p:spPr>
+          <a:xfrm>
+            <a:off x="7795260" y="2926080"/>
+            <a:ext cx="772668" cy="310896"/>
+          </a:xfrm>
+          <a:prstGeom prst="rect">
+            <a:avLst/>
+          </a:prstGeom>
+          <a:noFill/>
+        </p:spPr>
+        <p:txBody>
+          <a:bodyPr wrap="square" lIns="0" rIns="0" tIns="0" bIns="0" anchor="ctr">
+            <a:noAutofit/>
+          </a:bodyPr>
+          <a:lstStyle/>
+          <a:p>
+            <a:pPr algn="l">
+              <a:spcAft>
+                <a:spcPts val="400"/>
+              </a:spcAft>
+            </a:pPr>
+            <a:r>
+              <a:rPr sz="1100" b="0" lang="en-GB">
+                <a:solidFill>
+                  <a:schemeClr val="tx1"/>
+                </a:solidFill>
+              </a:rPr>
+              <a:t>desktop</a:t>
+            </a:r>
+          </a:p>
+        </p:txBody>
+      </p:sp>
+      <p:sp>
+        <p:nvSpPr>
+          <p:cNvPr id="61" name="Dummy table 3-1"/>
+          <p:cNvSpPr/>
+          <p:nvPr/>
+        </p:nvSpPr>
+        <p:spPr>
+          <a:xfrm>
+            <a:off x="4640580" y="3264408"/>
+            <a:ext cx="1069848" cy="310896"/>
+          </a:xfrm>
+          <a:prstGeom prst="rect">
+            <a:avLst/>
+          </a:prstGeom>
+          <a:solidFill>
+            <a:schemeClr val="bg2"/>
+          </a:solidFill>
+          <a:ln>
+            <a:noFill/>
+          </a:ln>
+          <a:effectLst/>
+        </p:spPr>
+        <p:style>
+          <a:lnRef idx="1">
+            <a:schemeClr val="accent1"/>
+          </a:lnRef>
+          <a:fillRef idx="3">
+            <a:schemeClr val="accent1"/>
+          </a:fillRef>
+          <a:effectRef idx="2">
+            <a:schemeClr val="accent1"/>
+          </a:effectRef>
+          <a:fontRef idx="minor">
+            <a:schemeClr val="lt1"/>
+          </a:fontRef>
+        </p:style>
+        <p:txBody>
+          <a:bodyPr rtlCol="0" anchor="ctr"/>
+          <a:lstStyle/>
+          <a:p/>
+        </p:txBody>
+      </p:sp>
+      <p:sp>
+        <p:nvSpPr>
+          <p:cNvPr id="62" name="Dummy table text 3-1"/>
+          <p:cNvSpPr txBox="1"/>
+          <p:nvPr/>
+        </p:nvSpPr>
+        <p:spPr>
+          <a:xfrm>
+            <a:off x="4732020" y="3264408"/>
+            <a:ext cx="886968" cy="310896"/>
+          </a:xfrm>
+          <a:prstGeom prst="rect">
+            <a:avLst/>
+          </a:prstGeom>
+          <a:noFill/>
+        </p:spPr>
+        <p:txBody>
+          <a:bodyPr wrap="square" lIns="0" rIns="0" tIns="0" bIns="0" anchor="ctr">
+            <a:noAutofit/>
+          </a:bodyPr>
+          <a:lstStyle/>
+          <a:p>
+            <a:pPr algn="l">
+              <a:spcAft>
+                <a:spcPts val="400"/>
+              </a:spcAft>
+            </a:pPr>
+            <a:r>
+              <a:rPr sz="1100" b="1" lang="en-GB">
+                <a:solidFill>
+                  <a:schemeClr val="tx2"/>
+                </a:solidFill>
+              </a:rPr>
+              <a:t>country</a:t>
+            </a:r>
+          </a:p>
+        </p:txBody>
+      </p:sp>
+      <p:sp>
+        <p:nvSpPr>
+          <p:cNvPr id="63" name="Dummy table 3-2"/>
+          <p:cNvSpPr/>
+          <p:nvPr/>
+        </p:nvSpPr>
+        <p:spPr>
+          <a:xfrm>
+            <a:off x="5737860" y="3264408"/>
+            <a:ext cx="1024128" cy="310896"/>
+          </a:xfrm>
+          <a:prstGeom prst="rect">
+            <a:avLst/>
+          </a:prstGeom>
+          <a:solidFill>
+            <a:schemeClr val="bg2"/>
+          </a:solidFill>
+          <a:ln>
+            <a:noFill/>
+          </a:ln>
+          <a:effectLst/>
+        </p:spPr>
+        <p:style>
+          <a:lnRef idx="1">
+            <a:schemeClr val="accent1"/>
+          </a:lnRef>
+          <a:fillRef idx="3">
+            <a:schemeClr val="accent1"/>
+          </a:fillRef>
+          <a:effectRef idx="2">
+            <a:schemeClr val="accent1"/>
+          </a:effectRef>
+          <a:fontRef idx="minor">
+            <a:schemeClr val="lt1"/>
+          </a:fontRef>
+        </p:style>
+        <p:txBody>
+          <a:bodyPr rtlCol="0" anchor="ctr"/>
+          <a:lstStyle/>
+          <a:p/>
+        </p:txBody>
+      </p:sp>
+      <p:sp>
+        <p:nvSpPr>
+          <p:cNvPr id="64" name="Dummy table text 3-2"/>
+          <p:cNvSpPr txBox="1"/>
+          <p:nvPr/>
+        </p:nvSpPr>
+        <p:spPr>
+          <a:xfrm>
+            <a:off x="5829300" y="3264408"/>
+            <a:ext cx="841248" cy="310896"/>
+          </a:xfrm>
+          <a:prstGeom prst="rect">
+            <a:avLst/>
+          </a:prstGeom>
+          <a:noFill/>
+        </p:spPr>
+        <p:txBody>
+          <a:bodyPr wrap="square" lIns="0" rIns="0" tIns="0" bIns="0" anchor="ctr">
+            <a:noAutofit/>
+          </a:bodyPr>
+          <a:lstStyle/>
+          <a:p>
+            <a:pPr algn="l">
+              <a:spcAft>
+                <a:spcPts val="400"/>
+              </a:spcAft>
+            </a:pPr>
+            <a:r>
+              <a:rPr sz="1100" b="0" lang="en-GB">
+                <a:solidFill>
+                  <a:schemeClr val="tx1"/>
+                </a:solidFill>
+              </a:rPr>
+              <a:t>spain</a:t>
+            </a:r>
+          </a:p>
+        </p:txBody>
+      </p:sp>
+      <p:sp>
+        <p:nvSpPr>
+          <p:cNvPr id="65" name="Dummy table 3-3"/>
+          <p:cNvSpPr/>
+          <p:nvPr/>
+        </p:nvSpPr>
+        <p:spPr>
+          <a:xfrm>
+            <a:off x="6789420" y="3264408"/>
+            <a:ext cx="886968" cy="310896"/>
+          </a:xfrm>
+          <a:prstGeom prst="rect">
+            <a:avLst/>
+          </a:prstGeom>
+          <a:solidFill>
+            <a:schemeClr val="bg2"/>
+          </a:solidFill>
+          <a:ln>
+            <a:noFill/>
+          </a:ln>
+          <a:effectLst/>
+        </p:spPr>
+        <p:style>
+          <a:lnRef idx="1">
+            <a:schemeClr val="accent1"/>
+          </a:lnRef>
+          <a:fillRef idx="3">
+            <a:schemeClr val="accent1"/>
+          </a:fillRef>
+          <a:effectRef idx="2">
+            <a:schemeClr val="accent1"/>
+          </a:effectRef>
+          <a:fontRef idx="minor">
+            <a:schemeClr val="lt1"/>
+          </a:fontRef>
+        </p:style>
+        <p:txBody>
+          <a:bodyPr rtlCol="0" anchor="ctr"/>
+          <a:lstStyle/>
+          <a:p/>
+        </p:txBody>
+      </p:sp>
+      <p:sp>
+        <p:nvSpPr>
+          <p:cNvPr id="66" name="Dummy table text 3-3"/>
+          <p:cNvSpPr txBox="1"/>
+          <p:nvPr/>
+        </p:nvSpPr>
+        <p:spPr>
+          <a:xfrm>
+            <a:off x="6880860" y="3264408"/>
+            <a:ext cx="704088" cy="310896"/>
+          </a:xfrm>
+          <a:prstGeom prst="rect">
+            <a:avLst/>
+          </a:prstGeom>
+          <a:noFill/>
+        </p:spPr>
+        <p:txBody>
+          <a:bodyPr wrap="square" lIns="0" rIns="0" tIns="0" bIns="0" anchor="ctr">
+            <a:noAutofit/>
+          </a:bodyPr>
+          <a:lstStyle/>
+          <a:p>
+            <a:pPr algn="l">
+              <a:spcAft>
+                <a:spcPts val="400"/>
+              </a:spcAft>
+            </a:pPr>
+            <a:r>
+              <a:rPr sz="1100" b="0" lang="en-GB">
+                <a:solidFill>
+                  <a:schemeClr val="tx1"/>
+                </a:solidFill>
+              </a:rPr>
+              <a:t>ES</a:t>
+            </a:r>
+          </a:p>
+        </p:txBody>
+      </p:sp>
+      <p:sp>
+        <p:nvSpPr>
+          <p:cNvPr id="67" name="Dummy table 3-4"/>
+          <p:cNvSpPr/>
+          <p:nvPr/>
+        </p:nvSpPr>
+        <p:spPr>
+          <a:xfrm>
+            <a:off x="7703820" y="3264408"/>
+            <a:ext cx="982980" cy="310896"/>
+          </a:xfrm>
+          <a:prstGeom prst="rect">
+            <a:avLst/>
+          </a:prstGeom>
+          <a:solidFill>
+            <a:schemeClr val="bg2"/>
+          </a:solidFill>
+          <a:ln>
+            <a:noFill/>
+          </a:ln>
+          <a:effectLst/>
+        </p:spPr>
+        <p:style>
+          <a:lnRef idx="1">
+            <a:schemeClr val="accent1"/>
+          </a:lnRef>
+          <a:fillRef idx="3">
+            <a:schemeClr val="accent1"/>
+          </a:fillRef>
+          <a:effectRef idx="2">
+            <a:schemeClr val="accent1"/>
+          </a:effectRef>
+          <a:fontRef idx="minor">
+            <a:schemeClr val="lt1"/>
+          </a:fontRef>
+        </p:style>
+        <p:txBody>
+          <a:bodyPr rtlCol="0" anchor="ctr"/>
+          <a:lstStyle/>
+          <a:p/>
+        </p:txBody>
+      </p:sp>
+      <p:sp>
+        <p:nvSpPr>
+          <p:cNvPr id="68" name="Dummy table text 3-4"/>
+          <p:cNvSpPr txBox="1"/>
+          <p:nvPr/>
+        </p:nvSpPr>
+        <p:spPr>
+          <a:xfrm>
+            <a:off x="7795260" y="3264408"/>
+            <a:ext cx="772668" cy="310896"/>
+          </a:xfrm>
+          <a:prstGeom prst="rect">
+            <a:avLst/>
+          </a:prstGeom>
+          <a:noFill/>
+        </p:spPr>
+        <p:txBody>
+          <a:bodyPr wrap="square" lIns="0" rIns="0" tIns="0" bIns="0" anchor="ctr">
+            <a:noAutofit/>
+          </a:bodyPr>
+          <a:lstStyle/>
+          <a:p>
+            <a:pPr algn="l">
+              <a:spcAft>
+                <a:spcPts val="400"/>
+              </a:spcAft>
+            </a:pPr>
+            <a:r>
+              <a:rPr sz="1100" b="0" lang="en-GB">
+                <a:solidFill>
+                  <a:schemeClr val="tx1"/>
+                </a:solidFill>
+              </a:rPr>
+              <a:t>DE</a:t>
+            </a:r>
+          </a:p>
+        </p:txBody>
+      </p:sp>
+      <p:sp>
+        <p:nvSpPr>
+          <p:cNvPr id="69" name="Dummy table 4-1"/>
+          <p:cNvSpPr/>
+          <p:nvPr/>
+        </p:nvSpPr>
+        <p:spPr>
+          <a:xfrm>
+            <a:off x="4640580" y="3602736"/>
+            <a:ext cx="1069848" cy="310896"/>
+          </a:xfrm>
+          <a:prstGeom prst="rect">
+            <a:avLst/>
+          </a:prstGeom>
+          <a:solidFill>
+            <a:schemeClr val="bg2"/>
+          </a:solidFill>
+          <a:ln>
+            <a:noFill/>
+          </a:ln>
+          <a:effectLst/>
+        </p:spPr>
+        <p:style>
+          <a:lnRef idx="1">
+            <a:schemeClr val="accent1"/>
+          </a:lnRef>
+          <a:fillRef idx="3">
+            <a:schemeClr val="accent1"/>
+          </a:fillRef>
+          <a:effectRef idx="2">
+            <a:schemeClr val="accent1"/>
+          </a:effectRef>
+          <a:fontRef idx="minor">
+            <a:schemeClr val="lt1"/>
+          </a:fontRef>
+        </p:style>
+        <p:txBody>
+          <a:bodyPr rtlCol="0" anchor="ctr"/>
+          <a:lstStyle/>
+          <a:p/>
+        </p:txBody>
+      </p:sp>
+      <p:sp>
+        <p:nvSpPr>
+          <p:cNvPr id="70" name="Dummy table text 4-1"/>
+          <p:cNvSpPr txBox="1"/>
+          <p:nvPr/>
+        </p:nvSpPr>
+        <p:spPr>
+          <a:xfrm>
+            <a:off x="4732020" y="3602736"/>
+            <a:ext cx="886968" cy="310896"/>
+          </a:xfrm>
+          <a:prstGeom prst="rect">
+            <a:avLst/>
+          </a:prstGeom>
+          <a:noFill/>
+        </p:spPr>
+        <p:txBody>
+          <a:bodyPr wrap="square" lIns="0" rIns="0" tIns="0" bIns="0" anchor="ctr">
+            <a:noAutofit/>
+          </a:bodyPr>
+          <a:lstStyle/>
+          <a:p>
+            <a:pPr algn="l">
+              <a:spcAft>
+                <a:spcPts val="400"/>
+              </a:spcAft>
+            </a:pPr>
+            <a:r>
+              <a:rPr sz="1100" b="1" lang="en-GB">
+                <a:solidFill>
+                  <a:schemeClr val="tx2"/>
+                </a:solidFill>
+              </a:rPr>
+              <a:t>version</a:t>
+            </a:r>
+          </a:p>
+        </p:txBody>
+      </p:sp>
+      <p:sp>
+        <p:nvSpPr>
+          <p:cNvPr id="71" name="Dummy table 4-2"/>
+          <p:cNvSpPr/>
+          <p:nvPr/>
+        </p:nvSpPr>
+        <p:spPr>
+          <a:xfrm>
+            <a:off x="5737860" y="3602736"/>
+            <a:ext cx="1024128" cy="310896"/>
+          </a:xfrm>
+          <a:prstGeom prst="rect">
+            <a:avLst/>
+          </a:prstGeom>
+          <a:solidFill>
+            <a:schemeClr val="bg2"/>
+          </a:solidFill>
+          <a:ln>
+            <a:noFill/>
+          </a:ln>
+          <a:effectLst/>
+        </p:spPr>
+        <p:style>
+          <a:lnRef idx="1">
+            <a:schemeClr val="accent1"/>
+          </a:lnRef>
+          <a:fillRef idx="3">
+            <a:schemeClr val="accent1"/>
+          </a:fillRef>
+          <a:effectRef idx="2">
+            <a:schemeClr val="accent1"/>
+          </a:effectRef>
+          <a:fontRef idx="minor">
+            <a:schemeClr val="lt1"/>
+          </a:fontRef>
+        </p:style>
+        <p:txBody>
+          <a:bodyPr rtlCol="0" anchor="ctr"/>
+          <a:lstStyle/>
+          <a:p/>
+        </p:txBody>
+      </p:sp>
+      <p:sp>
+        <p:nvSpPr>
+          <p:cNvPr id="72" name="Dummy table text 4-2"/>
+          <p:cNvSpPr txBox="1"/>
+          <p:nvPr/>
+        </p:nvSpPr>
+        <p:spPr>
+          <a:xfrm>
+            <a:off x="5829300" y="3602736"/>
+            <a:ext cx="841248" cy="310896"/>
+          </a:xfrm>
+          <a:prstGeom prst="rect">
+            <a:avLst/>
+          </a:prstGeom>
+          <a:noFill/>
+        </p:spPr>
+        <p:txBody>
+          <a:bodyPr wrap="square" lIns="0" rIns="0" tIns="0" bIns="0" anchor="ctr">
+            <a:noAutofit/>
+          </a:bodyPr>
+          <a:lstStyle/>
+          <a:p>
+            <a:pPr algn="l">
+              <a:spcAft>
+                <a:spcPts val="400"/>
+              </a:spcAft>
+            </a:pPr>
+            <a:r>
+              <a:rPr sz="1100" b="0" lang="en-GB">
+                <a:solidFill>
+                  <a:schemeClr val="tx1"/>
+                </a:solidFill>
+              </a:rPr>
+              <a:t>split</a:t>
+            </a:r>
+          </a:p>
+        </p:txBody>
+      </p:sp>
+      <p:sp>
+        <p:nvSpPr>
+          <p:cNvPr id="73" name="Dummy table 4-3"/>
+          <p:cNvSpPr/>
+          <p:nvPr/>
+        </p:nvSpPr>
+        <p:spPr>
+          <a:xfrm>
+            <a:off x="6789420" y="3602736"/>
+            <a:ext cx="886968" cy="310896"/>
+          </a:xfrm>
+          <a:prstGeom prst="rect">
+            <a:avLst/>
+          </a:prstGeom>
+          <a:solidFill>
+            <a:schemeClr val="bg2"/>
+          </a:solidFill>
+          <a:ln>
+            <a:noFill/>
+          </a:ln>
+          <a:effectLst/>
+        </p:spPr>
+        <p:style>
+          <a:lnRef idx="1">
+            <a:schemeClr val="accent1"/>
+          </a:lnRef>
+          <a:fillRef idx="3">
+            <a:schemeClr val="accent1"/>
+          </a:fillRef>
+          <a:effectRef idx="2">
+            <a:schemeClr val="accent1"/>
+          </a:effectRef>
+          <a:fontRef idx="minor">
+            <a:schemeClr val="lt1"/>
+          </a:fontRef>
+        </p:style>
+        <p:txBody>
+          <a:bodyPr rtlCol="0" anchor="ctr"/>
+          <a:lstStyle/>
+          <a:p/>
+        </p:txBody>
+      </p:sp>
+      <p:sp>
+        <p:nvSpPr>
+          <p:cNvPr id="74" name="Dummy table text 4-3"/>
+          <p:cNvSpPr txBox="1"/>
+          <p:nvPr/>
+        </p:nvSpPr>
+        <p:spPr>
+          <a:xfrm>
+            <a:off x="6880860" y="3602736"/>
+            <a:ext cx="704088" cy="310896"/>
+          </a:xfrm>
+          <a:prstGeom prst="rect">
+            <a:avLst/>
+          </a:prstGeom>
+          <a:noFill/>
+        </p:spPr>
+        <p:txBody>
+          <a:bodyPr wrap="square" lIns="0" rIns="0" tIns="0" bIns="0" anchor="ctr">
+            <a:noAutofit/>
+          </a:bodyPr>
+          <a:lstStyle/>
+          <a:p>
+            <a:pPr algn="l">
+              <a:spcAft>
+                <a:spcPts val="400"/>
+              </a:spcAft>
+            </a:pPr>
+            <a:r>
+              <a:rPr sz="1100" b="0" lang="en-GB">
+                <a:solidFill>
+                  <a:schemeClr val="tx1"/>
+                </a:solidFill>
+              </a:rPr>
+              <a:t>B</a:t>
+            </a:r>
+          </a:p>
+        </p:txBody>
+      </p:sp>
+      <p:sp>
+        <p:nvSpPr>
+          <p:cNvPr id="75" name="Dummy table 4-4"/>
+          <p:cNvSpPr/>
+          <p:nvPr/>
+        </p:nvSpPr>
+        <p:spPr>
+          <a:xfrm>
+            <a:off x="7703820" y="3602736"/>
+            <a:ext cx="982980" cy="310896"/>
+          </a:xfrm>
+          <a:prstGeom prst="rect">
+            <a:avLst/>
+          </a:prstGeom>
+          <a:solidFill>
+            <a:schemeClr val="bg2"/>
+          </a:solidFill>
+          <a:ln>
+            <a:noFill/>
+          </a:ln>
+          <a:effectLst/>
+        </p:spPr>
+        <p:style>
+          <a:lnRef idx="1">
+            <a:schemeClr val="accent1"/>
+          </a:lnRef>
+          <a:fillRef idx="3">
+            <a:schemeClr val="accent1"/>
+          </a:fillRef>
+          <a:effectRef idx="2">
+            <a:schemeClr val="accent1"/>
+          </a:effectRef>
+          <a:fontRef idx="minor">
+            <a:schemeClr val="lt1"/>
+          </a:fontRef>
+        </p:style>
+        <p:txBody>
+          <a:bodyPr rtlCol="0" anchor="ctr"/>
+          <a:lstStyle/>
+          <a:p/>
+        </p:txBody>
+      </p:sp>
+      <p:sp>
+        <p:nvSpPr>
+          <p:cNvPr id="76" name="Dummy table text 4-4"/>
+          <p:cNvSpPr txBox="1"/>
+          <p:nvPr/>
+        </p:nvSpPr>
+        <p:spPr>
+          <a:xfrm>
+            <a:off x="7795260" y="3602736"/>
+            <a:ext cx="772668" cy="310896"/>
+          </a:xfrm>
+          <a:prstGeom prst="rect">
+            <a:avLst/>
+          </a:prstGeom>
+          <a:noFill/>
+        </p:spPr>
+        <p:txBody>
+          <a:bodyPr wrap="square" lIns="0" rIns="0" tIns="0" bIns="0" anchor="ctr">
+            <a:noAutofit/>
+          </a:bodyPr>
+          <a:lstStyle/>
+          <a:p>
+            <a:pPr algn="l">
+              <a:spcAft>
+                <a:spcPts val="400"/>
+              </a:spcAft>
+            </a:pPr>
+            <a:r>
+              <a:rPr sz="1100" b="0" lang="en-GB">
+                <a:solidFill>
+                  <a:schemeClr val="tx1"/>
+                </a:solidFill>
+              </a:rPr>
+              <a:t>A</a:t>
+            </a:r>
+          </a:p>
+        </p:txBody>
+      </p:sp>
+      <p:sp>
+        <p:nvSpPr>
+          <p:cNvPr id="77" name="Split tip box"/>
+          <p:cNvSpPr/>
+          <p:nvPr/>
+        </p:nvSpPr>
+        <p:spPr>
+          <a:xfrm>
+            <a:off x="4640580" y="4023360"/>
+            <a:ext cx="4046220" cy="411480"/>
+          </a:xfrm>
+          <a:prstGeom prst="rect">
+            <a:avLst/>
+          </a:prstGeom>
+          <a:solidFill>
+            <a:schemeClr val="bg2"/>
+          </a:solidFill>
+          <a:ln>
+            <a:noFill/>
+          </a:ln>
+          <a:effectLst/>
+        </p:spPr>
+        <p:style>
+          <a:lnRef idx="1">
+            <a:schemeClr val="accent1"/>
+          </a:lnRef>
+          <a:fillRef idx="3">
+            <a:schemeClr val="accent1"/>
+          </a:fillRef>
+          <a:effectRef idx="2">
+            <a:schemeClr val="accent1"/>
+          </a:effectRef>
+          <a:fontRef idx="minor">
+            <a:schemeClr val="lt1"/>
+          </a:fontRef>
+        </p:style>
+        <p:txBody>
+          <a:bodyPr rtlCol="0" anchor="ctr"/>
+          <a:lstStyle/>
+          <a:p/>
+        </p:txBody>
+      </p:sp>
       <p:pic>
         <p:nvPicPr>
-          <p:cNvPr id="43" name="Icon Split tip" descr=""/>
+          <p:cNvPr id="78" name="Icon Split tip" descr=""/>
           <p:cNvPicPr>
             <a:picLocks noChangeAspect="1"/>
           </p:cNvPicPr>
@@ -39920,7 +41461,7 @@
         </p:blipFill>
         <p:spPr>
           <a:xfrm>
-            <a:off x="658368" y="4251960"/>
+            <a:off x="4841748" y="4046220"/>
             <a:ext cx="365760" cy="365760"/>
           </a:xfrm>
           <a:prstGeom prst="rect">
@@ -39930,14 +41471,14 @@
       </p:pic>
       <p:sp>
         <p:nvSpPr>
-          <p:cNvPr id="44" name="Split tip text"/>
+          <p:cNvPr id="79" name="Split tip text"/>
           <p:cNvSpPr txBox="1"/>
           <p:nvPr/>
         </p:nvSpPr>
         <p:spPr>
           <a:xfrm>
-            <a:off x="1207008" y="4206240"/>
-            <a:ext cx="7315200" cy="457200"/>
+            <a:off x="5390388" y="4023360"/>
+            <a:ext cx="3131820" cy="411480"/>
           </a:xfrm>
           <a:prstGeom prst="rect">
             <a:avLst/>
@@ -39969,7 +41510,7 @@
                   <a:schemeClr val="tx1"/>
                 </a:solidFill>
               </a:rPr>
-              <a:t>an SRM p below 0.001 means stop and fix the set-up.</a:t>
+              <a:t>customers per group, as planned?</a:t>
             </a:r>
           </a:p>
         </p:txBody>
@@ -40009,7 +41550,7 @@
           <a:p>
             <a:r>
               <a:rPr sz="1600" lang="en-GB"/>
-              <a:t>Step 2: difference, z-test, CI and power</a:t>
+              <a:t>Step 2: the effect of B with OLS</a:t>
             </a:r>
           </a:p>
         </p:txBody>
@@ -40072,7 +41613,7 @@
         <p:spPr>
           <a:xfrm>
             <a:off x="457200" y="1234440"/>
-            <a:ext cx="4937760" cy="274320"/>
+            <a:ext cx="4046220" cy="274320"/>
           </a:xfrm>
           <a:prstGeom prst="rect">
             <a:avLst/>
@@ -40114,7 +41655,7 @@
         <p:spPr>
           <a:xfrm>
             <a:off x="566928" y="1234440"/>
-            <a:ext cx="4718304" cy="274320"/>
+            <a:ext cx="3826764" cy="274320"/>
           </a:xfrm>
           <a:prstGeom prst="rect">
             <a:avLst/>
@@ -40152,7 +41693,7 @@
         <p:spPr>
           <a:xfrm>
             <a:off x="457200" y="1508760"/>
-            <a:ext cx="4937760" cy="2560320"/>
+            <a:ext cx="4046220" cy="2926080"/>
           </a:xfrm>
           <a:prstGeom prst="rect">
             <a:avLst/>
@@ -40194,7 +41735,7 @@
         <p:spPr>
           <a:xfrm>
             <a:off x="594360" y="1600200"/>
-            <a:ext cx="4663440" cy="2377440"/>
+            <a:ext cx="3771900" cy="2743200"/>
           </a:xfrm>
           <a:prstGeom prst="rect">
             <a:avLst/>
@@ -40219,7 +41760,7 @@
                 </a:solidFill>
                 <a:latin typeface="Consolas"/>
               </a:rPr>
-              <a:t>from statsmodels.stats.proportion import (</a:t>
+              <a:t>import statsmodels.formula.api as smf</a:t>
             </a:r>
           </a:p>
           <a:p>
@@ -40235,7 +41776,7 @@
                 </a:solidFill>
                 <a:latin typeface="Consolas"/>
               </a:rPr>
-              <a:t>    proportions_ztest, confint_proportions_2indep,</a:t>
+              <a:t> </a:t>
             </a:r>
           </a:p>
           <a:p>
@@ -40251,7 +41792,7 @@
                 </a:solidFill>
                 <a:latin typeface="Consolas"/>
               </a:rPr>
-              <a:t>    proportion_effectsize)</a:t>
+              <a:t># B - A: the coefficient of the dummy split</a:t>
             </a:r>
           </a:p>
           <a:p>
@@ -40267,7 +41808,7 @@
                 </a:solidFill>
                 <a:latin typeface="Consolas"/>
               </a:rPr>
-              <a:t>from statsmodels.stats.power import NormalIndPower</a:t>
+              <a:t>m = smf.ols("clicked ~ split",</a:t>
             </a:r>
           </a:p>
           <a:p>
@@ -40283,7 +41824,7 @@
                 </a:solidFill>
                 <a:latin typeface="Consolas"/>
               </a:rPr>
-              <a:t> </a:t>
+              <a:t>            data=ab.to_pandas()).fit()</a:t>
             </a:r>
           </a:p>
           <a:p>
@@ -40299,7 +41840,7 @@
                 </a:solidFill>
                 <a:latin typeface="Consolas"/>
               </a:rPr>
-              <a:t>x, n = split["clicks"].to_list(), split["n"].to_list()</a:t>
+              <a:t>print((m.params * 100).round(3))     # pp</a:t>
             </a:r>
           </a:p>
           <a:p>
@@ -40315,7 +41856,7 @@
                 </a:solidFill>
                 <a:latin typeface="Consolas"/>
               </a:rPr>
-              <a:t>z, p = proportions_ztest([x[1], x[0]], [n[1], n[0]])</a:t>
+              <a:t>print(m.pvalues.round(4))</a:t>
             </a:r>
           </a:p>
           <a:p>
@@ -40331,7 +41872,7 @@
                 </a:solidFill>
                 <a:latin typeface="Consolas"/>
               </a:rPr>
-              <a:t>lo, hi = confint_proportions_2indep(x[1], n[1],</a:t>
+              <a:t>print((m.conf_int() * 100).round(2))  # CI</a:t>
             </a:r>
           </a:p>
           <a:p>
@@ -40347,7 +41888,7 @@
                 </a:solidFill>
                 <a:latin typeface="Consolas"/>
               </a:rPr>
-              <a:t>                                    x[0], n[0])   # B - A</a:t>
+              <a:t> </a:t>
             </a:r>
           </a:p>
           <a:p>
@@ -40363,7 +41904,7 @@
                 </a:solidFill>
                 <a:latin typeface="Consolas"/>
               </a:rPr>
-              <a:t> </a:t>
+              <a:t># moderator: does B work better on mobile?</a:t>
             </a:r>
           </a:p>
           <a:p>
@@ -40379,7 +41920,7 @@
                 </a:solidFill>
                 <a:latin typeface="Consolas"/>
               </a:rPr>
-              <a:t>es = proportion_effectsize(0.039, 0.033)</a:t>
+              <a:t>m_mob = smf.ols("clicked ~ split * mobile",</a:t>
             </a:r>
           </a:p>
           <a:p>
@@ -40395,7 +41936,39 @@
                 </a:solidFill>
                 <a:latin typeface="Consolas"/>
               </a:rPr>
-              <a:t>NormalIndPower().solve_power(es, alpha=0.05, power=0.8)</a:t>
+              <a:t>                data=ab.to_pandas()).fit()</a:t>
+            </a:r>
+          </a:p>
+          <a:p>
+            <a:pPr algn="l">
+              <a:spcAft>
+                <a:spcPts val="0"/>
+              </a:spcAft>
+            </a:pPr>
+            <a:r>
+              <a:rPr sz="1000" b="0" lang="en-GB">
+                <a:solidFill>
+                  <a:schemeClr val="bg1"/>
+                </a:solidFill>
+                <a:latin typeface="Consolas"/>
+              </a:rPr>
+              <a:t>print((m_mob.params * 100).round(3))</a:t>
+            </a:r>
+          </a:p>
+          <a:p>
+            <a:pPr algn="l">
+              <a:spcAft>
+                <a:spcPts val="0"/>
+              </a:spcAft>
+            </a:pPr>
+            <a:r>
+              <a:rPr sz="1000" b="0" lang="en-GB">
+                <a:solidFill>
+                  <a:schemeClr val="bg1"/>
+                </a:solidFill>
+                <a:latin typeface="Consolas"/>
+              </a:rPr>
+              <a:t>print(m_mob.pvalues.round(4))</a:t>
             </a:r>
           </a:p>
         </p:txBody>
@@ -40408,8 +41981,8 @@
         </p:nvSpPr>
         <p:spPr>
           <a:xfrm>
-            <a:off x="5532120" y="1234440"/>
-            <a:ext cx="1801368" cy="384048"/>
+            <a:off x="4640580" y="1234440"/>
+            <a:ext cx="1161288" cy="310896"/>
           </a:xfrm>
           <a:prstGeom prst="rect">
             <a:avLst/>
@@ -40450,8 +42023,8 @@
         </p:nvSpPr>
         <p:spPr>
           <a:xfrm>
-            <a:off x="5623560" y="1234440"/>
-            <a:ext cx="1618488" cy="384048"/>
+            <a:off x="4732020" y="1234440"/>
+            <a:ext cx="978408" cy="310896"/>
           </a:xfrm>
           <a:prstGeom prst="rect">
             <a:avLst/>
@@ -40470,12 +42043,12 @@
               </a:spcAft>
             </a:pPr>
             <a:r>
-              <a:rPr sz="1150" b="1" lang="en-GB">
+              <a:rPr sz="1100" b="1" lang="en-GB">
                 <a:solidFill>
                   <a:schemeClr val="bg1"/>
                 </a:solidFill>
               </a:rPr>
-              <a:t>Result</a:t>
+              <a:t>m</a:t>
             </a:r>
           </a:p>
         </p:txBody>
@@ -40488,8 +42061,8 @@
         </p:nvSpPr>
         <p:spPr>
           <a:xfrm>
-            <a:off x="7360920" y="1234440"/>
-            <a:ext cx="1325880" cy="384048"/>
+            <a:off x="5829300" y="1234440"/>
+            <a:ext cx="795528" cy="310896"/>
           </a:xfrm>
           <a:prstGeom prst="rect">
             <a:avLst/>
@@ -40530,8 +42103,8 @@
         </p:nvSpPr>
         <p:spPr>
           <a:xfrm>
-            <a:off x="7452360" y="1234440"/>
-            <a:ext cx="1115568" cy="384048"/>
+            <a:off x="5920740" y="1234440"/>
+            <a:ext cx="612648" cy="310896"/>
           </a:xfrm>
           <a:prstGeom prst="rect">
             <a:avLst/>
@@ -40550,26 +42123,186 @@
               </a:spcAft>
             </a:pPr>
             <a:r>
-              <a:rPr sz="1150" b="1" lang="en-GB">
+              <a:rPr sz="1100" b="1" lang="en-GB">
                 <a:solidFill>
                   <a:schemeClr val="bg1"/>
                 </a:solidFill>
               </a:rPr>
-              <a:t>Value</a:t>
-            </a:r>
-          </a:p>
-        </p:txBody>
-      </p:sp>
-      <p:sp>
-        <p:nvSpPr>
-          <p:cNvPr id="18" name="Test out 2-1"/>
+              <a:t>pp</a:t>
+            </a:r>
+          </a:p>
+        </p:txBody>
+      </p:sp>
+      <p:sp>
+        <p:nvSpPr>
+          <p:cNvPr id="18" name="Test out 1-3"/>
           <p:cNvSpPr/>
           <p:nvPr/>
         </p:nvSpPr>
         <p:spPr>
           <a:xfrm>
-            <a:off x="5532120" y="1645920"/>
-            <a:ext cx="1801368" cy="384048"/>
+            <a:off x="6652260" y="1234440"/>
+            <a:ext cx="795528" cy="310896"/>
+          </a:xfrm>
+          <a:prstGeom prst="rect">
+            <a:avLst/>
+          </a:prstGeom>
+          <a:solidFill>
+            <a:schemeClr val="accent1"/>
+          </a:solidFill>
+          <a:ln>
+            <a:noFill/>
+          </a:ln>
+          <a:effectLst/>
+        </p:spPr>
+        <p:style>
+          <a:lnRef idx="1">
+            <a:schemeClr val="accent1"/>
+          </a:lnRef>
+          <a:fillRef idx="3">
+            <a:schemeClr val="accent1"/>
+          </a:fillRef>
+          <a:effectRef idx="2">
+            <a:schemeClr val="accent1"/>
+          </a:effectRef>
+          <a:fontRef idx="minor">
+            <a:schemeClr val="lt1"/>
+          </a:fontRef>
+        </p:style>
+        <p:txBody>
+          <a:bodyPr rtlCol="0" anchor="ctr"/>
+          <a:lstStyle/>
+          <a:p/>
+        </p:txBody>
+      </p:sp>
+      <p:sp>
+        <p:nvSpPr>
+          <p:cNvPr id="19" name="Test out text 1-3"/>
+          <p:cNvSpPr txBox="1"/>
+          <p:nvPr/>
+        </p:nvSpPr>
+        <p:spPr>
+          <a:xfrm>
+            <a:off x="6743700" y="1234440"/>
+            <a:ext cx="612648" cy="310896"/>
+          </a:xfrm>
+          <a:prstGeom prst="rect">
+            <a:avLst/>
+          </a:prstGeom>
+          <a:noFill/>
+        </p:spPr>
+        <p:txBody>
+          <a:bodyPr wrap="square" lIns="0" rIns="0" tIns="0" bIns="0" anchor="ctr">
+            <a:noAutofit/>
+          </a:bodyPr>
+          <a:lstStyle/>
+          <a:p>
+            <a:pPr algn="r">
+              <a:spcAft>
+                <a:spcPts val="400"/>
+              </a:spcAft>
+            </a:pPr>
+            <a:r>
+              <a:rPr sz="1100" b="1" lang="en-GB">
+                <a:solidFill>
+                  <a:schemeClr val="bg1"/>
+                </a:solidFill>
+              </a:rPr>
+              <a:t>p</a:t>
+            </a:r>
+          </a:p>
+        </p:txBody>
+      </p:sp>
+      <p:sp>
+        <p:nvSpPr>
+          <p:cNvPr id="20" name="Test out 1-4"/>
+          <p:cNvSpPr/>
+          <p:nvPr/>
+        </p:nvSpPr>
+        <p:spPr>
+          <a:xfrm>
+            <a:off x="7475220" y="1234440"/>
+            <a:ext cx="1211580" cy="310896"/>
+          </a:xfrm>
+          <a:prstGeom prst="rect">
+            <a:avLst/>
+          </a:prstGeom>
+          <a:solidFill>
+            <a:schemeClr val="accent1"/>
+          </a:solidFill>
+          <a:ln>
+            <a:noFill/>
+          </a:ln>
+          <a:effectLst/>
+        </p:spPr>
+        <p:style>
+          <a:lnRef idx="1">
+            <a:schemeClr val="accent1"/>
+          </a:lnRef>
+          <a:fillRef idx="3">
+            <a:schemeClr val="accent1"/>
+          </a:fillRef>
+          <a:effectRef idx="2">
+            <a:schemeClr val="accent1"/>
+          </a:effectRef>
+          <a:fontRef idx="minor">
+            <a:schemeClr val="lt1"/>
+          </a:fontRef>
+        </p:style>
+        <p:txBody>
+          <a:bodyPr rtlCol="0" anchor="ctr"/>
+          <a:lstStyle/>
+          <a:p/>
+        </p:txBody>
+      </p:sp>
+      <p:sp>
+        <p:nvSpPr>
+          <p:cNvPr id="21" name="Test out text 1-4"/>
+          <p:cNvSpPr txBox="1"/>
+          <p:nvPr/>
+        </p:nvSpPr>
+        <p:spPr>
+          <a:xfrm>
+            <a:off x="7566660" y="1234440"/>
+            <a:ext cx="1001268" cy="310896"/>
+          </a:xfrm>
+          <a:prstGeom prst="rect">
+            <a:avLst/>
+          </a:prstGeom>
+          <a:noFill/>
+        </p:spPr>
+        <p:txBody>
+          <a:bodyPr wrap="square" lIns="0" rIns="0" tIns="0" bIns="0" anchor="ctr">
+            <a:noAutofit/>
+          </a:bodyPr>
+          <a:lstStyle/>
+          <a:p>
+            <a:pPr algn="r">
+              <a:spcAft>
+                <a:spcPts val="400"/>
+              </a:spcAft>
+            </a:pPr>
+            <a:r>
+              <a:rPr sz="1100" b="1" lang="en-GB">
+                <a:solidFill>
+                  <a:schemeClr val="bg1"/>
+                </a:solidFill>
+              </a:rPr>
+              <a:t>95 % CI</a:t>
+            </a:r>
+          </a:p>
+        </p:txBody>
+      </p:sp>
+      <p:sp>
+        <p:nvSpPr>
+          <p:cNvPr id="22" name="Test out 2-1"/>
+          <p:cNvSpPr/>
+          <p:nvPr/>
+        </p:nvSpPr>
+        <p:spPr>
+          <a:xfrm>
+            <a:off x="4640580" y="1572768"/>
+            <a:ext cx="1161288" cy="310896"/>
           </a:xfrm>
           <a:prstGeom prst="rect">
             <a:avLst/>
@@ -40604,14 +42337,14 @@
       </p:sp>
       <p:sp>
         <p:nvSpPr>
-          <p:cNvPr id="19" name="Test out text 2-1"/>
+          <p:cNvPr id="23" name="Test out text 2-1"/>
           <p:cNvSpPr txBox="1"/>
           <p:nvPr/>
         </p:nvSpPr>
         <p:spPr>
           <a:xfrm>
-            <a:off x="5623560" y="1645920"/>
-            <a:ext cx="1618488" cy="384048"/>
+            <a:off x="4732020" y="1572768"/>
+            <a:ext cx="978408" cy="310896"/>
           </a:xfrm>
           <a:prstGeom prst="rect">
             <a:avLst/>
@@ -40630,26 +42363,26 @@
               </a:spcAft>
             </a:pPr>
             <a:r>
-              <a:rPr sz="1150" b="1" lang="en-GB">
+              <a:rPr sz="1100" b="1" lang="en-GB">
                 <a:solidFill>
                   <a:schemeClr val="tx2"/>
                 </a:solidFill>
               </a:rPr>
-              <a:t>Difference B − A</a:t>
-            </a:r>
-          </a:p>
-        </p:txBody>
-      </p:sp>
-      <p:sp>
-        <p:nvSpPr>
-          <p:cNvPr id="20" name="Test out 2-2"/>
+              <a:t>Intercept</a:t>
+            </a:r>
+          </a:p>
+        </p:txBody>
+      </p:sp>
+      <p:sp>
+        <p:nvSpPr>
+          <p:cNvPr id="24" name="Test out 2-2"/>
           <p:cNvSpPr/>
           <p:nvPr/>
         </p:nvSpPr>
         <p:spPr>
           <a:xfrm>
-            <a:off x="7360920" y="1645920"/>
-            <a:ext cx="1325880" cy="384048"/>
+            <a:off x="5829300" y="1572768"/>
+            <a:ext cx="795528" cy="310896"/>
           </a:xfrm>
           <a:prstGeom prst="rect">
             <a:avLst/>
@@ -40684,14 +42417,14 @@
       </p:sp>
       <p:sp>
         <p:nvSpPr>
-          <p:cNvPr id="21" name="Test out text 2-2"/>
+          <p:cNvPr id="25" name="Test out text 2-2"/>
           <p:cNvSpPr txBox="1"/>
           <p:nvPr/>
         </p:nvSpPr>
         <p:spPr>
           <a:xfrm>
-            <a:off x="7452360" y="1645920"/>
-            <a:ext cx="1115568" cy="384048"/>
+            <a:off x="5920740" y="1572768"/>
+            <a:ext cx="612648" cy="310896"/>
           </a:xfrm>
           <a:prstGeom prst="rect">
             <a:avLst/>
@@ -40710,26 +42443,26 @@
               </a:spcAft>
             </a:pPr>
             <a:r>
-              <a:rPr sz="1150" b="0" lang="en-GB">
+              <a:rPr sz="1100" b="0" lang="en-GB">
                 <a:solidFill>
                   <a:schemeClr val="tx1"/>
                 </a:solidFill>
               </a:rPr>
-              <a:t>+0.60 pp</a:t>
-            </a:r>
-          </a:p>
-        </p:txBody>
-      </p:sp>
-      <p:sp>
-        <p:nvSpPr>
-          <p:cNvPr id="22" name="Test out 3-1"/>
+              <a:t>3.325</a:t>
+            </a:r>
+          </a:p>
+        </p:txBody>
+      </p:sp>
+      <p:sp>
+        <p:nvSpPr>
+          <p:cNvPr id="26" name="Test out 2-3"/>
           <p:cNvSpPr/>
           <p:nvPr/>
         </p:nvSpPr>
         <p:spPr>
           <a:xfrm>
-            <a:off x="5532120" y="2057400"/>
-            <a:ext cx="1801368" cy="384048"/>
+            <a:off x="6652260" y="1572768"/>
+            <a:ext cx="795528" cy="310896"/>
           </a:xfrm>
           <a:prstGeom prst="rect">
             <a:avLst/>
@@ -40764,14 +42497,14 @@
       </p:sp>
       <p:sp>
         <p:nvSpPr>
-          <p:cNvPr id="23" name="Test out text 3-1"/>
+          <p:cNvPr id="27" name="Test out text 2-3"/>
           <p:cNvSpPr txBox="1"/>
           <p:nvPr/>
         </p:nvSpPr>
         <p:spPr>
           <a:xfrm>
-            <a:off x="5623560" y="2057400"/>
-            <a:ext cx="1618488" cy="384048"/>
+            <a:off x="6743700" y="1572768"/>
+            <a:ext cx="612648" cy="310896"/>
           </a:xfrm>
           <a:prstGeom prst="rect">
             <a:avLst/>
@@ -40784,32 +42517,32 @@
           </a:bodyPr>
           <a:lstStyle/>
           <a:p>
-            <a:pPr algn="l">
+            <a:pPr algn="r">
               <a:spcAft>
                 <a:spcPts val="400"/>
               </a:spcAft>
             </a:pPr>
             <a:r>
-              <a:rPr sz="1150" b="1" lang="en-GB">
-                <a:solidFill>
-                  <a:schemeClr val="tx2"/>
-                </a:solidFill>
-              </a:rPr>
-              <a:t>z</a:t>
-            </a:r>
-          </a:p>
-        </p:txBody>
-      </p:sp>
-      <p:sp>
-        <p:nvSpPr>
-          <p:cNvPr id="24" name="Test out 3-2"/>
+              <a:rPr sz="1100" b="0" lang="en-GB">
+                <a:solidFill>
+                  <a:schemeClr val="tx1"/>
+                </a:solidFill>
+              </a:rPr>
+              <a:t>&lt; 0.001</a:t>
+            </a:r>
+          </a:p>
+        </p:txBody>
+      </p:sp>
+      <p:sp>
+        <p:nvSpPr>
+          <p:cNvPr id="28" name="Test out 2-4"/>
           <p:cNvSpPr/>
           <p:nvPr/>
         </p:nvSpPr>
         <p:spPr>
           <a:xfrm>
-            <a:off x="7360920" y="2057400"/>
-            <a:ext cx="1325880" cy="384048"/>
+            <a:off x="7475220" y="1572768"/>
+            <a:ext cx="1211580" cy="310896"/>
           </a:xfrm>
           <a:prstGeom prst="rect">
             <a:avLst/>
@@ -40844,14 +42577,14 @@
       </p:sp>
       <p:sp>
         <p:nvSpPr>
-          <p:cNvPr id="25" name="Test out text 3-2"/>
+          <p:cNvPr id="29" name="Test out text 2-4"/>
           <p:cNvSpPr txBox="1"/>
           <p:nvPr/>
         </p:nvSpPr>
         <p:spPr>
           <a:xfrm>
-            <a:off x="7452360" y="2057400"/>
-            <a:ext cx="1115568" cy="384048"/>
+            <a:off x="7566660" y="1572768"/>
+            <a:ext cx="1001268" cy="310896"/>
           </a:xfrm>
           <a:prstGeom prst="rect">
             <a:avLst/>
@@ -40870,26 +42603,26 @@
               </a:spcAft>
             </a:pPr>
             <a:r>
-              <a:rPr sz="1150" b="0" lang="en-GB">
+              <a:rPr sz="1100" b="0" lang="en-GB">
                 <a:solidFill>
                   <a:schemeClr val="tx1"/>
                 </a:solidFill>
               </a:rPr>
-              <a:t>3.21</a:t>
-            </a:r>
-          </a:p>
-        </p:txBody>
-      </p:sp>
-      <p:sp>
-        <p:nvSpPr>
-          <p:cNvPr id="26" name="Test out 4-1"/>
+              <a:t>[3.07, 3.58]</a:t>
+            </a:r>
+          </a:p>
+        </p:txBody>
+      </p:sp>
+      <p:sp>
+        <p:nvSpPr>
+          <p:cNvPr id="30" name="Test out 3-1"/>
           <p:cNvSpPr/>
           <p:nvPr/>
         </p:nvSpPr>
         <p:spPr>
           <a:xfrm>
-            <a:off x="5532120" y="2468880"/>
-            <a:ext cx="1801368" cy="384048"/>
+            <a:off x="4640580" y="1911096"/>
+            <a:ext cx="1161288" cy="310896"/>
           </a:xfrm>
           <a:prstGeom prst="rect">
             <a:avLst/>
@@ -40924,14 +42657,14 @@
       </p:sp>
       <p:sp>
         <p:nvSpPr>
-          <p:cNvPr id="27" name="Test out text 4-1"/>
+          <p:cNvPr id="31" name="Test out text 3-1"/>
           <p:cNvSpPr txBox="1"/>
           <p:nvPr/>
         </p:nvSpPr>
         <p:spPr>
           <a:xfrm>
-            <a:off x="5623560" y="2468880"/>
-            <a:ext cx="1618488" cy="384048"/>
+            <a:off x="4732020" y="1911096"/>
+            <a:ext cx="978408" cy="310896"/>
           </a:xfrm>
           <a:prstGeom prst="rect">
             <a:avLst/>
@@ -40950,26 +42683,26 @@
               </a:spcAft>
             </a:pPr>
             <a:r>
-              <a:rPr sz="1150" b="1" lang="en-GB">
+              <a:rPr sz="1100" b="1" lang="en-GB">
                 <a:solidFill>
                   <a:schemeClr val="tx2"/>
                 </a:solidFill>
               </a:rPr>
-              <a:t>p</a:t>
-            </a:r>
-          </a:p>
-        </p:txBody>
-      </p:sp>
-      <p:sp>
-        <p:nvSpPr>
-          <p:cNvPr id="28" name="Test out 4-2"/>
+              <a:t>split</a:t>
+            </a:r>
+          </a:p>
+        </p:txBody>
+      </p:sp>
+      <p:sp>
+        <p:nvSpPr>
+          <p:cNvPr id="32" name="Test out 3-2"/>
           <p:cNvSpPr/>
           <p:nvPr/>
         </p:nvSpPr>
         <p:spPr>
           <a:xfrm>
-            <a:off x="7360920" y="2468880"/>
-            <a:ext cx="1325880" cy="384048"/>
+            <a:off x="5829300" y="1911096"/>
+            <a:ext cx="795528" cy="310896"/>
           </a:xfrm>
           <a:prstGeom prst="rect">
             <a:avLst/>
@@ -41004,14 +42737,14 @@
       </p:sp>
       <p:sp>
         <p:nvSpPr>
-          <p:cNvPr id="29" name="Test out text 4-2"/>
+          <p:cNvPr id="33" name="Test out text 3-2"/>
           <p:cNvSpPr txBox="1"/>
           <p:nvPr/>
         </p:nvSpPr>
         <p:spPr>
           <a:xfrm>
-            <a:off x="7452360" y="2468880"/>
-            <a:ext cx="1115568" cy="384048"/>
+            <a:off x="5920740" y="1911096"/>
+            <a:ext cx="612648" cy="310896"/>
           </a:xfrm>
           <a:prstGeom prst="rect">
             <a:avLst/>
@@ -41030,26 +42763,26 @@
               </a:spcAft>
             </a:pPr>
             <a:r>
-              <a:rPr sz="1150" b="0" lang="en-GB">
-                <a:solidFill>
-                  <a:schemeClr val="tx1"/>
-                </a:solidFill>
-              </a:rPr>
-              <a:t>0.0013</a:t>
-            </a:r>
-          </a:p>
-        </p:txBody>
-      </p:sp>
-      <p:sp>
-        <p:nvSpPr>
-          <p:cNvPr id="30" name="Test out 5-1"/>
+              <a:rPr sz="1100" b="1" lang="en-GB">
+                <a:solidFill>
+                  <a:schemeClr val="tx2"/>
+                </a:solidFill>
+              </a:rPr>
+              <a:t>+0.600</a:t>
+            </a:r>
+          </a:p>
+        </p:txBody>
+      </p:sp>
+      <p:sp>
+        <p:nvSpPr>
+          <p:cNvPr id="34" name="Test out 3-3"/>
           <p:cNvSpPr/>
           <p:nvPr/>
         </p:nvSpPr>
         <p:spPr>
           <a:xfrm>
-            <a:off x="5532120" y="2880360"/>
-            <a:ext cx="1801368" cy="384048"/>
+            <a:off x="6652260" y="1911096"/>
+            <a:ext cx="795528" cy="310896"/>
           </a:xfrm>
           <a:prstGeom prst="rect">
             <a:avLst/>
@@ -41084,14 +42817,14 @@
       </p:sp>
       <p:sp>
         <p:nvSpPr>
-          <p:cNvPr id="31" name="Test out text 5-1"/>
+          <p:cNvPr id="35" name="Test out text 3-3"/>
           <p:cNvSpPr txBox="1"/>
           <p:nvPr/>
         </p:nvSpPr>
         <p:spPr>
           <a:xfrm>
-            <a:off x="5623560" y="2880360"/>
-            <a:ext cx="1618488" cy="384048"/>
+            <a:off x="6743700" y="1911096"/>
+            <a:ext cx="612648" cy="310896"/>
           </a:xfrm>
           <a:prstGeom prst="rect">
             <a:avLst/>
@@ -41104,32 +42837,32 @@
           </a:bodyPr>
           <a:lstStyle/>
           <a:p>
-            <a:pPr algn="l">
+            <a:pPr algn="r">
               <a:spcAft>
                 <a:spcPts val="400"/>
               </a:spcAft>
             </a:pPr>
             <a:r>
-              <a:rPr sz="1150" b="1" lang="en-GB">
+              <a:rPr sz="1100" b="1" lang="en-GB">
                 <a:solidFill>
                   <a:schemeClr val="tx2"/>
                 </a:solidFill>
               </a:rPr>
-              <a:t>95 % CI</a:t>
-            </a:r>
-          </a:p>
-        </p:txBody>
-      </p:sp>
-      <p:sp>
-        <p:nvSpPr>
-          <p:cNvPr id="32" name="Test out 5-2"/>
+              <a:t>0.0013</a:t>
+            </a:r>
+          </a:p>
+        </p:txBody>
+      </p:sp>
+      <p:sp>
+        <p:nvSpPr>
+          <p:cNvPr id="36" name="Test out 3-4"/>
           <p:cNvSpPr/>
           <p:nvPr/>
         </p:nvSpPr>
         <p:spPr>
           <a:xfrm>
-            <a:off x="7360920" y="2880360"/>
-            <a:ext cx="1325880" cy="384048"/>
+            <a:off x="7475220" y="1911096"/>
+            <a:ext cx="1211580" cy="310896"/>
           </a:xfrm>
           <a:prstGeom prst="rect">
             <a:avLst/>
@@ -41164,14 +42897,14 @@
       </p:sp>
       <p:sp>
         <p:nvSpPr>
-          <p:cNvPr id="33" name="Test out text 5-2"/>
+          <p:cNvPr id="37" name="Test out text 3-4"/>
           <p:cNvSpPr txBox="1"/>
           <p:nvPr/>
         </p:nvSpPr>
         <p:spPr>
           <a:xfrm>
-            <a:off x="7452360" y="2880360"/>
-            <a:ext cx="1115568" cy="384048"/>
+            <a:off x="7566660" y="1911096"/>
+            <a:ext cx="1001268" cy="310896"/>
           </a:xfrm>
           <a:prstGeom prst="rect">
             <a:avLst/>
@@ -41190,26 +42923,266 @@
               </a:spcAft>
             </a:pPr>
             <a:r>
-              <a:rPr sz="1150" b="0" lang="en-GB">
-                <a:solidFill>
-                  <a:schemeClr val="tx1"/>
-                </a:solidFill>
-              </a:rPr>
-              <a:t>[0.23, 0.97] pp</a:t>
-            </a:r>
-          </a:p>
-        </p:txBody>
-      </p:sp>
-      <p:sp>
-        <p:nvSpPr>
-          <p:cNvPr id="34" name="Test out 6-1"/>
+              <a:rPr sz="1100" b="1" lang="en-GB">
+                <a:solidFill>
+                  <a:schemeClr val="tx2"/>
+                </a:solidFill>
+              </a:rPr>
+              <a:t>[0.23, 0.97]</a:t>
+            </a:r>
+          </a:p>
+        </p:txBody>
+      </p:sp>
+      <p:sp>
+        <p:nvSpPr>
+          <p:cNvPr id="38" name="Moderator out 1-1"/>
           <p:cNvSpPr/>
           <p:nvPr/>
         </p:nvSpPr>
         <p:spPr>
           <a:xfrm>
-            <a:off x="5532120" y="3291840"/>
-            <a:ext cx="1801368" cy="384048"/>
+            <a:off x="4640580" y="2386584"/>
+            <a:ext cx="1709928" cy="310896"/>
+          </a:xfrm>
+          <a:prstGeom prst="rect">
+            <a:avLst/>
+          </a:prstGeom>
+          <a:solidFill>
+            <a:schemeClr val="accent1"/>
+          </a:solidFill>
+          <a:ln>
+            <a:noFill/>
+          </a:ln>
+          <a:effectLst/>
+        </p:spPr>
+        <p:style>
+          <a:lnRef idx="1">
+            <a:schemeClr val="accent1"/>
+          </a:lnRef>
+          <a:fillRef idx="3">
+            <a:schemeClr val="accent1"/>
+          </a:fillRef>
+          <a:effectRef idx="2">
+            <a:schemeClr val="accent1"/>
+          </a:effectRef>
+          <a:fontRef idx="minor">
+            <a:schemeClr val="lt1"/>
+          </a:fontRef>
+        </p:style>
+        <p:txBody>
+          <a:bodyPr rtlCol="0" anchor="ctr"/>
+          <a:lstStyle/>
+          <a:p/>
+        </p:txBody>
+      </p:sp>
+      <p:sp>
+        <p:nvSpPr>
+          <p:cNvPr id="39" name="Moderator out text 1-1"/>
+          <p:cNvSpPr txBox="1"/>
+          <p:nvPr/>
+        </p:nvSpPr>
+        <p:spPr>
+          <a:xfrm>
+            <a:off x="4732020" y="2386584"/>
+            <a:ext cx="1527048" cy="310896"/>
+          </a:xfrm>
+          <a:prstGeom prst="rect">
+            <a:avLst/>
+          </a:prstGeom>
+          <a:noFill/>
+        </p:spPr>
+        <p:txBody>
+          <a:bodyPr wrap="square" lIns="0" rIns="0" tIns="0" bIns="0" anchor="ctr">
+            <a:noAutofit/>
+          </a:bodyPr>
+          <a:lstStyle/>
+          <a:p>
+            <a:pPr algn="l">
+              <a:spcAft>
+                <a:spcPts val="400"/>
+              </a:spcAft>
+            </a:pPr>
+            <a:r>
+              <a:rPr sz="1100" b="1" lang="en-GB">
+                <a:solidFill>
+                  <a:schemeClr val="bg1"/>
+                </a:solidFill>
+              </a:rPr>
+              <a:t>m_mob</a:t>
+            </a:r>
+          </a:p>
+        </p:txBody>
+      </p:sp>
+      <p:sp>
+        <p:nvSpPr>
+          <p:cNvPr id="40" name="Moderator out 1-2"/>
+          <p:cNvSpPr/>
+          <p:nvPr/>
+        </p:nvSpPr>
+        <p:spPr>
+          <a:xfrm>
+            <a:off x="6377940" y="2386584"/>
+            <a:ext cx="1115568" cy="310896"/>
+          </a:xfrm>
+          <a:prstGeom prst="rect">
+            <a:avLst/>
+          </a:prstGeom>
+          <a:solidFill>
+            <a:schemeClr val="accent1"/>
+          </a:solidFill>
+          <a:ln>
+            <a:noFill/>
+          </a:ln>
+          <a:effectLst/>
+        </p:spPr>
+        <p:style>
+          <a:lnRef idx="1">
+            <a:schemeClr val="accent1"/>
+          </a:lnRef>
+          <a:fillRef idx="3">
+            <a:schemeClr val="accent1"/>
+          </a:fillRef>
+          <a:effectRef idx="2">
+            <a:schemeClr val="accent1"/>
+          </a:effectRef>
+          <a:fontRef idx="minor">
+            <a:schemeClr val="lt1"/>
+          </a:fontRef>
+        </p:style>
+        <p:txBody>
+          <a:bodyPr rtlCol="0" anchor="ctr"/>
+          <a:lstStyle/>
+          <a:p/>
+        </p:txBody>
+      </p:sp>
+      <p:sp>
+        <p:nvSpPr>
+          <p:cNvPr id="41" name="Moderator out text 1-2"/>
+          <p:cNvSpPr txBox="1"/>
+          <p:nvPr/>
+        </p:nvSpPr>
+        <p:spPr>
+          <a:xfrm>
+            <a:off x="6469380" y="2386584"/>
+            <a:ext cx="932688" cy="310896"/>
+          </a:xfrm>
+          <a:prstGeom prst="rect">
+            <a:avLst/>
+          </a:prstGeom>
+          <a:noFill/>
+        </p:spPr>
+        <p:txBody>
+          <a:bodyPr wrap="square" lIns="0" rIns="0" tIns="0" bIns="0" anchor="ctr">
+            <a:noAutofit/>
+          </a:bodyPr>
+          <a:lstStyle/>
+          <a:p>
+            <a:pPr algn="r">
+              <a:spcAft>
+                <a:spcPts val="400"/>
+              </a:spcAft>
+            </a:pPr>
+            <a:r>
+              <a:rPr sz="1100" b="1" lang="en-GB">
+                <a:solidFill>
+                  <a:schemeClr val="bg1"/>
+                </a:solidFill>
+              </a:rPr>
+              <a:t>pp</a:t>
+            </a:r>
+          </a:p>
+        </p:txBody>
+      </p:sp>
+      <p:sp>
+        <p:nvSpPr>
+          <p:cNvPr id="42" name="Moderator out 1-3"/>
+          <p:cNvSpPr/>
+          <p:nvPr/>
+        </p:nvSpPr>
+        <p:spPr>
+          <a:xfrm>
+            <a:off x="7520940" y="2386584"/>
+            <a:ext cx="1165860" cy="310896"/>
+          </a:xfrm>
+          <a:prstGeom prst="rect">
+            <a:avLst/>
+          </a:prstGeom>
+          <a:solidFill>
+            <a:schemeClr val="accent1"/>
+          </a:solidFill>
+          <a:ln>
+            <a:noFill/>
+          </a:ln>
+          <a:effectLst/>
+        </p:spPr>
+        <p:style>
+          <a:lnRef idx="1">
+            <a:schemeClr val="accent1"/>
+          </a:lnRef>
+          <a:fillRef idx="3">
+            <a:schemeClr val="accent1"/>
+          </a:fillRef>
+          <a:effectRef idx="2">
+            <a:schemeClr val="accent1"/>
+          </a:effectRef>
+          <a:fontRef idx="minor">
+            <a:schemeClr val="lt1"/>
+          </a:fontRef>
+        </p:style>
+        <p:txBody>
+          <a:bodyPr rtlCol="0" anchor="ctr"/>
+          <a:lstStyle/>
+          <a:p/>
+        </p:txBody>
+      </p:sp>
+      <p:sp>
+        <p:nvSpPr>
+          <p:cNvPr id="43" name="Moderator out text 1-3"/>
+          <p:cNvSpPr txBox="1"/>
+          <p:nvPr/>
+        </p:nvSpPr>
+        <p:spPr>
+          <a:xfrm>
+            <a:off x="7612380" y="2386584"/>
+            <a:ext cx="955548" cy="310896"/>
+          </a:xfrm>
+          <a:prstGeom prst="rect">
+            <a:avLst/>
+          </a:prstGeom>
+          <a:noFill/>
+        </p:spPr>
+        <p:txBody>
+          <a:bodyPr wrap="square" lIns="0" rIns="0" tIns="0" bIns="0" anchor="ctr">
+            <a:noAutofit/>
+          </a:bodyPr>
+          <a:lstStyle/>
+          <a:p>
+            <a:pPr algn="r">
+              <a:spcAft>
+                <a:spcPts val="400"/>
+              </a:spcAft>
+            </a:pPr>
+            <a:r>
+              <a:rPr sz="1100" b="1" lang="en-GB">
+                <a:solidFill>
+                  <a:schemeClr val="bg1"/>
+                </a:solidFill>
+              </a:rPr>
+              <a:t>p</a:t>
+            </a:r>
+          </a:p>
+        </p:txBody>
+      </p:sp>
+      <p:sp>
+        <p:nvSpPr>
+          <p:cNvPr id="44" name="Moderator out 2-1"/>
+          <p:cNvSpPr/>
+          <p:nvPr/>
+        </p:nvSpPr>
+        <p:spPr>
+          <a:xfrm>
+            <a:off x="4640580" y="2724912"/>
+            <a:ext cx="1709928" cy="310896"/>
           </a:xfrm>
           <a:prstGeom prst="rect">
             <a:avLst/>
@@ -41244,14 +43217,14 @@
       </p:sp>
       <p:sp>
         <p:nvSpPr>
-          <p:cNvPr id="35" name="Test out text 6-1"/>
+          <p:cNvPr id="45" name="Moderator out text 2-1"/>
           <p:cNvSpPr txBox="1"/>
           <p:nvPr/>
         </p:nvSpPr>
         <p:spPr>
           <a:xfrm>
-            <a:off x="5623560" y="3291840"/>
-            <a:ext cx="1618488" cy="384048"/>
+            <a:off x="4732020" y="2724912"/>
+            <a:ext cx="1527048" cy="310896"/>
           </a:xfrm>
           <a:prstGeom prst="rect">
             <a:avLst/>
@@ -41270,26 +43243,26 @@
               </a:spcAft>
             </a:pPr>
             <a:r>
-              <a:rPr sz="1150" b="1" lang="en-GB">
+              <a:rPr sz="1100" b="1" lang="en-GB">
                 <a:solidFill>
                   <a:schemeClr val="tx2"/>
                 </a:solidFill>
               </a:rPr>
-              <a:t>n for +0.6 pp</a:t>
-            </a:r>
-          </a:p>
-        </p:txBody>
-      </p:sp>
-      <p:sp>
-        <p:nvSpPr>
-          <p:cNvPr id="36" name="Test out 6-2"/>
+              <a:t>split</a:t>
+            </a:r>
+          </a:p>
+        </p:txBody>
+      </p:sp>
+      <p:sp>
+        <p:nvSpPr>
+          <p:cNvPr id="46" name="Moderator out 2-2"/>
           <p:cNvSpPr/>
           <p:nvPr/>
         </p:nvSpPr>
         <p:spPr>
           <a:xfrm>
-            <a:off x="7360920" y="3291840"/>
-            <a:ext cx="1325880" cy="384048"/>
+            <a:off x="6377940" y="2724912"/>
+            <a:ext cx="1115568" cy="310896"/>
           </a:xfrm>
           <a:prstGeom prst="rect">
             <a:avLst/>
@@ -41324,14 +43297,14 @@
       </p:sp>
       <p:sp>
         <p:nvSpPr>
-          <p:cNvPr id="37" name="Test out text 6-2"/>
+          <p:cNvPr id="47" name="Moderator out text 2-2"/>
           <p:cNvSpPr txBox="1"/>
           <p:nvPr/>
         </p:nvSpPr>
         <p:spPr>
           <a:xfrm>
-            <a:off x="7452360" y="3291840"/>
-            <a:ext cx="1115568" cy="384048"/>
+            <a:off x="6469380" y="2724912"/>
+            <a:ext cx="932688" cy="310896"/>
           </a:xfrm>
           <a:prstGeom prst="rect">
             <a:avLst/>
@@ -41350,64 +43323,26 @@
               </a:spcAft>
             </a:pPr>
             <a:r>
-              <a:rPr sz="1150" b="0" lang="en-GB">
+              <a:rPr sz="1100" b="0" lang="en-GB">
                 <a:solidFill>
                   <a:schemeClr val="tx1"/>
                 </a:solidFill>
               </a:rPr>
-              <a:t>15,107</a:t>
-            </a:r>
-          </a:p>
-        </p:txBody>
-      </p:sp>
-      <p:sp>
-        <p:nvSpPr>
-          <p:cNvPr id="38" name="Test caption"/>
-          <p:cNvSpPr txBox="1"/>
-          <p:nvPr/>
-        </p:nvSpPr>
-        <p:spPr>
-          <a:xfrm>
-            <a:off x="5532120" y="3721608"/>
-            <a:ext cx="3154680" cy="274320"/>
-          </a:xfrm>
-          <a:prstGeom prst="rect">
-            <a:avLst/>
-          </a:prstGeom>
-          <a:noFill/>
-        </p:spPr>
-        <p:txBody>
-          <a:bodyPr wrap="square" lIns="0" rIns="0" tIns="0" bIns="0" anchor="ctr">
-            <a:noAutofit/>
-          </a:bodyPr>
-          <a:lstStyle/>
-          <a:p>
-            <a:pPr algn="l">
-              <a:spcAft>
-                <a:spcPts val="400"/>
-              </a:spcAft>
-            </a:pPr>
-            <a:r>
-              <a:rPr sz="1100" b="0" lang="en-GB">
-                <a:solidFill>
-                  <a:srgbClr val="595959"/>
-                </a:solidFill>
-              </a:rPr>
-              <a:t>n: customers per version for 80 % power</a:t>
-            </a:r>
-          </a:p>
-        </p:txBody>
-      </p:sp>
-      <p:sp>
-        <p:nvSpPr>
-          <p:cNvPr id="39" name="Test tip box"/>
+              <a:t>+0.125</a:t>
+            </a:r>
+          </a:p>
+        </p:txBody>
+      </p:sp>
+      <p:sp>
+        <p:nvSpPr>
+          <p:cNvPr id="48" name="Moderator out 2-3"/>
           <p:cNvSpPr/>
           <p:nvPr/>
         </p:nvSpPr>
         <p:spPr>
           <a:xfrm>
-            <a:off x="457200" y="4206240"/>
-            <a:ext cx="8229600" cy="457200"/>
+            <a:off x="7520940" y="2724912"/>
+            <a:ext cx="1165860" cy="310896"/>
           </a:xfrm>
           <a:prstGeom prst="rect">
             <a:avLst/>
@@ -41440,9 +43375,607 @@
           <a:p/>
         </p:txBody>
       </p:sp>
+      <p:sp>
+        <p:nvSpPr>
+          <p:cNvPr id="49" name="Moderator out text 2-3"/>
+          <p:cNvSpPr txBox="1"/>
+          <p:nvPr/>
+        </p:nvSpPr>
+        <p:spPr>
+          <a:xfrm>
+            <a:off x="7612380" y="2724912"/>
+            <a:ext cx="955548" cy="310896"/>
+          </a:xfrm>
+          <a:prstGeom prst="rect">
+            <a:avLst/>
+          </a:prstGeom>
+          <a:noFill/>
+        </p:spPr>
+        <p:txBody>
+          <a:bodyPr wrap="square" lIns="0" rIns="0" tIns="0" bIns="0" anchor="ctr">
+            <a:noAutofit/>
+          </a:bodyPr>
+          <a:lstStyle/>
+          <a:p>
+            <a:pPr algn="r">
+              <a:spcAft>
+                <a:spcPts val="400"/>
+              </a:spcAft>
+            </a:pPr>
+            <a:r>
+              <a:rPr sz="1100" b="0" lang="en-GB">
+                <a:solidFill>
+                  <a:schemeClr val="tx1"/>
+                </a:solidFill>
+              </a:rPr>
+              <a:t>0.6710</a:t>
+            </a:r>
+          </a:p>
+        </p:txBody>
+      </p:sp>
+      <p:sp>
+        <p:nvSpPr>
+          <p:cNvPr id="50" name="Moderator out 3-1"/>
+          <p:cNvSpPr/>
+          <p:nvPr/>
+        </p:nvSpPr>
+        <p:spPr>
+          <a:xfrm>
+            <a:off x="4640580" y="3063240"/>
+            <a:ext cx="1709928" cy="310896"/>
+          </a:xfrm>
+          <a:prstGeom prst="rect">
+            <a:avLst/>
+          </a:prstGeom>
+          <a:solidFill>
+            <a:schemeClr val="bg2"/>
+          </a:solidFill>
+          <a:ln>
+            <a:noFill/>
+          </a:ln>
+          <a:effectLst/>
+        </p:spPr>
+        <p:style>
+          <a:lnRef idx="1">
+            <a:schemeClr val="accent1"/>
+          </a:lnRef>
+          <a:fillRef idx="3">
+            <a:schemeClr val="accent1"/>
+          </a:fillRef>
+          <a:effectRef idx="2">
+            <a:schemeClr val="accent1"/>
+          </a:effectRef>
+          <a:fontRef idx="minor">
+            <a:schemeClr val="lt1"/>
+          </a:fontRef>
+        </p:style>
+        <p:txBody>
+          <a:bodyPr rtlCol="0" anchor="ctr"/>
+          <a:lstStyle/>
+          <a:p/>
+        </p:txBody>
+      </p:sp>
+      <p:sp>
+        <p:nvSpPr>
+          <p:cNvPr id="51" name="Moderator out text 3-1"/>
+          <p:cNvSpPr txBox="1"/>
+          <p:nvPr/>
+        </p:nvSpPr>
+        <p:spPr>
+          <a:xfrm>
+            <a:off x="4732020" y="3063240"/>
+            <a:ext cx="1527048" cy="310896"/>
+          </a:xfrm>
+          <a:prstGeom prst="rect">
+            <a:avLst/>
+          </a:prstGeom>
+          <a:noFill/>
+        </p:spPr>
+        <p:txBody>
+          <a:bodyPr wrap="square" lIns="0" rIns="0" tIns="0" bIns="0" anchor="ctr">
+            <a:noAutofit/>
+          </a:bodyPr>
+          <a:lstStyle/>
+          <a:p>
+            <a:pPr algn="l">
+              <a:spcAft>
+                <a:spcPts val="400"/>
+              </a:spcAft>
+            </a:pPr>
+            <a:r>
+              <a:rPr sz="1100" b="1" lang="en-GB">
+                <a:solidFill>
+                  <a:schemeClr val="tx2"/>
+                </a:solidFill>
+              </a:rPr>
+              <a:t>mobile</a:t>
+            </a:r>
+          </a:p>
+        </p:txBody>
+      </p:sp>
+      <p:sp>
+        <p:nvSpPr>
+          <p:cNvPr id="52" name="Moderator out 3-2"/>
+          <p:cNvSpPr/>
+          <p:nvPr/>
+        </p:nvSpPr>
+        <p:spPr>
+          <a:xfrm>
+            <a:off x="6377940" y="3063240"/>
+            <a:ext cx="1115568" cy="310896"/>
+          </a:xfrm>
+          <a:prstGeom prst="rect">
+            <a:avLst/>
+          </a:prstGeom>
+          <a:solidFill>
+            <a:schemeClr val="bg2"/>
+          </a:solidFill>
+          <a:ln>
+            <a:noFill/>
+          </a:ln>
+          <a:effectLst/>
+        </p:spPr>
+        <p:style>
+          <a:lnRef idx="1">
+            <a:schemeClr val="accent1"/>
+          </a:lnRef>
+          <a:fillRef idx="3">
+            <a:schemeClr val="accent1"/>
+          </a:fillRef>
+          <a:effectRef idx="2">
+            <a:schemeClr val="accent1"/>
+          </a:effectRef>
+          <a:fontRef idx="minor">
+            <a:schemeClr val="lt1"/>
+          </a:fontRef>
+        </p:style>
+        <p:txBody>
+          <a:bodyPr rtlCol="0" anchor="ctr"/>
+          <a:lstStyle/>
+          <a:p/>
+        </p:txBody>
+      </p:sp>
+      <p:sp>
+        <p:nvSpPr>
+          <p:cNvPr id="53" name="Moderator out text 3-2"/>
+          <p:cNvSpPr txBox="1"/>
+          <p:nvPr/>
+        </p:nvSpPr>
+        <p:spPr>
+          <a:xfrm>
+            <a:off x="6469380" y="3063240"/>
+            <a:ext cx="932688" cy="310896"/>
+          </a:xfrm>
+          <a:prstGeom prst="rect">
+            <a:avLst/>
+          </a:prstGeom>
+          <a:noFill/>
+        </p:spPr>
+        <p:txBody>
+          <a:bodyPr wrap="square" lIns="0" rIns="0" tIns="0" bIns="0" anchor="ctr">
+            <a:noAutofit/>
+          </a:bodyPr>
+          <a:lstStyle/>
+          <a:p>
+            <a:pPr algn="r">
+              <a:spcAft>
+                <a:spcPts val="400"/>
+              </a:spcAft>
+            </a:pPr>
+            <a:r>
+              <a:rPr sz="1100" b="0" lang="en-GB">
+                <a:solidFill>
+                  <a:schemeClr val="tx1"/>
+                </a:solidFill>
+              </a:rPr>
+              <a:t>+0.009</a:t>
+            </a:r>
+          </a:p>
+        </p:txBody>
+      </p:sp>
+      <p:sp>
+        <p:nvSpPr>
+          <p:cNvPr id="54" name="Moderator out 3-3"/>
+          <p:cNvSpPr/>
+          <p:nvPr/>
+        </p:nvSpPr>
+        <p:spPr>
+          <a:xfrm>
+            <a:off x="7520940" y="3063240"/>
+            <a:ext cx="1165860" cy="310896"/>
+          </a:xfrm>
+          <a:prstGeom prst="rect">
+            <a:avLst/>
+          </a:prstGeom>
+          <a:solidFill>
+            <a:schemeClr val="bg2"/>
+          </a:solidFill>
+          <a:ln>
+            <a:noFill/>
+          </a:ln>
+          <a:effectLst/>
+        </p:spPr>
+        <p:style>
+          <a:lnRef idx="1">
+            <a:schemeClr val="accent1"/>
+          </a:lnRef>
+          <a:fillRef idx="3">
+            <a:schemeClr val="accent1"/>
+          </a:fillRef>
+          <a:effectRef idx="2">
+            <a:schemeClr val="accent1"/>
+          </a:effectRef>
+          <a:fontRef idx="minor">
+            <a:schemeClr val="lt1"/>
+          </a:fontRef>
+        </p:style>
+        <p:txBody>
+          <a:bodyPr rtlCol="0" anchor="ctr"/>
+          <a:lstStyle/>
+          <a:p/>
+        </p:txBody>
+      </p:sp>
+      <p:sp>
+        <p:nvSpPr>
+          <p:cNvPr id="55" name="Moderator out text 3-3"/>
+          <p:cNvSpPr txBox="1"/>
+          <p:nvPr/>
+        </p:nvSpPr>
+        <p:spPr>
+          <a:xfrm>
+            <a:off x="7612380" y="3063240"/>
+            <a:ext cx="955548" cy="310896"/>
+          </a:xfrm>
+          <a:prstGeom prst="rect">
+            <a:avLst/>
+          </a:prstGeom>
+          <a:noFill/>
+        </p:spPr>
+        <p:txBody>
+          <a:bodyPr wrap="square" lIns="0" rIns="0" tIns="0" bIns="0" anchor="ctr">
+            <a:noAutofit/>
+          </a:bodyPr>
+          <a:lstStyle/>
+          <a:p>
+            <a:pPr algn="r">
+              <a:spcAft>
+                <a:spcPts val="400"/>
+              </a:spcAft>
+            </a:pPr>
+            <a:r>
+              <a:rPr sz="1100" b="0" lang="en-GB">
+                <a:solidFill>
+                  <a:schemeClr val="tx1"/>
+                </a:solidFill>
+              </a:rPr>
+              <a:t>0.9739</a:t>
+            </a:r>
+          </a:p>
+        </p:txBody>
+      </p:sp>
+      <p:sp>
+        <p:nvSpPr>
+          <p:cNvPr id="56" name="Moderator out 4-1"/>
+          <p:cNvSpPr/>
+          <p:nvPr/>
+        </p:nvSpPr>
+        <p:spPr>
+          <a:xfrm>
+            <a:off x="4640580" y="3401568"/>
+            <a:ext cx="1709928" cy="310896"/>
+          </a:xfrm>
+          <a:prstGeom prst="rect">
+            <a:avLst/>
+          </a:prstGeom>
+          <a:solidFill>
+            <a:schemeClr val="bg2"/>
+          </a:solidFill>
+          <a:ln>
+            <a:noFill/>
+          </a:ln>
+          <a:effectLst/>
+        </p:spPr>
+        <p:style>
+          <a:lnRef idx="1">
+            <a:schemeClr val="accent1"/>
+          </a:lnRef>
+          <a:fillRef idx="3">
+            <a:schemeClr val="accent1"/>
+          </a:fillRef>
+          <a:effectRef idx="2">
+            <a:schemeClr val="accent1"/>
+          </a:effectRef>
+          <a:fontRef idx="minor">
+            <a:schemeClr val="lt1"/>
+          </a:fontRef>
+        </p:style>
+        <p:txBody>
+          <a:bodyPr rtlCol="0" anchor="ctr"/>
+          <a:lstStyle/>
+          <a:p/>
+        </p:txBody>
+      </p:sp>
+      <p:sp>
+        <p:nvSpPr>
+          <p:cNvPr id="57" name="Moderator out text 4-1"/>
+          <p:cNvSpPr txBox="1"/>
+          <p:nvPr/>
+        </p:nvSpPr>
+        <p:spPr>
+          <a:xfrm>
+            <a:off x="4732020" y="3401568"/>
+            <a:ext cx="1527048" cy="310896"/>
+          </a:xfrm>
+          <a:prstGeom prst="rect">
+            <a:avLst/>
+          </a:prstGeom>
+          <a:noFill/>
+        </p:spPr>
+        <p:txBody>
+          <a:bodyPr wrap="square" lIns="0" rIns="0" tIns="0" bIns="0" anchor="ctr">
+            <a:noAutofit/>
+          </a:bodyPr>
+          <a:lstStyle/>
+          <a:p>
+            <a:pPr algn="l">
+              <a:spcAft>
+                <a:spcPts val="400"/>
+              </a:spcAft>
+            </a:pPr>
+            <a:r>
+              <a:rPr sz="1100" b="1" lang="en-GB">
+                <a:solidFill>
+                  <a:schemeClr val="tx2"/>
+                </a:solidFill>
+              </a:rPr>
+              <a:t>split:mobile</a:t>
+            </a:r>
+          </a:p>
+        </p:txBody>
+      </p:sp>
+      <p:sp>
+        <p:nvSpPr>
+          <p:cNvPr id="58" name="Moderator out 4-2"/>
+          <p:cNvSpPr/>
+          <p:nvPr/>
+        </p:nvSpPr>
+        <p:spPr>
+          <a:xfrm>
+            <a:off x="6377940" y="3401568"/>
+            <a:ext cx="1115568" cy="310896"/>
+          </a:xfrm>
+          <a:prstGeom prst="rect">
+            <a:avLst/>
+          </a:prstGeom>
+          <a:solidFill>
+            <a:schemeClr val="bg2"/>
+          </a:solidFill>
+          <a:ln>
+            <a:noFill/>
+          </a:ln>
+          <a:effectLst/>
+        </p:spPr>
+        <p:style>
+          <a:lnRef idx="1">
+            <a:schemeClr val="accent1"/>
+          </a:lnRef>
+          <a:fillRef idx="3">
+            <a:schemeClr val="accent1"/>
+          </a:fillRef>
+          <a:effectRef idx="2">
+            <a:schemeClr val="accent1"/>
+          </a:effectRef>
+          <a:fontRef idx="minor">
+            <a:schemeClr val="lt1"/>
+          </a:fontRef>
+        </p:style>
+        <p:txBody>
+          <a:bodyPr rtlCol="0" anchor="ctr"/>
+          <a:lstStyle/>
+          <a:p/>
+        </p:txBody>
+      </p:sp>
+      <p:sp>
+        <p:nvSpPr>
+          <p:cNvPr id="59" name="Moderator out text 4-2"/>
+          <p:cNvSpPr txBox="1"/>
+          <p:nvPr/>
+        </p:nvSpPr>
+        <p:spPr>
+          <a:xfrm>
+            <a:off x="6469380" y="3401568"/>
+            <a:ext cx="932688" cy="310896"/>
+          </a:xfrm>
+          <a:prstGeom prst="rect">
+            <a:avLst/>
+          </a:prstGeom>
+          <a:noFill/>
+        </p:spPr>
+        <p:txBody>
+          <a:bodyPr wrap="square" lIns="0" rIns="0" tIns="0" bIns="0" anchor="ctr">
+            <a:noAutofit/>
+          </a:bodyPr>
+          <a:lstStyle/>
+          <a:p>
+            <a:pPr algn="r">
+              <a:spcAft>
+                <a:spcPts val="400"/>
+              </a:spcAft>
+            </a:pPr>
+            <a:r>
+              <a:rPr sz="1100" b="1" lang="en-GB">
+                <a:solidFill>
+                  <a:schemeClr val="tx2"/>
+                </a:solidFill>
+              </a:rPr>
+              <a:t>+0.792</a:t>
+            </a:r>
+          </a:p>
+        </p:txBody>
+      </p:sp>
+      <p:sp>
+        <p:nvSpPr>
+          <p:cNvPr id="60" name="Moderator out 4-3"/>
+          <p:cNvSpPr/>
+          <p:nvPr/>
+        </p:nvSpPr>
+        <p:spPr>
+          <a:xfrm>
+            <a:off x="7520940" y="3401568"/>
+            <a:ext cx="1165860" cy="310896"/>
+          </a:xfrm>
+          <a:prstGeom prst="rect">
+            <a:avLst/>
+          </a:prstGeom>
+          <a:solidFill>
+            <a:schemeClr val="bg2"/>
+          </a:solidFill>
+          <a:ln>
+            <a:noFill/>
+          </a:ln>
+          <a:effectLst/>
+        </p:spPr>
+        <p:style>
+          <a:lnRef idx="1">
+            <a:schemeClr val="accent1"/>
+          </a:lnRef>
+          <a:fillRef idx="3">
+            <a:schemeClr val="accent1"/>
+          </a:fillRef>
+          <a:effectRef idx="2">
+            <a:schemeClr val="accent1"/>
+          </a:effectRef>
+          <a:fontRef idx="minor">
+            <a:schemeClr val="lt1"/>
+          </a:fontRef>
+        </p:style>
+        <p:txBody>
+          <a:bodyPr rtlCol="0" anchor="ctr"/>
+          <a:lstStyle/>
+          <a:p/>
+        </p:txBody>
+      </p:sp>
+      <p:sp>
+        <p:nvSpPr>
+          <p:cNvPr id="61" name="Moderator out text 4-3"/>
+          <p:cNvSpPr txBox="1"/>
+          <p:nvPr/>
+        </p:nvSpPr>
+        <p:spPr>
+          <a:xfrm>
+            <a:off x="7612380" y="3401568"/>
+            <a:ext cx="955548" cy="310896"/>
+          </a:xfrm>
+          <a:prstGeom prst="rect">
+            <a:avLst/>
+          </a:prstGeom>
+          <a:noFill/>
+        </p:spPr>
+        <p:txBody>
+          <a:bodyPr wrap="square" lIns="0" rIns="0" tIns="0" bIns="0" anchor="ctr">
+            <a:noAutofit/>
+          </a:bodyPr>
+          <a:lstStyle/>
+          <a:p>
+            <a:pPr algn="r">
+              <a:spcAft>
+                <a:spcPts val="400"/>
+              </a:spcAft>
+            </a:pPr>
+            <a:r>
+              <a:rPr sz="1100" b="1" lang="en-GB">
+                <a:solidFill>
+                  <a:schemeClr val="tx2"/>
+                </a:solidFill>
+              </a:rPr>
+              <a:t>0.0376</a:t>
+            </a:r>
+          </a:p>
+        </p:txBody>
+      </p:sp>
+      <p:sp>
+        <p:nvSpPr>
+          <p:cNvPr id="62" name="Moderator caption"/>
+          <p:cNvSpPr txBox="1"/>
+          <p:nvPr/>
+        </p:nvSpPr>
+        <p:spPr>
+          <a:xfrm>
+            <a:off x="4640580" y="3739896"/>
+            <a:ext cx="4046220" cy="274320"/>
+          </a:xfrm>
+          <a:prstGeom prst="rect">
+            <a:avLst/>
+          </a:prstGeom>
+          <a:noFill/>
+        </p:spPr>
+        <p:txBody>
+          <a:bodyPr wrap="square" lIns="0" rIns="0" tIns="0" bIns="0" anchor="ctr">
+            <a:noAutofit/>
+          </a:bodyPr>
+          <a:lstStyle/>
+          <a:p>
+            <a:pPr algn="l">
+              <a:spcAft>
+                <a:spcPts val="400"/>
+              </a:spcAft>
+            </a:pPr>
+            <a:r>
+              <a:rPr sz="1100" b="0" lang="en-GB">
+                <a:solidFill>
+                  <a:srgbClr val="595959"/>
+                </a:solidFill>
+              </a:rPr>
+              <a:t>split: B on desktop; split:mobile: the extra on mobile</a:t>
+            </a:r>
+          </a:p>
+        </p:txBody>
+      </p:sp>
+      <p:sp>
+        <p:nvSpPr>
+          <p:cNvPr id="63" name="Test tip box"/>
+          <p:cNvSpPr/>
+          <p:nvPr/>
+        </p:nvSpPr>
+        <p:spPr>
+          <a:xfrm>
+            <a:off x="4640580" y="4023360"/>
+            <a:ext cx="4046220" cy="411480"/>
+          </a:xfrm>
+          <a:prstGeom prst="rect">
+            <a:avLst/>
+          </a:prstGeom>
+          <a:solidFill>
+            <a:schemeClr val="bg2"/>
+          </a:solidFill>
+          <a:ln>
+            <a:noFill/>
+          </a:ln>
+          <a:effectLst/>
+        </p:spPr>
+        <p:style>
+          <a:lnRef idx="1">
+            <a:schemeClr val="accent1"/>
+          </a:lnRef>
+          <a:fillRef idx="3">
+            <a:schemeClr val="accent1"/>
+          </a:fillRef>
+          <a:effectRef idx="2">
+            <a:schemeClr val="accent1"/>
+          </a:effectRef>
+          <a:fontRef idx="minor">
+            <a:schemeClr val="lt1"/>
+          </a:fontRef>
+        </p:style>
+        <p:txBody>
+          <a:bodyPr rtlCol="0" anchor="ctr"/>
+          <a:lstStyle/>
+          <a:p/>
+        </p:txBody>
+      </p:sp>
       <p:pic>
         <p:nvPicPr>
-          <p:cNvPr id="40" name="Icon Test tip" descr=""/>
+          <p:cNvPr id="64" name="Icon Test tip" descr=""/>
           <p:cNvPicPr>
             <a:picLocks noChangeAspect="1"/>
           </p:cNvPicPr>
@@ -41456,7 +43989,7 @@
         </p:blipFill>
         <p:spPr>
           <a:xfrm>
-            <a:off x="658368" y="4251960"/>
+            <a:off x="4841748" y="4046220"/>
             <a:ext cx="365760" cy="365760"/>
           </a:xfrm>
           <a:prstGeom prst="rect">
@@ -41466,14 +43999,14 @@
       </p:pic>
       <p:sp>
         <p:nvSpPr>
-          <p:cNvPr id="41" name="Test tip text"/>
+          <p:cNvPr id="65" name="Test tip text"/>
           <p:cNvSpPr txBox="1"/>
           <p:nvPr/>
         </p:nvSpPr>
         <p:spPr>
           <a:xfrm>
-            <a:off x="1207008" y="4206240"/>
-            <a:ext cx="7315200" cy="457200"/>
+            <a:off x="5390388" y="4023360"/>
+            <a:ext cx="3131820" cy="411480"/>
           </a:xfrm>
           <a:prstGeom prst="rect">
             <a:avLst/>
@@ -41505,7 +44038,7 @@
                   <a:schemeClr val="tx1"/>
                 </a:solidFill>
               </a:rPr>
-              <a:t>B adds about 0.6 pp; the sample was planned for this size.</a:t>
+              <a:t>B adds 0.60 pp, more on mobile.</a:t>
             </a:r>
           </a:p>
         </p:txBody>
@@ -41545,7 +44078,7 @@
           <a:p>
             <a:r>
               <a:rPr sz="1600" lang="en-GB"/>
-              <a:t>Step 3: the factorial regression and plot</a:t>
+              <a:t>Step 3: the 2 × 2 with OLS and its plot</a:t>
             </a:r>
           </a:p>
         </p:txBody>
@@ -41608,7 +44141,7 @@
         <p:spPr>
           <a:xfrm>
             <a:off x="457200" y="1234440"/>
-            <a:ext cx="4754880" cy="274320"/>
+            <a:ext cx="4046220" cy="274320"/>
           </a:xfrm>
           <a:prstGeom prst="rect">
             <a:avLst/>
@@ -41650,7 +44183,7 @@
         <p:spPr>
           <a:xfrm>
             <a:off x="566928" y="1234440"/>
-            <a:ext cx="4535424" cy="274320"/>
+            <a:ext cx="3826764" cy="274320"/>
           </a:xfrm>
           <a:prstGeom prst="rect">
             <a:avLst/>
@@ -41688,7 +44221,7 @@
         <p:spPr>
           <a:xfrm>
             <a:off x="457200" y="1508760"/>
-            <a:ext cx="4754880" cy="2560320"/>
+            <a:ext cx="4046220" cy="2926080"/>
           </a:xfrm>
           <a:prstGeom prst="rect">
             <a:avLst/>
@@ -41730,7 +44263,7 @@
         <p:spPr>
           <a:xfrm>
             <a:off x="594360" y="1600200"/>
-            <a:ext cx="4480560" cy="2377440"/>
+            <a:ext cx="3771900" cy="2743200"/>
           </a:xfrm>
           <a:prstGeom prst="rect">
             <a:avLst/>
@@ -41755,7 +44288,7 @@
                 </a:solidFill>
                 <a:latin typeface="Consolas"/>
               </a:rPr>
-              <a:t>import statsmodels.formula.api as smf</a:t>
+              <a:t>from plotnine import ggplot, aes, labs</a:t>
             </a:r>
           </a:p>
           <a:p>
@@ -41771,7 +44304,7 @@
                 </a:solidFill>
                 <a:latin typeface="Consolas"/>
               </a:rPr>
-              <a:t>from plotnine import aes, geom_line, geom_point, ggplot</a:t>
+              <a:t>from plotnine import geom_line, geom_point</a:t>
             </a:r>
           </a:p>
           <a:p>
@@ -41803,7 +44336,7 @@
                 </a:solidFill>
                 <a:latin typeface="Consolas"/>
               </a:rPr>
-              <a:t>fa = pl.read_csv("../../data/abtest/email_factorial.csv")</a:t>
+              <a:t>fa = pl.read_csv(</a:t>
             </a:r>
           </a:p>
           <a:p>
@@ -41819,7 +44352,7 @@
                 </a:solidFill>
                 <a:latin typeface="Consolas"/>
               </a:rPr>
-              <a:t>m = smf.ols("clicked ~ personal * discount",</a:t>
+              <a:t>    "../../data/abtest/email_factorial.csv")</a:t>
             </a:r>
           </a:p>
           <a:p>
@@ -41835,7 +44368,7 @@
                 </a:solidFill>
                 <a:latin typeface="Consolas"/>
               </a:rPr>
-              <a:t>            data=fa.to_pandas()).fit()</a:t>
+              <a:t>m2 = smf.ols("clicked ~ personal * discount",</a:t>
             </a:r>
           </a:p>
           <a:p>
@@ -41851,7 +44384,7 @@
                 </a:solidFill>
                 <a:latin typeface="Consolas"/>
               </a:rPr>
-              <a:t>m.params * 100                     # in pp</a:t>
+              <a:t>             data=fa.to_pandas()).fit()</a:t>
             </a:r>
           </a:p>
           <a:p>
@@ -41867,7 +44400,7 @@
                 </a:solidFill>
                 <a:latin typeface="Consolas"/>
               </a:rPr>
-              <a:t> </a:t>
+              <a:t>print((m2.params * 100).round(3))   # pp</a:t>
             </a:r>
           </a:p>
           <a:p>
@@ -41883,7 +44416,7 @@
                 </a:solidFill>
                 <a:latin typeface="Consolas"/>
               </a:rPr>
-              <a:t>cells = (fa.group_by("personal", "discount")</a:t>
+              <a:t>print(m2.pvalues.round(4))</a:t>
             </a:r>
           </a:p>
           <a:p>
@@ -41899,7 +44432,7 @@
                 </a:solidFill>
                 <a:latin typeface="Consolas"/>
               </a:rPr>
-              <a:t>         .agg(pl.col("clicked").mean().alias("rate")))</a:t>
+              <a:t> </a:t>
             </a:r>
           </a:p>
           <a:p>
@@ -41915,7 +44448,7 @@
                 </a:solidFill>
                 <a:latin typeface="Consolas"/>
               </a:rPr>
-              <a:t>(ggplot(cells, aes("discount", "rate",</a:t>
+              <a:t># interaction plot: click rate per cell</a:t>
             </a:r>
           </a:p>
           <a:p>
@@ -41931,7 +44464,7 @@
                 </a:solidFill>
                 <a:latin typeface="Consolas"/>
               </a:rPr>
-              <a:t>                   colour="factor(personal)"))</a:t>
+              <a:t>cells = (fa.group_by("personal", "discount")</a:t>
             </a:r>
           </a:p>
           <a:p>
@@ -41947,7 +44480,87 @@
                 </a:solidFill>
                 <a:latin typeface="Consolas"/>
               </a:rPr>
-              <a:t> + geom_line() + geom_point())</a:t>
+              <a:t>         .agg(rate=pl.col("clicked").mean()))</a:t>
+            </a:r>
+          </a:p>
+          <a:p>
+            <a:pPr algn="l">
+              <a:spcAft>
+                <a:spcPts val="0"/>
+              </a:spcAft>
+            </a:pPr>
+            <a:r>
+              <a:rPr sz="1000" b="0" lang="en-GB">
+                <a:solidFill>
+                  <a:schemeClr val="bg1"/>
+                </a:solidFill>
+                <a:latin typeface="Consolas"/>
+              </a:rPr>
+              <a:t>(ggplot(cells)</a:t>
+            </a:r>
+          </a:p>
+          <a:p>
+            <a:pPr algn="l">
+              <a:spcAft>
+                <a:spcPts val="0"/>
+              </a:spcAft>
+            </a:pPr>
+            <a:r>
+              <a:rPr sz="1000" b="0" lang="en-GB">
+                <a:solidFill>
+                  <a:schemeClr val="bg1"/>
+                </a:solidFill>
+                <a:latin typeface="Consolas"/>
+              </a:rPr>
+              <a:t> + aes("discount", "rate",</a:t>
+            </a:r>
+          </a:p>
+          <a:p>
+            <a:pPr algn="l">
+              <a:spcAft>
+                <a:spcPts val="0"/>
+              </a:spcAft>
+            </a:pPr>
+            <a:r>
+              <a:rPr sz="1000" b="0" lang="en-GB">
+                <a:solidFill>
+                  <a:schemeClr val="bg1"/>
+                </a:solidFill>
+                <a:latin typeface="Consolas"/>
+              </a:rPr>
+              <a:t>       colour="factor(personal)")</a:t>
+            </a:r>
+          </a:p>
+          <a:p>
+            <a:pPr algn="l">
+              <a:spcAft>
+                <a:spcPts val="0"/>
+              </a:spcAft>
+            </a:pPr>
+            <a:r>
+              <a:rPr sz="1000" b="0" lang="en-GB">
+                <a:solidFill>
+                  <a:schemeClr val="bg1"/>
+                </a:solidFill>
+                <a:latin typeface="Consolas"/>
+              </a:rPr>
+              <a:t> + geom_line() + geom_point()</a:t>
+            </a:r>
+          </a:p>
+          <a:p>
+            <a:pPr algn="l">
+              <a:spcAft>
+                <a:spcPts val="0"/>
+              </a:spcAft>
+            </a:pPr>
+            <a:r>
+              <a:rPr sz="1000" b="0" lang="en-GB">
+                <a:solidFill>
+                  <a:schemeClr val="bg1"/>
+                </a:solidFill>
+                <a:latin typeface="Consolas"/>
+              </a:rPr>
+              <a:t> + labs(colour="First name"))</a:t>
             </a:r>
           </a:p>
         </p:txBody>
@@ -41960,8 +44573,8 @@
         </p:nvSpPr>
         <p:spPr>
           <a:xfrm>
-            <a:off x="5349240" y="1234440"/>
-            <a:ext cx="1709928" cy="384048"/>
+            <a:off x="4640580" y="1234440"/>
+            <a:ext cx="1709928" cy="310896"/>
           </a:xfrm>
           <a:prstGeom prst="rect">
             <a:avLst/>
@@ -42002,8 +44615,8 @@
         </p:nvSpPr>
         <p:spPr>
           <a:xfrm>
-            <a:off x="5440680" y="1234440"/>
-            <a:ext cx="1527048" cy="384048"/>
+            <a:off x="4732020" y="1234440"/>
+            <a:ext cx="1527048" cy="310896"/>
           </a:xfrm>
           <a:prstGeom prst="rect">
             <a:avLst/>
@@ -42022,12 +44635,12 @@
               </a:spcAft>
             </a:pPr>
             <a:r>
-              <a:rPr sz="1150" b="1" lang="en-GB">
+              <a:rPr sz="1100" b="1" lang="en-GB">
                 <a:solidFill>
                   <a:schemeClr val="bg1"/>
                 </a:solidFill>
               </a:rPr>
-              <a:t>Term</a:t>
+              <a:t>m2</a:t>
             </a:r>
           </a:p>
         </p:txBody>
@@ -42040,8 +44653,8 @@
         </p:nvSpPr>
         <p:spPr>
           <a:xfrm>
-            <a:off x="7086600" y="1234440"/>
-            <a:ext cx="704088" cy="384048"/>
+            <a:off x="6377940" y="1234440"/>
+            <a:ext cx="1115568" cy="310896"/>
           </a:xfrm>
           <a:prstGeom prst="rect">
             <a:avLst/>
@@ -42082,8 +44695,8 @@
         </p:nvSpPr>
         <p:spPr>
           <a:xfrm>
-            <a:off x="7178040" y="1234440"/>
-            <a:ext cx="521208" cy="384048"/>
+            <a:off x="6469380" y="1234440"/>
+            <a:ext cx="932688" cy="310896"/>
           </a:xfrm>
           <a:prstGeom prst="rect">
             <a:avLst/>
@@ -42102,7 +44715,7 @@
               </a:spcAft>
             </a:pPr>
             <a:r>
-              <a:rPr sz="1150" b="1" lang="en-GB">
+              <a:rPr sz="1100" b="1" lang="en-GB">
                 <a:solidFill>
                   <a:schemeClr val="bg1"/>
                 </a:solidFill>
@@ -42120,8 +44733,8 @@
         </p:nvSpPr>
         <p:spPr>
           <a:xfrm>
-            <a:off x="7818120" y="1234440"/>
-            <a:ext cx="868680" cy="384048"/>
+            <a:off x="7520940" y="1234440"/>
+            <a:ext cx="1165860" cy="310896"/>
           </a:xfrm>
           <a:prstGeom prst="rect">
             <a:avLst/>
@@ -42162,8 +44775,8 @@
         </p:nvSpPr>
         <p:spPr>
           <a:xfrm>
-            <a:off x="7909560" y="1234440"/>
-            <a:ext cx="658368" cy="384048"/>
+            <a:off x="7612380" y="1234440"/>
+            <a:ext cx="955548" cy="310896"/>
           </a:xfrm>
           <a:prstGeom prst="rect">
             <a:avLst/>
@@ -42182,7 +44795,7 @@
               </a:spcAft>
             </a:pPr>
             <a:r>
-              <a:rPr sz="1150" b="1" lang="en-GB">
+              <a:rPr sz="1100" b="1" lang="en-GB">
                 <a:solidFill>
                   <a:schemeClr val="bg1"/>
                 </a:solidFill>
@@ -42200,8 +44813,8 @@
         </p:nvSpPr>
         <p:spPr>
           <a:xfrm>
-            <a:off x="5349240" y="1645920"/>
-            <a:ext cx="1709928" cy="384048"/>
+            <a:off x="4640580" y="1572768"/>
+            <a:ext cx="1709928" cy="310896"/>
           </a:xfrm>
           <a:prstGeom prst="rect">
             <a:avLst/>
@@ -42242,8 +44855,8 @@
         </p:nvSpPr>
         <p:spPr>
           <a:xfrm>
-            <a:off x="5440680" y="1645920"/>
-            <a:ext cx="1527048" cy="384048"/>
+            <a:off x="4732020" y="1572768"/>
+            <a:ext cx="1527048" cy="310896"/>
           </a:xfrm>
           <a:prstGeom prst="rect">
             <a:avLst/>
@@ -42262,7 +44875,7 @@
               </a:spcAft>
             </a:pPr>
             <a:r>
-              <a:rPr sz="1150" b="1" lang="en-GB">
+              <a:rPr sz="1100" b="1" lang="en-GB">
                 <a:solidFill>
                   <a:schemeClr val="tx2"/>
                 </a:solidFill>
@@ -42280,8 +44893,8 @@
         </p:nvSpPr>
         <p:spPr>
           <a:xfrm>
-            <a:off x="7086600" y="1645920"/>
-            <a:ext cx="704088" cy="384048"/>
+            <a:off x="6377940" y="1572768"/>
+            <a:ext cx="1115568" cy="310896"/>
           </a:xfrm>
           <a:prstGeom prst="rect">
             <a:avLst/>
@@ -42322,8 +44935,8 @@
         </p:nvSpPr>
         <p:spPr>
           <a:xfrm>
-            <a:off x="7178040" y="1645920"/>
-            <a:ext cx="521208" cy="384048"/>
+            <a:off x="6469380" y="1572768"/>
+            <a:ext cx="932688" cy="310896"/>
           </a:xfrm>
           <a:prstGeom prst="rect">
             <a:avLst/>
@@ -42342,12 +44955,12 @@
               </a:spcAft>
             </a:pPr>
             <a:r>
-              <a:rPr sz="1150" b="0" lang="en-GB">
+              <a:rPr sz="1100" b="0" lang="en-GB">
                 <a:solidFill>
                   <a:schemeClr val="tx1"/>
                 </a:solidFill>
               </a:rPr>
-              <a:t>3.51 %</a:t>
+              <a:t>3.510</a:t>
             </a:r>
           </a:p>
         </p:txBody>
@@ -42360,8 +44973,8 @@
         </p:nvSpPr>
         <p:spPr>
           <a:xfrm>
-            <a:off x="7818120" y="1645920"/>
-            <a:ext cx="868680" cy="384048"/>
+            <a:off x="7520940" y="1572768"/>
+            <a:ext cx="1165860" cy="310896"/>
           </a:xfrm>
           <a:prstGeom prst="rect">
             <a:avLst/>
@@ -42402,8 +45015,8 @@
         </p:nvSpPr>
         <p:spPr>
           <a:xfrm>
-            <a:off x="7909560" y="1645920"/>
-            <a:ext cx="658368" cy="384048"/>
+            <a:off x="7612380" y="1572768"/>
+            <a:ext cx="955548" cy="310896"/>
           </a:xfrm>
           <a:prstGeom prst="rect">
             <a:avLst/>
@@ -42422,12 +45035,12 @@
               </a:spcAft>
             </a:pPr>
             <a:r>
-              <a:rPr sz="1150" b="0" lang="en-GB">
+              <a:rPr sz="1100" b="0" lang="en-GB">
                 <a:solidFill>
                   <a:schemeClr val="tx1"/>
                 </a:solidFill>
               </a:rPr>
-              <a:t>–</a:t>
+              <a:t>&lt; 0.001</a:t>
             </a:r>
           </a:p>
         </p:txBody>
@@ -42440,8 +45053,8 @@
         </p:nvSpPr>
         <p:spPr>
           <a:xfrm>
-            <a:off x="5349240" y="2057400"/>
-            <a:ext cx="1709928" cy="384048"/>
+            <a:off x="4640580" y="1911096"/>
+            <a:ext cx="1709928" cy="310896"/>
           </a:xfrm>
           <a:prstGeom prst="rect">
             <a:avLst/>
@@ -42482,8 +45095,8 @@
         </p:nvSpPr>
         <p:spPr>
           <a:xfrm>
-            <a:off x="5440680" y="2057400"/>
-            <a:ext cx="1527048" cy="384048"/>
+            <a:off x="4732020" y="1911096"/>
+            <a:ext cx="1527048" cy="310896"/>
           </a:xfrm>
           <a:prstGeom prst="rect">
             <a:avLst/>
@@ -42502,7 +45115,7 @@
               </a:spcAft>
             </a:pPr>
             <a:r>
-              <a:rPr sz="1150" b="1" lang="en-GB">
+              <a:rPr sz="1100" b="1" lang="en-GB">
                 <a:solidFill>
                   <a:schemeClr val="tx2"/>
                 </a:solidFill>
@@ -42520,8 +45133,8 @@
         </p:nvSpPr>
         <p:spPr>
           <a:xfrm>
-            <a:off x="7086600" y="2057400"/>
-            <a:ext cx="704088" cy="384048"/>
+            <a:off x="6377940" y="1911096"/>
+            <a:ext cx="1115568" cy="310896"/>
           </a:xfrm>
           <a:prstGeom prst="rect">
             <a:avLst/>
@@ -42562,8 +45175,8 @@
         </p:nvSpPr>
         <p:spPr>
           <a:xfrm>
-            <a:off x="7178040" y="2057400"/>
-            <a:ext cx="521208" cy="384048"/>
+            <a:off x="6469380" y="1911096"/>
+            <a:ext cx="932688" cy="310896"/>
           </a:xfrm>
           <a:prstGeom prst="rect">
             <a:avLst/>
@@ -42582,12 +45195,12 @@
               </a:spcAft>
             </a:pPr>
             <a:r>
-              <a:rPr sz="1150" b="0" lang="en-GB">
+              <a:rPr sz="1100" b="0" lang="en-GB">
                 <a:solidFill>
                   <a:schemeClr val="tx1"/>
                 </a:solidFill>
               </a:rPr>
-              <a:t>+0.40</a:t>
+              <a:t>+0.400</a:t>
             </a:r>
           </a:p>
         </p:txBody>
@@ -42600,8 +45213,8 @@
         </p:nvSpPr>
         <p:spPr>
           <a:xfrm>
-            <a:off x="7818120" y="2057400"/>
-            <a:ext cx="868680" cy="384048"/>
+            <a:off x="7520940" y="1911096"/>
+            <a:ext cx="1165860" cy="310896"/>
           </a:xfrm>
           <a:prstGeom prst="rect">
             <a:avLst/>
@@ -42642,8 +45255,8 @@
         </p:nvSpPr>
         <p:spPr>
           <a:xfrm>
-            <a:off x="7909560" y="2057400"/>
-            <a:ext cx="658368" cy="384048"/>
+            <a:off x="7612380" y="1911096"/>
+            <a:ext cx="955548" cy="310896"/>
           </a:xfrm>
           <a:prstGeom prst="rect">
             <a:avLst/>
@@ -42662,12 +45275,12 @@
               </a:spcAft>
             </a:pPr>
             <a:r>
-              <a:rPr sz="1150" b="0" lang="en-GB">
+              <a:rPr sz="1100" b="0" lang="en-GB">
                 <a:solidFill>
                   <a:schemeClr val="tx1"/>
                 </a:solidFill>
               </a:rPr>
-              <a:t>0.183</a:t>
+              <a:t>0.1834</a:t>
             </a:r>
           </a:p>
         </p:txBody>
@@ -42680,8 +45293,8 @@
         </p:nvSpPr>
         <p:spPr>
           <a:xfrm>
-            <a:off x="5349240" y="2468880"/>
-            <a:ext cx="1709928" cy="384048"/>
+            <a:off x="4640580" y="2249424"/>
+            <a:ext cx="1709928" cy="310896"/>
           </a:xfrm>
           <a:prstGeom prst="rect">
             <a:avLst/>
@@ -42722,8 +45335,8 @@
         </p:nvSpPr>
         <p:spPr>
           <a:xfrm>
-            <a:off x="5440680" y="2468880"/>
-            <a:ext cx="1527048" cy="384048"/>
+            <a:off x="4732020" y="2249424"/>
+            <a:ext cx="1527048" cy="310896"/>
           </a:xfrm>
           <a:prstGeom prst="rect">
             <a:avLst/>
@@ -42742,7 +45355,7 @@
               </a:spcAft>
             </a:pPr>
             <a:r>
-              <a:rPr sz="1150" b="1" lang="en-GB">
+              <a:rPr sz="1100" b="1" lang="en-GB">
                 <a:solidFill>
                   <a:schemeClr val="tx2"/>
                 </a:solidFill>
@@ -42760,8 +45373,8 @@
         </p:nvSpPr>
         <p:spPr>
           <a:xfrm>
-            <a:off x="7086600" y="2468880"/>
-            <a:ext cx="704088" cy="384048"/>
+            <a:off x="6377940" y="2249424"/>
+            <a:ext cx="1115568" cy="310896"/>
           </a:xfrm>
           <a:prstGeom prst="rect">
             <a:avLst/>
@@ -42802,8 +45415,8 @@
         </p:nvSpPr>
         <p:spPr>
           <a:xfrm>
-            <a:off x="7178040" y="2468880"/>
-            <a:ext cx="521208" cy="384048"/>
+            <a:off x="6469380" y="2249424"/>
+            <a:ext cx="932688" cy="310896"/>
           </a:xfrm>
           <a:prstGeom prst="rect">
             <a:avLst/>
@@ -42822,12 +45435,12 @@
               </a:spcAft>
             </a:pPr>
             <a:r>
-              <a:rPr sz="1150" b="0" lang="en-GB">
+              <a:rPr sz="1100" b="0" lang="en-GB">
                 <a:solidFill>
                   <a:schemeClr val="tx1"/>
                 </a:solidFill>
               </a:rPr>
-              <a:t>+1.59</a:t>
+              <a:t>+1.590</a:t>
             </a:r>
           </a:p>
         </p:txBody>
@@ -42840,8 +45453,8 @@
         </p:nvSpPr>
         <p:spPr>
           <a:xfrm>
-            <a:off x="7818120" y="2468880"/>
-            <a:ext cx="868680" cy="384048"/>
+            <a:off x="7520940" y="2249424"/>
+            <a:ext cx="1165860" cy="310896"/>
           </a:xfrm>
           <a:prstGeom prst="rect">
             <a:avLst/>
@@ -42882,8 +45495,8 @@
         </p:nvSpPr>
         <p:spPr>
           <a:xfrm>
-            <a:off x="7909560" y="2468880"/>
-            <a:ext cx="658368" cy="384048"/>
+            <a:off x="7612380" y="2249424"/>
+            <a:ext cx="955548" cy="310896"/>
           </a:xfrm>
           <a:prstGeom prst="rect">
             <a:avLst/>
@@ -42902,7 +45515,7 @@
               </a:spcAft>
             </a:pPr>
             <a:r>
-              <a:rPr sz="1150" b="0" lang="en-GB">
+              <a:rPr sz="1100" b="0" lang="en-GB">
                 <a:solidFill>
                   <a:schemeClr val="tx1"/>
                 </a:solidFill>
@@ -42920,8 +45533,8 @@
         </p:nvSpPr>
         <p:spPr>
           <a:xfrm>
-            <a:off x="5349240" y="2880360"/>
-            <a:ext cx="1709928" cy="384048"/>
+            <a:off x="4640580" y="2587752"/>
+            <a:ext cx="1709928" cy="310896"/>
           </a:xfrm>
           <a:prstGeom prst="rect">
             <a:avLst/>
@@ -42962,8 +45575,8 @@
         </p:nvSpPr>
         <p:spPr>
           <a:xfrm>
-            <a:off x="5440680" y="2880360"/>
-            <a:ext cx="1527048" cy="384048"/>
+            <a:off x="4732020" y="2587752"/>
+            <a:ext cx="1527048" cy="310896"/>
           </a:xfrm>
           <a:prstGeom prst="rect">
             <a:avLst/>
@@ -42982,7 +45595,7 @@
               </a:spcAft>
             </a:pPr>
             <a:r>
-              <a:rPr sz="1150" b="1" lang="en-GB">
+              <a:rPr sz="1100" b="1" lang="en-GB">
                 <a:solidFill>
                   <a:schemeClr val="tx2"/>
                 </a:solidFill>
@@ -43000,8 +45613,8 @@
         </p:nvSpPr>
         <p:spPr>
           <a:xfrm>
-            <a:off x="7086600" y="2880360"/>
-            <a:ext cx="704088" cy="384048"/>
+            <a:off x="6377940" y="2587752"/>
+            <a:ext cx="1115568" cy="310896"/>
           </a:xfrm>
           <a:prstGeom prst="rect">
             <a:avLst/>
@@ -43042,8 +45655,8 @@
         </p:nvSpPr>
         <p:spPr>
           <a:xfrm>
-            <a:off x="7178040" y="2880360"/>
-            <a:ext cx="521208" cy="384048"/>
+            <a:off x="6469380" y="2587752"/>
+            <a:ext cx="932688" cy="310896"/>
           </a:xfrm>
           <a:prstGeom prst="rect">
             <a:avLst/>
@@ -43062,12 +45675,12 @@
               </a:spcAft>
             </a:pPr>
             <a:r>
-              <a:rPr sz="1150" b="1" lang="en-GB">
+              <a:rPr sz="1100" b="1" lang="en-GB">
                 <a:solidFill>
                   <a:schemeClr val="tx2"/>
                 </a:solidFill>
               </a:rPr>
-              <a:t>+1.02</a:t>
+              <a:t>+1.020</a:t>
             </a:r>
           </a:p>
         </p:txBody>
@@ -43080,8 +45693,8 @@
         </p:nvSpPr>
         <p:spPr>
           <a:xfrm>
-            <a:off x="7818120" y="2880360"/>
-            <a:ext cx="868680" cy="384048"/>
+            <a:off x="7520940" y="2587752"/>
+            <a:ext cx="1165860" cy="310896"/>
           </a:xfrm>
           <a:prstGeom prst="rect">
             <a:avLst/>
@@ -43122,8 +45735,8 @@
         </p:nvSpPr>
         <p:spPr>
           <a:xfrm>
-            <a:off x="7909560" y="2880360"/>
-            <a:ext cx="658368" cy="384048"/>
+            <a:off x="7612380" y="2587752"/>
+            <a:ext cx="955548" cy="310896"/>
           </a:xfrm>
           <a:prstGeom prst="rect">
             <a:avLst/>
@@ -43142,12 +45755,12 @@
               </a:spcAft>
             </a:pPr>
             <a:r>
-              <a:rPr sz="1150" b="1" lang="en-GB">
+              <a:rPr sz="1100" b="1" lang="en-GB">
                 <a:solidFill>
                   <a:schemeClr val="tx2"/>
                 </a:solidFill>
               </a:rPr>
-              <a:t>0.017</a:t>
+              <a:t>0.0165</a:t>
             </a:r>
           </a:p>
         </p:txBody>
@@ -43160,8 +45773,8 @@
         </p:nvSpPr>
         <p:spPr>
           <a:xfrm>
-            <a:off x="5349240" y="3310128"/>
-            <a:ext cx="3337560" cy="274320"/>
+            <a:off x="4640580" y="2926080"/>
+            <a:ext cx="4046220" cy="274320"/>
           </a:xfrm>
           <a:prstGeom prst="rect">
             <a:avLst/>
@@ -43192,14 +45805,14 @@
       </p:sp>
       <p:sp>
         <p:nvSpPr>
-          <p:cNvPr id="45" name="Model tip box"/>
+          <p:cNvPr id="45" name="Model with discount row"/>
           <p:cNvSpPr/>
           <p:nvPr/>
         </p:nvSpPr>
         <p:spPr>
           <a:xfrm>
-            <a:off x="457200" y="4206240"/>
-            <a:ext cx="8229600" cy="457200"/>
+            <a:off x="4640580" y="3291840"/>
+            <a:ext cx="4046220" cy="566928"/>
           </a:xfrm>
           <a:prstGeom prst="rect">
             <a:avLst/>
@@ -43232,9 +45845,139 @@
           <a:p/>
         </p:txBody>
       </p:sp>
+      <p:sp>
+        <p:nvSpPr>
+          <p:cNvPr id="46" name="Model with discount bar"/>
+          <p:cNvSpPr/>
+          <p:nvPr/>
+        </p:nvSpPr>
+        <p:spPr>
+          <a:xfrm>
+            <a:off x="4640580" y="3291840"/>
+            <a:ext cx="64008" cy="566928"/>
+          </a:xfrm>
+          <a:prstGeom prst="rect">
+            <a:avLst/>
+          </a:prstGeom>
+          <a:solidFill>
+            <a:schemeClr val="accent1"/>
+          </a:solidFill>
+          <a:ln>
+            <a:noFill/>
+          </a:ln>
+          <a:effectLst/>
+        </p:spPr>
+        <p:style>
+          <a:lnRef idx="1">
+            <a:schemeClr val="accent1"/>
+          </a:lnRef>
+          <a:fillRef idx="3">
+            <a:schemeClr val="accent1"/>
+          </a:fillRef>
+          <a:effectRef idx="2">
+            <a:schemeClr val="accent1"/>
+          </a:effectRef>
+          <a:fontRef idx="minor">
+            <a:schemeClr val="lt1"/>
+          </a:fontRef>
+        </p:style>
+        <p:txBody>
+          <a:bodyPr rtlCol="0" anchor="ctr"/>
+          <a:lstStyle/>
+          <a:p/>
+        </p:txBody>
+      </p:sp>
+      <p:sp>
+        <p:nvSpPr>
+          <p:cNvPr id="47" name="Model with discount text"/>
+          <p:cNvSpPr txBox="1"/>
+          <p:nvPr/>
+        </p:nvSpPr>
+        <p:spPr>
+          <a:xfrm>
+            <a:off x="4841748" y="3291840"/>
+            <a:ext cx="3753612" cy="566928"/>
+          </a:xfrm>
+          <a:prstGeom prst="rect">
+            <a:avLst/>
+          </a:prstGeom>
+          <a:noFill/>
+        </p:spPr>
+        <p:txBody>
+          <a:bodyPr wrap="square" lIns="0" rIns="0" tIns="0" bIns="0" anchor="ctr">
+            <a:noAutofit/>
+          </a:bodyPr>
+          <a:lstStyle/>
+          <a:p>
+            <a:pPr algn="l">
+              <a:spcAft>
+                <a:spcPts val="400"/>
+              </a:spcAft>
+            </a:pPr>
+            <a:r>
+              <a:rPr sz="1200" b="1" lang="en-GB">
+                <a:solidFill>
+                  <a:schemeClr val="tx2"/>
+                </a:solidFill>
+              </a:rPr>
+              <a:t>With the discount </a:t>
+            </a:r>
+            <a:r>
+              <a:rPr sz="1200" b="0" lang="en-GB">
+                <a:solidFill>
+                  <a:schemeClr val="tx1"/>
+                </a:solidFill>
+              </a:rPr>
+              <a:t>the name adds 0.40 + 1.02 = +1.42 pp (slide 24)</a:t>
+            </a:r>
+          </a:p>
+        </p:txBody>
+      </p:sp>
+      <p:sp>
+        <p:nvSpPr>
+          <p:cNvPr id="48" name="Model tip box"/>
+          <p:cNvSpPr/>
+          <p:nvPr/>
+        </p:nvSpPr>
+        <p:spPr>
+          <a:xfrm>
+            <a:off x="4640580" y="4023360"/>
+            <a:ext cx="4046220" cy="411480"/>
+          </a:xfrm>
+          <a:prstGeom prst="rect">
+            <a:avLst/>
+          </a:prstGeom>
+          <a:solidFill>
+            <a:schemeClr val="bg2"/>
+          </a:solidFill>
+          <a:ln>
+            <a:noFill/>
+          </a:ln>
+          <a:effectLst/>
+        </p:spPr>
+        <p:style>
+          <a:lnRef idx="1">
+            <a:schemeClr val="accent1"/>
+          </a:lnRef>
+          <a:fillRef idx="3">
+            <a:schemeClr val="accent1"/>
+          </a:fillRef>
+          <a:effectRef idx="2">
+            <a:schemeClr val="accent1"/>
+          </a:effectRef>
+          <a:fontRef idx="minor">
+            <a:schemeClr val="lt1"/>
+          </a:fontRef>
+        </p:style>
+        <p:txBody>
+          <a:bodyPr rtlCol="0" anchor="ctr"/>
+          <a:lstStyle/>
+          <a:p/>
+        </p:txBody>
+      </p:sp>
       <p:pic>
         <p:nvPicPr>
-          <p:cNvPr id="46" name="Icon Model tip" descr=""/>
+          <p:cNvPr id="49" name="Icon Model tip" descr=""/>
           <p:cNvPicPr>
             <a:picLocks noChangeAspect="1"/>
           </p:cNvPicPr>
@@ -43248,7 +45991,7 @@
         </p:blipFill>
         <p:spPr>
           <a:xfrm>
-            <a:off x="658368" y="4251960"/>
+            <a:off x="4841748" y="4046220"/>
             <a:ext cx="365760" cy="365760"/>
           </a:xfrm>
           <a:prstGeom prst="rect">
@@ -43258,14 +46001,14 @@
       </p:pic>
       <p:sp>
         <p:nvSpPr>
-          <p:cNvPr id="47" name="Model tip text"/>
+          <p:cNvPr id="50" name="Model tip text"/>
           <p:cNvSpPr txBox="1"/>
           <p:nvPr/>
         </p:nvSpPr>
         <p:spPr>
           <a:xfrm>
-            <a:off x="1207008" y="4206240"/>
-            <a:ext cx="7315200" cy="457200"/>
+            <a:off x="5390388" y="4023360"/>
+            <a:ext cx="3131820" cy="411480"/>
           </a:xfrm>
           <a:prstGeom prst="rect">
             <a:avLst/>
@@ -43297,7 +46040,7 @@
                   <a:schemeClr val="tx1"/>
                 </a:solidFill>
               </a:rPr>
-              <a:t>+1.02, p 0.017; the plot shows it as lines that fan out.</a:t>
+              <a:t>+1.02; the lines fan out.</a:t>
             </a:r>
           </a:p>
         </p:txBody>
@@ -44778,7 +47521,7 @@
                   <a:schemeClr val="tx1"/>
                 </a:solidFill>
               </a:rPr>
-              <a:t>the split and the share on mobile per version, in each market (Step 1)</a:t>
+              <a:t>dummies mobile and spain; n, click rate, mobile share per group and market (Step 1)</a:t>
             </a:r>
           </a:p>
         </p:txBody>
@@ -44918,7 +47661,7 @@
                   <a:schemeClr val="tx1"/>
                 </a:solidFill>
               </a:rPr>
-              <a:t>B − A in Germany and in Spain, in pp with 95 % CI; does it differ? (Steps 2, 5)</a:t>
+              <a:t>clicked ~ split per market, pp with 95 % CI; clicked ~ split * spain (Step 2)</a:t>
             </a:r>
           </a:p>
         </p:txBody>
@@ -45058,7 +47801,7 @@
                   <a:schemeClr val="tx1"/>
                 </a:solidFill>
               </a:rPr>
-              <a:t>customers per version for 3.3 % → 3.8 % with 80 % power (Step 2)</a:t>
+              <a:t>customers per version for 3.3 % → 3.8 % with 80 % power, one line (Step 2)</a:t>
             </a:r>
           </a:p>
         </p:txBody>
@@ -45198,7 +47941,7 @@
                   <a:schemeClr val="tx1"/>
                 </a:solidFill>
               </a:rPr>
-              <a:t>cell table, interaction plot, regression; which e-mail should be sent? (Steps 3, 6)</a:t>
+              <a:t>cells, plot, clicked ~ personal * discount, unsubscribes; which e-mail? (Step 3)</a:t>
             </a:r>
           </a:p>
         </p:txBody>
@@ -45721,7 +48464,7 @@
                 </a:solidFill>
                 <a:latin typeface="Consolas"/>
               </a:rPr>
-              <a:t>@ab_exercise.qmd Task 1. Check the split of</a:t>
+              <a:t>@ab_exercise.qmd Task 1. Make the dummies</a:t>
             </a:r>
           </a:p>
           <a:p>
@@ -45737,7 +48480,7 @@
                 </a:solidFill>
                 <a:latin typeface="Consolas"/>
               </a:rPr>
-              <a:t>email_ab.csv in each country: counts,</a:t>
+              <a:t>mobile and spain with polars. Per market:</a:t>
             </a:r>
           </a:p>
           <a:p>
@@ -45753,7 +48496,7 @@
                 </a:solidFill>
                 <a:latin typeface="Consolas"/>
               </a:rPr>
-              <a:t>SRM p-value and the share on mobile</a:t>
+              <a:t>customers, click rate and mobile share</a:t>
             </a:r>
           </a:p>
           <a:p>
@@ -45769,7 +48512,7 @@
                 </a:solidFill>
                 <a:latin typeface="Consolas"/>
               </a:rPr>
-              <a:t>per version.</a:t>
+              <a:t>per split group.</a:t>
             </a:r>
           </a:p>
         </p:txBody>
@@ -45930,7 +48673,7 @@
                 </a:solidFill>
                 <a:latin typeface="Consolas"/>
               </a:rPr>
-              <a:t>Task 2. Estimate B − A in Germany and</a:t>
+              <a:t>Task 2. Fit clicked ~ split in Germany and</a:t>
             </a:r>
           </a:p>
           <a:p>
@@ -45946,7 +48689,7 @@
                 </a:solidFill>
                 <a:latin typeface="Consolas"/>
               </a:rPr>
-              <a:t>in Spain in pp with a 95 % CI. Do the</a:t>
+              <a:t>in Spain: B − A in pp with p and 95 % CI.</a:t>
             </a:r>
           </a:p>
           <a:p>
@@ -45962,7 +48705,7 @@
                 </a:solidFill>
                 <a:latin typeface="Consolas"/>
               </a:rPr>
-              <a:t>markets differ, and how would you</a:t>
+              <a:t>Then fit clicked ~ split * spain: do the</a:t>
             </a:r>
           </a:p>
           <a:p>
@@ -45978,7 +48721,7 @@
                 </a:solidFill>
                 <a:latin typeface="Consolas"/>
               </a:rPr>
-              <a:t>test that?</a:t>
+              <a:t>markets differ?</a:t>
             </a:r>
           </a:p>
         </p:txBody>
@@ -46171,7 +48914,7 @@
                 </a:solidFill>
                 <a:latin typeface="Consolas"/>
               </a:rPr>
-              <a:t>Explain power in one sentence for</a:t>
+              <a:t>One line of code; explain power in one</a:t>
             </a:r>
           </a:p>
           <a:p>
@@ -46187,7 +48930,7 @@
                 </a:solidFill>
                 <a:latin typeface="Consolas"/>
               </a:rPr>
-              <a:t>a manager.</a:t>
+              <a:t>sentence for a manager.</a:t>
             </a:r>
           </a:p>
         </p:txBody>
@@ -46348,7 +49091,7 @@
                 </a:solidFill>
                 <a:latin typeface="Consolas"/>
               </a:rPr>
-              <a:t>Task 4. Fit clicked ~ personal * discount.</a:t>
+              <a:t>Task 4. Fit clicked ~ personal * discount</a:t>
             </a:r>
           </a:p>
           <a:p>
@@ -46364,7 +49107,7 @@
                 </a:solidFill>
                 <a:latin typeface="Consolas"/>
               </a:rPr>
-              <a:t>Explain each coefficient in pp and</a:t>
+              <a:t>and unsubscribed ~ personal * discount.</a:t>
             </a:r>
           </a:p>
           <a:p>
@@ -46380,7 +49123,7 @@
                 </a:solidFill>
                 <a:latin typeface="Consolas"/>
               </a:rPr>
-              <a:t>recommend one e-mail; check the</a:t>
+              <a:t>Explain each coefficient in pp and</a:t>
             </a:r>
           </a:p>
           <a:p>
@@ -46396,7 +49139,7 @@
                 </a:solidFill>
                 <a:latin typeface="Consolas"/>
               </a:rPr>
-              <a:t>unsubscribes too.</a:t>
+              <a:t>recommend one e-mail.</a:t>
             </a:r>
           </a:p>
         </p:txBody>
@@ -50349,7 +53092,7 @@
         </p:nvGraphicFramePr>
         <p:xfrm>
           <a:off x="457200" y="1234440"/>
-          <a:ext cx="8229600" cy="2551176"/>
+          <a:ext cx="8229600" cy="2834640"/>
         </p:xfrm>
         <a:graphic>
           <a:graphicData uri="http://schemas.openxmlformats.org/drawingml/2006/table">
@@ -50623,6 +53366,62 @@
                       <a:r>
                         <a:rPr sz="1150" lang="en-GB"/>
                         <a:t>A</a:t>
+                      </a:r>
+                    </a:p>
+                  </a:txBody>
+                  <a:tcPr marT="22000" marB="22000"/>
+                </a:tc>
+                <a:tc>
+                  <a:txBody>
+                    <a:bodyPr/>
+                    <a:lstStyle/>
+                    <a:p>
+                      <a:pPr algn="r"/>
+                      <a:r>
+                        <a:rPr sz="1150" lang="en-GB"/>
+                        <a:t>–</a:t>
+                      </a:r>
+                    </a:p>
+                  </a:txBody>
+                  <a:tcPr marT="22000" marB="22000"/>
+                </a:tc>
+              </a:tr>
+              <a:tr h="283464">
+                <a:tc>
+                  <a:txBody>
+                    <a:bodyPr/>
+                    <a:lstStyle/>
+                    <a:p>
+                      <a:r>
+                        <a:rPr sz="1150" b="1" lang="en-GB"/>
+                        <a:t>split</a:t>
+                      </a:r>
+                    </a:p>
+                  </a:txBody>
+                  <a:tcPr marT="22000" marB="22000"/>
+                </a:tc>
+                <a:tc>
+                  <a:txBody>
+                    <a:bodyPr/>
+                    <a:lstStyle/>
+                    <a:p>
+                      <a:r>
+                        <a:rPr sz="1150" lang="en-GB"/>
+                        <a:t>dummy: 0 = A, 1 = B; A/B test only</a:t>
+                      </a:r>
+                    </a:p>
+                  </a:txBody>
+                  <a:tcPr marT="22000" marB="22000"/>
+                </a:tc>
+                <a:tc>
+                  <a:txBody>
+                    <a:bodyPr/>
+                    <a:lstStyle/>
+                    <a:p>
+                      <a:pPr algn="r"/>
+                      <a:r>
+                        <a:rPr sz="1150" lang="en-GB"/>
+                        <a:t>0</a:t>
                       </a:r>
                     </a:p>
                   </a:txBody>
